--- a/decks/the-third-wheel-lesson-v2.pptx
+++ b/decks/the-third-wheel-lesson-v2.pptx
@@ -16,6 +16,7 @@
     <p:sldId id="264" r:id="rId16"/>
     <p:sldId id="265" r:id="rId17"/>
     <p:sldId id="266" r:id="rId18"/>
+    <p:sldId id="267" r:id="rId19"/>
   </p:sldIdLst>
   <p:sldSz cx="12192000" cy="6858000" type="screen4x3"/>
   <p:notesSz cx="6858000" cy="9144000"/>
@@ -512,7 +513,7 @@
           <a:lstStyle/>
           <a:p>
             <a:r>
-              <a:t>This page and the next three are hidden. They stay in the deck for you and are skipped when you present.</a:t>
+              <a:t>This page is hidden and skipped when you present. The full plan, care notes and research are on the hidden pages at the end of the deck, if you want them.</a:t>
             </a:r>
           </a:p>
         </p:txBody>
@@ -1003,6 +1004,76 @@
           <a:p>
             <a:r>
               <a:t>2 MINUTES. Mention the online moves: muting stories notifies nobody and stops the replays, and not knowing where everyone is often feels easier than watching the map. Add widening your base: friends in several places, like a team, a job, a cousin, a neighbor, or an online group, mean one place changing knocks you over less. Share the student page link. It has the accident, drift, or on purpose check, the moves, a private check-in, and when to get more help. Say plainly: if someone keeps leaving you out on purpose, or you've felt low or alone for weeks, a counselor can help, and it isn't your fault.</a:t>
+            </a:r>
+          </a:p>
+        </p:txBody>
+      </p:sp>
+      <p:sp>
+        <p:nvSpPr>
+          <p:cNvPr id="4" name="Slide Number Placeholder 3"/>
+          <p:cNvSpPr>
+            <a:spLocks noGrp="1"/>
+          </p:cNvSpPr>
+          <p:nvPr>
+            <p:ph type="sldNum" idx="5" sz="quarter"/>
+          </p:nvPr>
+        </p:nvSpPr>
+        <p:spPr/>
+      </p:sp>
+    </p:spTree>
+  </p:cSld>
+  <p:clrMapOvr>
+    <a:masterClrMapping/>
+  </p:clrMapOvr>
+</p:notes>
+</file>
+
+<file path=ppt/notesSlides/notesSlide9.xml><?xml version="1.0" encoding="utf-8"?>
+<p:notes xmlns:a="http://schemas.openxmlformats.org/drawingml/2006/main" xmlns:p="http://schemas.openxmlformats.org/presentationml/2006/main" xmlns:r="http://schemas.openxmlformats.org/officeDocument/2006/relationships">
+  <p:cSld>
+    <p:spTree>
+      <p:nvGrpSpPr>
+        <p:cNvPr id="1" name=""/>
+        <p:cNvGrpSpPr/>
+        <p:nvPr/>
+      </p:nvGrpSpPr>
+      <p:grpSpPr>
+        <a:xfrm>
+          <a:off x="0" y="0"/>
+          <a:ext cx="0" cy="0"/>
+          <a:chOff x="0" y="0"/>
+          <a:chExt cx="0" cy="0"/>
+        </a:xfrm>
+      </p:grpSpPr>
+      <p:sp>
+        <p:nvSpPr>
+          <p:cNvPr id="2" name="Slide Image Placeholder 1"/>
+          <p:cNvSpPr>
+            <a:spLocks noGrp="1"/>
+          </p:cNvSpPr>
+          <p:nvPr>
+            <p:ph type="sldImg" idx="2"/>
+          </p:nvPr>
+        </p:nvSpPr>
+        <p:spPr/>
+      </p:sp>
+      <p:sp>
+        <p:nvSpPr>
+          <p:cNvPr id="3" name="Notes Placeholder 2"/>
+          <p:cNvSpPr>
+            <a:spLocks noGrp="1"/>
+          </p:cNvSpPr>
+          <p:nvPr>
+            <p:ph type="body" idx="3" sz="quarter"/>
+          </p:nvPr>
+        </p:nvSpPr>
+        <p:spPr/>
+        <p:txBody>
+          <a:bodyPr/>
+          <a:lstStyle/>
+          <a:p>
+            <a:r>
+              <a:t>If you want more: this page and the next three are hidden and skipped when you present.</a:t>
             </a:r>
           </a:p>
         </p:txBody>
@@ -4094,7 +4165,7 @@
                 </a:solidFill>
                 <a:latin typeface="Inter Tight"/>
               </a:rPr>
-              <a:t>TEACHER PAGE  ·  skipped when you present  ·  Lesson plan</a:t>
+              <a:t>TEACHER PAGE  ·  skipped when you present  ·  Before you start</a:t>
             </a:r>
           </a:p>
         </p:txBody>
@@ -4185,8 +4256,8 @@
         </p:nvSpPr>
         <p:spPr>
           <a:xfrm>
-            <a:off x="548640" y="1828800"/>
-            <a:ext cx="5120640" cy="4389120"/>
+            <a:off x="548640" y="2011680"/>
+            <a:ext cx="11064240" cy="4206240"/>
           </a:xfrm>
           <a:prstGeom prst="rect">
             <a:avLst/>
@@ -4201,43 +4272,43 @@
           <a:p>
             <a:pPr algn="l">
               <a:spcAft>
-                <a:spcPts val="675"/>
-              </a:spcAft>
-            </a:pPr>
-            <a:r>
-              <a:rPr sz="1100" b="1" i="0">
+                <a:spcPts val="900"/>
+              </a:spcAft>
+            </a:pPr>
+            <a:r>
+              <a:rPr sz="1200" b="1" i="0">
                 <a:solidFill>
                   <a:srgbClr val="0B2D5B"/>
                 </a:solidFill>
                 <a:latin typeface="Inter Tight"/>
               </a:rPr>
-              <a:t>GOAL</a:t>
-            </a:r>
-          </a:p>
-          <a:p>
-            <a:pPr algn="l">
-              <a:spcAft>
-                <a:spcPts val="675"/>
-              </a:spcAft>
-            </a:pPr>
-            <a:r>
-              <a:rPr sz="1500" b="0" i="0">
+              <a:t>BEFORE YOU START</a:t>
+            </a:r>
+          </a:p>
+          <a:p>
+            <a:pPr algn="l">
+              <a:spcAft>
+                <a:spcPts val="900"/>
+              </a:spcAft>
+            </a:pPr>
+            <a:r>
+              <a:rPr sz="2000" b="0" i="0">
                 <a:solidFill>
                   <a:srgbClr val="1C1B19"/>
                 </a:solidFill>
                 <a:latin typeface="Source Serif 4"/>
               </a:rPr>
-              <a:t>Students can explain why small exclusions hurt and why the first read on them is often off, sort a situation into accident, drift, or on purpose, and draft one honest sentence they could say to a friend. Nobody names real people or plans.</a:t>
-            </a:r>
-          </a:p>
-          <a:p>
-            <a:pPr algn="l">
-              <a:spcAft>
-                <a:spcPts val="675"/>
-              </a:spcAft>
-            </a:pPr>
-            <a:r>
-              <a:rPr sz="1500" b="0" i="0">
+              <a:t>Students learn why small exclusions hurt and why the first read is often off, then sort a situation into accident, drift, or on purpose. Bring scrap paper and index cards, count off for pairs so nobody is odd one out, and take deliberate, repeated exclusion to a counselor.</a:t>
+            </a:r>
+          </a:p>
+          <a:p>
+            <a:pPr algn="l">
+              <a:spcAft>
+                <a:spcPts val="900"/>
+              </a:spcAft>
+            </a:pPr>
+            <a:r>
+              <a:rPr sz="2000" b="0" i="0">
                 <a:solidFill>
                   <a:srgbClr val="1C1B19"/>
                 </a:solidFill>
@@ -4249,277 +4320,33 @@
           <a:p>
             <a:pPr algn="l">
               <a:spcAft>
-                <a:spcPts val="675"/>
-              </a:spcAft>
-            </a:pPr>
-            <a:r>
-              <a:rPr sz="1100" b="1" i="0">
+                <a:spcPts val="900"/>
+              </a:spcAft>
+            </a:pPr>
+            <a:r>
+              <a:rPr sz="1200" b="1" i="0">
                 <a:solidFill>
                   <a:srgbClr val="0B2D5B"/>
                 </a:solidFill>
                 <a:latin typeface="Inter Tight"/>
               </a:rPr>
-              <a:t>MATERIALS</a:t>
-            </a:r>
-          </a:p>
-          <a:p>
-            <a:pPr algn="l">
-              <a:spcAft>
-                <a:spcPts val="675"/>
-              </a:spcAft>
-            </a:pPr>
-            <a:r>
-              <a:rPr sz="1500" b="0" i="0">
+              <a:t>EVERY STUDENT IN THE ROOM</a:t>
+            </a:r>
+          </a:p>
+          <a:p>
+            <a:pPr algn="l">
+              <a:spcAft>
+                <a:spcPts val="900"/>
+              </a:spcAft>
+            </a:pPr>
+            <a:r>
+              <a:rPr sz="2000" b="0" i="0">
                 <a:solidFill>
                   <a:srgbClr val="1C1B19"/>
                 </a:solidFill>
                 <a:latin typeface="Source Serif 4"/>
               </a:rPr>
-              <a:t>Scrap paper and a hat or bag for the anonymous guess</a:t>
-            </a:r>
-          </a:p>
-          <a:p>
-            <a:pPr algn="l">
-              <a:spcAft>
-                <a:spcPts val="675"/>
-              </a:spcAft>
-            </a:pPr>
-            <a:r>
-              <a:rPr sz="1500" b="0" i="0">
-                <a:solidFill>
-                  <a:srgbClr val="1C1B19"/>
-                </a:solidFill>
-                <a:latin typeface="Source Serif 4"/>
-              </a:rPr>
-              <a:t>Index cards for the private honest sentence</a:t>
-            </a:r>
-          </a:p>
-          <a:p>
-            <a:pPr algn="l">
-              <a:spcAft>
-                <a:spcPts val="675"/>
-              </a:spcAft>
-            </a:pPr>
-            <a:r>
-              <a:rPr sz="1500" b="0" i="0">
-                <a:solidFill>
-                  <a:srgbClr val="1C1B19"/>
-                </a:solidFill>
-                <a:latin typeface="Source Serif 4"/>
-              </a:rPr>
-              <a:t>The student page link (last slide) to share after advisory</a:t>
-            </a:r>
-          </a:p>
-        </p:txBody>
-      </p:sp>
-      <p:sp>
-        <p:nvSpPr>
-          <p:cNvPr id="7" name="TextBox 6"/>
-          <p:cNvSpPr txBox="1"/>
-          <p:nvPr/>
-        </p:nvSpPr>
-        <p:spPr>
-          <a:xfrm>
-            <a:off x="6126480" y="1828800"/>
-            <a:ext cx="5486400" cy="4389120"/>
-          </a:xfrm>
-          <a:prstGeom prst="rect">
-            <a:avLst/>
-          </a:prstGeom>
-          <a:noFill/>
-        </p:spPr>
-        <p:txBody>
-          <a:bodyPr wrap="square" anchor="t" lIns="0" rIns="0" tIns="0" bIns="0">
-            <a:spAutoFit/>
-          </a:bodyPr>
-          <a:lstStyle/>
-          <a:p>
-            <a:pPr algn="l">
-              <a:spcAft>
-                <a:spcPts val="630"/>
-              </a:spcAft>
-            </a:pPr>
-            <a:r>
-              <a:rPr sz="1100" b="1" i="0">
-                <a:solidFill>
-                  <a:srgbClr val="0B2D5B"/>
-                </a:solidFill>
-                <a:latin typeface="Inter Tight"/>
-              </a:rPr>
-              <a:t>FLOW</a:t>
-            </a:r>
-          </a:p>
-          <a:p>
-            <a:pPr algn="l">
-              <a:spcAft>
-                <a:spcPts val="630"/>
-              </a:spcAft>
-            </a:pPr>
-            <a:r>
-              <a:rPr sz="1300" b="1" i="0">
-                <a:solidFill>
-                  <a:srgbClr val="F47B20"/>
-                </a:solidFill>
-                <a:latin typeface="Inter Tight"/>
-              </a:rPr>
-              <a:t>5 min   </a:t>
-            </a:r>
-            <a:r>
-              <a:rPr sz="1400" b="0" i="0">
-                <a:solidFill>
-                  <a:srgbClr val="1C1B19"/>
-                </a:solidFill>
-                <a:latin typeface="Source Serif 4"/>
-              </a:rPr>
-              <a:t>The guess (anonymous cards)</a:t>
-            </a:r>
-          </a:p>
-          <a:p>
-            <a:pPr algn="l">
-              <a:spcAft>
-                <a:spcPts val="630"/>
-              </a:spcAft>
-            </a:pPr>
-            <a:r>
-              <a:rPr sz="1300" b="1" i="0">
-                <a:solidFill>
-                  <a:srgbClr val="F47B20"/>
-                </a:solidFill>
-                <a:latin typeface="Inter Tight"/>
-              </a:rPr>
-              <a:t>5 min   </a:t>
-            </a:r>
-            <a:r>
-              <a:rPr sz="1400" b="0" i="0">
-                <a:solidFill>
-                  <a:srgbClr val="1C1B19"/>
-                </a:solidFill>
-                <a:latin typeface="Source Serif 4"/>
-              </a:rPr>
-              <a:t>What exclusion does, and check first</a:t>
-            </a:r>
-          </a:p>
-          <a:p>
-            <a:pPr algn="l">
-              <a:spcAft>
-                <a:spcPts val="630"/>
-              </a:spcAft>
-            </a:pPr>
-            <a:r>
-              <a:rPr sz="1300" b="1" i="0">
-                <a:solidFill>
-                  <a:srgbClr val="F47B20"/>
-                </a:solidFill>
-                <a:latin typeface="Inter Tight"/>
-              </a:rPr>
-              <a:t>5 min   </a:t>
-            </a:r>
-            <a:r>
-              <a:rPr sz="1400" b="0" i="0">
-                <a:solidFill>
-                  <a:srgbClr val="1C1B19"/>
-                </a:solidFill>
-                <a:latin typeface="Source Serif 4"/>
-              </a:rPr>
-              <a:t>Accident, drift, or on purpose? (pairs)</a:t>
-            </a:r>
-          </a:p>
-          <a:p>
-            <a:pPr algn="l">
-              <a:spcAft>
-                <a:spcPts val="630"/>
-              </a:spcAft>
-            </a:pPr>
-            <a:r>
-              <a:rPr sz="1300" b="1" i="0">
-                <a:solidFill>
-                  <a:srgbClr val="F47B20"/>
-                </a:solidFill>
-                <a:latin typeface="Inter Tight"/>
-              </a:rPr>
-              <a:t>3 min   </a:t>
-            </a:r>
-            <a:r>
-              <a:rPr sz="1400" b="0" i="0">
-                <a:solidFill>
-                  <a:srgbClr val="1C1B19"/>
-                </a:solidFill>
-                <a:latin typeface="Source Serif 4"/>
-              </a:rPr>
-              <a:t>One honest sentence (private)</a:t>
-            </a:r>
-          </a:p>
-          <a:p>
-            <a:pPr algn="l">
-              <a:spcAft>
-                <a:spcPts val="630"/>
-              </a:spcAft>
-            </a:pPr>
-            <a:r>
-              <a:rPr sz="1300" b="1" i="0">
-                <a:solidFill>
-                  <a:srgbClr val="F47B20"/>
-                </a:solidFill>
-                <a:latin typeface="Inter Tight"/>
-              </a:rPr>
-              <a:t>2 min   </a:t>
-            </a:r>
-            <a:r>
-              <a:rPr sz="1400" b="0" i="0">
-                <a:solidFill>
-                  <a:srgbClr val="1C1B19"/>
-                </a:solidFill>
-                <a:latin typeface="Source Serif 4"/>
-              </a:rPr>
-              <a:t>One move and the student page</a:t>
-            </a:r>
-          </a:p>
-          <a:p>
-            <a:pPr algn="l">
-              <a:spcAft>
-                <a:spcPts val="630"/>
-              </a:spcAft>
-            </a:pPr>
-            <a:r>
-              <a:rPr sz="1400" b="0" i="0">
-                <a:solidFill>
-                  <a:srgbClr val="1C1B19"/>
-                </a:solidFill>
-                <a:latin typeface="Source Serif 4"/>
-              </a:rPr>
-              <a:t/>
-            </a:r>
-          </a:p>
-          <a:p>
-            <a:pPr algn="l">
-              <a:spcAft>
-                <a:spcPts val="630"/>
-              </a:spcAft>
-            </a:pPr>
-            <a:r>
-              <a:rPr sz="1100" b="1" i="0">
-                <a:solidFill>
-                  <a:srgbClr val="0B2D5B"/>
-                </a:solidFill>
-                <a:latin typeface="Inter Tight"/>
-              </a:rPr>
-              <a:t>SHORT ON TIME (10-MINUTE CHECK-IN)</a:t>
-            </a:r>
-          </a:p>
-          <a:p>
-            <a:pPr algn="l">
-              <a:spcAft>
-                <a:spcPts val="630"/>
-              </a:spcAft>
-            </a:pPr>
-            <a:r>
-              <a:rPr sz="1400" b="0" i="0">
-                <a:solidFill>
-                  <a:srgbClr val="1C1B19"/>
-                </a:solidFill>
-                <a:latin typeface="Source Serif 4"/>
-              </a:rPr>
-              <a:t>The guess (3), accident, drift, or on purpose with one scenario (3), one honest sentence (2), one move and the student page (2).</a:t>
+              <a:t>Family rules, faith, money, rides and two-home weekends all mean some students miss more plans, and Nadia's partner can be any gender.</a:t>
             </a:r>
           </a:p>
         </p:txBody>
@@ -4533,6 +4360,1660 @@
 </file>
 
 <file path=ppt/slides/slide10.xml><?xml version="1.0" encoding="utf-8"?>
+<p:sld xmlns:a="http://schemas.openxmlformats.org/drawingml/2006/main" xmlns:p="http://schemas.openxmlformats.org/presentationml/2006/main" xmlns:r="http://schemas.openxmlformats.org/officeDocument/2006/relationships" show="0">
+  <p:cSld>
+    <p:bg>
+      <p:bgPr>
+        <a:solidFill>
+          <a:srgbClr val="EEEBE4"/>
+        </a:solidFill>
+        <a:effectLst/>
+      </p:bgPr>
+    </p:bg>
+    <p:spTree>
+      <p:nvGrpSpPr>
+        <p:cNvPr id="1" name=""/>
+        <p:cNvGrpSpPr/>
+        <p:nvPr/>
+      </p:nvGrpSpPr>
+      <p:grpSpPr/>
+      <p:sp>
+        <p:nvSpPr>
+          <p:cNvPr id="2" name="Rectangle 1"/>
+          <p:cNvSpPr/>
+          <p:nvPr/>
+        </p:nvSpPr>
+        <p:spPr>
+          <a:xfrm>
+            <a:off x="0" y="0"/>
+            <a:ext cx="12191695" cy="384048"/>
+          </a:xfrm>
+          <a:prstGeom prst="rect">
+            <a:avLst/>
+          </a:prstGeom>
+          <a:solidFill>
+            <a:srgbClr val="0B2D5B"/>
+          </a:solidFill>
+          <a:ln>
+            <a:noFill/>
+          </a:ln>
+          <a:effectLst/>
+        </p:spPr>
+        <p:style>
+          <a:lnRef idx="1">
+            <a:schemeClr val="accent1"/>
+          </a:lnRef>
+          <a:fillRef idx="3">
+            <a:schemeClr val="accent1"/>
+          </a:fillRef>
+          <a:effectRef idx="2">
+            <a:schemeClr val="accent1"/>
+          </a:effectRef>
+          <a:fontRef idx="minor">
+            <a:schemeClr val="lt1"/>
+          </a:fontRef>
+        </p:style>
+        <p:txBody>
+          <a:bodyPr rtlCol="0" anchor="ctr"/>
+          <a:lstStyle/>
+          <a:p>
+            <a:pPr algn="ctr"/>
+          </a:p>
+        </p:txBody>
+      </p:sp>
+      <p:sp>
+        <p:nvSpPr>
+          <p:cNvPr id="3" name="TextBox 2"/>
+          <p:cNvSpPr txBox="1"/>
+          <p:nvPr/>
+        </p:nvSpPr>
+        <p:spPr>
+          <a:xfrm>
+            <a:off x="548640" y="100584"/>
+            <a:ext cx="10972800" cy="274320"/>
+          </a:xfrm>
+          <a:prstGeom prst="rect">
+            <a:avLst/>
+          </a:prstGeom>
+          <a:noFill/>
+        </p:spPr>
+        <p:txBody>
+          <a:bodyPr wrap="square" anchor="t" lIns="0" rIns="0" tIns="0" bIns="0">
+            <a:spAutoFit/>
+          </a:bodyPr>
+          <a:lstStyle/>
+          <a:p>
+            <a:pPr algn="l">
+              <a:spcAft>
+                <a:spcPts val="495"/>
+              </a:spcAft>
+            </a:pPr>
+            <a:r>
+              <a:rPr sz="1100" b="1" i="0">
+                <a:solidFill>
+                  <a:srgbClr val="FFFFFF"/>
+                </a:solidFill>
+                <a:latin typeface="Inter Tight"/>
+              </a:rPr>
+              <a:t>TEACHER PAGE  ·  skipped when you present  ·  Before you teach</a:t>
+            </a:r>
+          </a:p>
+        </p:txBody>
+      </p:sp>
+      <p:sp>
+        <p:nvSpPr>
+          <p:cNvPr id="4" name="TextBox 3"/>
+          <p:cNvSpPr txBox="1"/>
+          <p:nvPr/>
+        </p:nvSpPr>
+        <p:spPr>
+          <a:xfrm>
+            <a:off x="548640" y="685800"/>
+            <a:ext cx="10972800" cy="640080"/>
+          </a:xfrm>
+          <a:prstGeom prst="rect">
+            <a:avLst/>
+          </a:prstGeom>
+          <a:noFill/>
+        </p:spPr>
+        <p:txBody>
+          <a:bodyPr wrap="square" anchor="t" lIns="0" rIns="0" tIns="0" bIns="0">
+            <a:spAutoFit/>
+          </a:bodyPr>
+          <a:lstStyle/>
+          <a:p>
+            <a:pPr algn="l">
+              <a:spcAft>
+                <a:spcPts val="1350"/>
+              </a:spcAft>
+            </a:pPr>
+            <a:r>
+              <a:rPr sz="3000" b="1" i="0">
+                <a:solidFill>
+                  <a:srgbClr val="1C1B19"/>
+                </a:solidFill>
+                <a:latin typeface="Source Serif 4"/>
+              </a:rPr>
+              <a:t>Before you teach</a:t>
+            </a:r>
+          </a:p>
+        </p:txBody>
+      </p:sp>
+      <p:sp>
+        <p:nvSpPr>
+          <p:cNvPr id="5" name="TextBox 4"/>
+          <p:cNvSpPr txBox="1"/>
+          <p:nvPr/>
+        </p:nvSpPr>
+        <p:spPr>
+          <a:xfrm>
+            <a:off x="548640" y="1463040"/>
+            <a:ext cx="5394960" cy="4937760"/>
+          </a:xfrm>
+          <a:prstGeom prst="rect">
+            <a:avLst/>
+          </a:prstGeom>
+          <a:noFill/>
+        </p:spPr>
+        <p:txBody>
+          <a:bodyPr wrap="square" anchor="t" lIns="0" rIns="0" tIns="0" bIns="0">
+            <a:spAutoFit/>
+          </a:bodyPr>
+          <a:lstStyle/>
+          <a:p>
+            <a:pPr algn="l">
+              <a:spcAft>
+                <a:spcPts val="585"/>
+              </a:spcAft>
+            </a:pPr>
+            <a:r>
+              <a:rPr sz="1500" b="1" i="0">
+                <a:solidFill>
+                  <a:srgbClr val="1C1B19"/>
+                </a:solidFill>
+                <a:latin typeface="Source Serif 4"/>
+              </a:rPr>
+              <a:t>It may be happening in this circle.</a:t>
+            </a:r>
+          </a:p>
+          <a:p>
+            <a:pPr algn="l">
+              <a:spcAft>
+                <a:spcPts val="585"/>
+              </a:spcAft>
+            </a:pPr>
+            <a:r>
+              <a:rPr sz="1300" b="0" i="0">
+                <a:solidFill>
+                  <a:srgbClr val="1C1B19"/>
+                </a:solidFill>
+                <a:latin typeface="Source Serif 4"/>
+              </a:rPr>
+              <a:t>Advisory groups are small, and the student on the edge of a friend group may be sitting near that group. Don't ask for real examples, names, or plans. Use only the slide scenarios.</a:t>
+            </a:r>
+          </a:p>
+          <a:p>
+            <a:pPr algn="l">
+              <a:spcAft>
+                <a:spcPts val="585"/>
+              </a:spcAft>
+            </a:pPr>
+            <a:r>
+              <a:rPr sz="1300" b="0" i="0">
+                <a:solidFill>
+                  <a:srgbClr val="1C1B19"/>
+                </a:solidFill>
+                <a:latin typeface="Source Serif 4"/>
+              </a:rPr>
+              <a:t/>
+            </a:r>
+          </a:p>
+          <a:p>
+            <a:pPr algn="l">
+              <a:spcAft>
+                <a:spcPts val="585"/>
+              </a:spcAft>
+            </a:pPr>
+            <a:r>
+              <a:rPr sz="1500" b="1" i="0">
+                <a:solidFill>
+                  <a:srgbClr val="1C1B19"/>
+                </a:solidFill>
+                <a:latin typeface="Source Serif 4"/>
+              </a:rPr>
+              <a:t>Make pairing easy.</a:t>
+            </a:r>
+          </a:p>
+          <a:p>
+            <a:pPr algn="l">
+              <a:spcAft>
+                <a:spcPts val="585"/>
+              </a:spcAft>
+            </a:pPr>
+            <a:r>
+              <a:rPr sz="1300" b="0" i="0">
+                <a:solidFill>
+                  <a:srgbClr val="1C1B19"/>
+                </a:solidFill>
+                <a:latin typeface="Source Serif 4"/>
+              </a:rPr>
+              <a:t>Being the odd one out is the topic, so don't let students choose partners. Count off, and join a pair yourself if the numbers are uneven.</a:t>
+            </a:r>
+          </a:p>
+          <a:p>
+            <a:pPr algn="l">
+              <a:spcAft>
+                <a:spcPts val="585"/>
+              </a:spcAft>
+            </a:pPr>
+            <a:r>
+              <a:rPr sz="1300" b="0" i="0">
+                <a:solidFill>
+                  <a:srgbClr val="1C1B19"/>
+                </a:solidFill>
+                <a:latin typeface="Source Serif 4"/>
+              </a:rPr>
+              <a:t/>
+            </a:r>
+          </a:p>
+          <a:p>
+            <a:pPr algn="l">
+              <a:spcAft>
+                <a:spcPts val="585"/>
+              </a:spcAft>
+            </a:pPr>
+            <a:r>
+              <a:rPr sz="1500" b="1" i="0">
+                <a:solidFill>
+                  <a:srgbClr val="1C1B19"/>
+                </a:solidFill>
+                <a:latin typeface="Source Serif 4"/>
+              </a:rPr>
+              <a:t>On purpose, again and again, is bullying.</a:t>
+            </a:r>
+          </a:p>
+          <a:p>
+            <a:pPr algn="l">
+              <a:spcAft>
+                <a:spcPts val="585"/>
+              </a:spcAft>
+            </a:pPr>
+            <a:r>
+              <a:rPr sz="1300" b="0" i="0">
+                <a:solidFill>
+                  <a:srgbClr val="1C1B19"/>
+                </a:solidFill>
+                <a:latin typeface="Source Serif 4"/>
+              </a:rPr>
+              <a:t>If a student describes being deliberately left out, rumors, or someone telling others not to hang out with them, thank them, move on, and follow up privately that day with a counselor or dean.</a:t>
+            </a:r>
+          </a:p>
+          <a:p>
+            <a:pPr algn="l">
+              <a:spcAft>
+                <a:spcPts val="585"/>
+              </a:spcAft>
+            </a:pPr>
+            <a:r>
+              <a:rPr sz="1300" b="0" i="0">
+                <a:solidFill>
+                  <a:srgbClr val="1C1B19"/>
+                </a:solidFill>
+                <a:latin typeface="Source Serif 4"/>
+              </a:rPr>
+              <a:t/>
+            </a:r>
+          </a:p>
+        </p:txBody>
+      </p:sp>
+      <p:sp>
+        <p:nvSpPr>
+          <p:cNvPr id="6" name="TextBox 5"/>
+          <p:cNvSpPr txBox="1"/>
+          <p:nvPr/>
+        </p:nvSpPr>
+        <p:spPr>
+          <a:xfrm>
+            <a:off x="6217920" y="1463040"/>
+            <a:ext cx="5394960" cy="4937760"/>
+          </a:xfrm>
+          <a:prstGeom prst="rect">
+            <a:avLst/>
+          </a:prstGeom>
+          <a:noFill/>
+        </p:spPr>
+        <p:txBody>
+          <a:bodyPr wrap="square" anchor="t" lIns="0" rIns="0" tIns="0" bIns="0">
+            <a:spAutoFit/>
+          </a:bodyPr>
+          <a:lstStyle/>
+          <a:p>
+            <a:pPr algn="l">
+              <a:spcAft>
+                <a:spcPts val="585"/>
+              </a:spcAft>
+            </a:pPr>
+            <a:r>
+              <a:rPr sz="1500" b="1" i="0">
+                <a:solidFill>
+                  <a:srgbClr val="1C1B19"/>
+                </a:solidFill>
+                <a:latin typeface="Source Serif 4"/>
+              </a:rPr>
+              <a:t>Weeks of feeling low go to a counselor.</a:t>
+            </a:r>
+          </a:p>
+          <a:p>
+            <a:pPr algn="l">
+              <a:spcAft>
+                <a:spcPts val="585"/>
+              </a:spcAft>
+            </a:pPr>
+            <a:r>
+              <a:rPr sz="1300" b="0" i="0">
+                <a:solidFill>
+                  <a:srgbClr val="1C1B19"/>
+                </a:solidFill>
+                <a:latin typeface="Source Serif 4"/>
+              </a:rPr>
+              <a:t>The student page names feeling low or alone for weeks as a reason to get help. Don't ask about this in the circle. Any disclosure goes to a counselor the same day.</a:t>
+            </a:r>
+          </a:p>
+          <a:p>
+            <a:pPr algn="l">
+              <a:spcAft>
+                <a:spcPts val="585"/>
+              </a:spcAft>
+            </a:pPr>
+            <a:r>
+              <a:rPr sz="1300" b="0" i="0">
+                <a:solidFill>
+                  <a:srgbClr val="1C1B19"/>
+                </a:solidFill>
+                <a:latin typeface="Source Serif 4"/>
+              </a:rPr>
+              <a:t/>
+            </a:r>
+          </a:p>
+          <a:p>
+            <a:pPr algn="l">
+              <a:spcAft>
+                <a:spcPts val="585"/>
+              </a:spcAft>
+            </a:pPr>
+            <a:r>
+              <a:rPr sz="1500" b="1" i="0">
+                <a:solidFill>
+                  <a:srgbClr val="1C1B19"/>
+                </a:solidFill>
+                <a:latin typeface="Source Serif 4"/>
+              </a:rPr>
+              <a:t>Jealousy is allowed.</a:t>
+            </a:r>
+          </a:p>
+          <a:p>
+            <a:pPr algn="l">
+              <a:spcAft>
+                <a:spcPts val="585"/>
+              </a:spcAft>
+            </a:pPr>
+            <a:r>
+              <a:rPr sz="1300" b="0" i="0">
+                <a:solidFill>
+                  <a:srgbClr val="1C1B19"/>
+                </a:solidFill>
+                <a:latin typeface="Source Serif 4"/>
+              </a:rPr>
+              <a:t>Students may admit they're jealous of a friend's new friend or partner. Treat it as a sign the friendship matters and keep shame out of it.</a:t>
+            </a:r>
+          </a:p>
+          <a:p>
+            <a:pPr algn="l">
+              <a:spcAft>
+                <a:spcPts val="585"/>
+              </a:spcAft>
+            </a:pPr>
+            <a:r>
+              <a:rPr sz="1300" b="0" i="0">
+                <a:solidFill>
+                  <a:srgbClr val="1C1B19"/>
+                </a:solidFill>
+                <a:latin typeface="Source Serif 4"/>
+              </a:rPr>
+              <a:t/>
+            </a:r>
+          </a:p>
+          <a:p>
+            <a:pPr algn="l">
+              <a:spcAft>
+                <a:spcPts val="585"/>
+              </a:spcAft>
+            </a:pPr>
+            <a:r>
+              <a:rPr sz="1500" b="1" i="0">
+                <a:solidFill>
+                  <a:srgbClr val="1C1B19"/>
+                </a:solidFill>
+                <a:latin typeface="Source Serif 4"/>
+              </a:rPr>
+              <a:t>Leave room for students who did the leaving out.</a:t>
+            </a:r>
+          </a:p>
+          <a:p>
+            <a:pPr algn="l">
+              <a:spcAft>
+                <a:spcPts val="585"/>
+              </a:spcAft>
+            </a:pPr>
+            <a:r>
+              <a:rPr sz="1300" b="0" i="0">
+                <a:solidFill>
+                  <a:srgbClr val="1C1B19"/>
+                </a:solidFill>
+                <a:latin typeface="Source Serif 4"/>
+              </a:rPr>
+              <a:t>Some students have started a separate chat or forgotten someone. Give them a way in: a quick "want to come?" fixes a lot of accidents.</a:t>
+            </a:r>
+          </a:p>
+          <a:p>
+            <a:pPr algn="l">
+              <a:spcAft>
+                <a:spcPts val="585"/>
+              </a:spcAft>
+            </a:pPr>
+            <a:r>
+              <a:rPr sz="1300" b="0" i="0">
+                <a:solidFill>
+                  <a:srgbClr val="1C1B19"/>
+                </a:solidFill>
+                <a:latin typeface="Source Serif 4"/>
+              </a:rPr>
+              <a:t/>
+            </a:r>
+          </a:p>
+        </p:txBody>
+      </p:sp>
+    </p:spTree>
+  </p:cSld>
+  <p:clrMapOvr>
+    <a:masterClrMapping/>
+  </p:clrMapOvr>
+</p:sld>
+</file>
+
+<file path=ppt/slides/slide11.xml><?xml version="1.0" encoding="utf-8"?>
+<p:sld xmlns:a="http://schemas.openxmlformats.org/drawingml/2006/main" xmlns:p="http://schemas.openxmlformats.org/presentationml/2006/main" xmlns:r="http://schemas.openxmlformats.org/officeDocument/2006/relationships" show="0">
+  <p:cSld>
+    <p:bg>
+      <p:bgPr>
+        <a:solidFill>
+          <a:srgbClr val="EEEBE4"/>
+        </a:solidFill>
+        <a:effectLst/>
+      </p:bgPr>
+    </p:bg>
+    <p:spTree>
+      <p:nvGrpSpPr>
+        <p:cNvPr id="1" name=""/>
+        <p:cNvGrpSpPr/>
+        <p:nvPr/>
+      </p:nvGrpSpPr>
+      <p:grpSpPr/>
+      <p:sp>
+        <p:nvSpPr>
+          <p:cNvPr id="2" name="Rectangle 1"/>
+          <p:cNvSpPr/>
+          <p:nvPr/>
+        </p:nvSpPr>
+        <p:spPr>
+          <a:xfrm>
+            <a:off x="0" y="0"/>
+            <a:ext cx="12191695" cy="384048"/>
+          </a:xfrm>
+          <a:prstGeom prst="rect">
+            <a:avLst/>
+          </a:prstGeom>
+          <a:solidFill>
+            <a:srgbClr val="0B2D5B"/>
+          </a:solidFill>
+          <a:ln>
+            <a:noFill/>
+          </a:ln>
+          <a:effectLst/>
+        </p:spPr>
+        <p:style>
+          <a:lnRef idx="1">
+            <a:schemeClr val="accent1"/>
+          </a:lnRef>
+          <a:fillRef idx="3">
+            <a:schemeClr val="accent1"/>
+          </a:fillRef>
+          <a:effectRef idx="2">
+            <a:schemeClr val="accent1"/>
+          </a:effectRef>
+          <a:fontRef idx="minor">
+            <a:schemeClr val="lt1"/>
+          </a:fontRef>
+        </p:style>
+        <p:txBody>
+          <a:bodyPr rtlCol="0" anchor="ctr"/>
+          <a:lstStyle/>
+          <a:p>
+            <a:pPr algn="ctr"/>
+          </a:p>
+        </p:txBody>
+      </p:sp>
+      <p:sp>
+        <p:nvSpPr>
+          <p:cNvPr id="3" name="TextBox 2"/>
+          <p:cNvSpPr txBox="1"/>
+          <p:nvPr/>
+        </p:nvSpPr>
+        <p:spPr>
+          <a:xfrm>
+            <a:off x="548640" y="100584"/>
+            <a:ext cx="10972800" cy="274320"/>
+          </a:xfrm>
+          <a:prstGeom prst="rect">
+            <a:avLst/>
+          </a:prstGeom>
+          <a:noFill/>
+        </p:spPr>
+        <p:txBody>
+          <a:bodyPr wrap="square" anchor="t" lIns="0" rIns="0" tIns="0" bIns="0">
+            <a:spAutoFit/>
+          </a:bodyPr>
+          <a:lstStyle/>
+          <a:p>
+            <a:pPr algn="l">
+              <a:spcAft>
+                <a:spcPts val="495"/>
+              </a:spcAft>
+            </a:pPr>
+            <a:r>
+              <a:rPr sz="1100" b="1" i="0">
+                <a:solidFill>
+                  <a:srgbClr val="FFFFFF"/>
+                </a:solidFill>
+                <a:latin typeface="Inter Tight"/>
+              </a:rPr>
+              <a:t>TEACHER PAGE  ·  skipped when you present  ·  Every student in the room</a:t>
+            </a:r>
+          </a:p>
+        </p:txBody>
+      </p:sp>
+      <p:sp>
+        <p:nvSpPr>
+          <p:cNvPr id="4" name="TextBox 3"/>
+          <p:cNvSpPr txBox="1"/>
+          <p:nvPr/>
+        </p:nvSpPr>
+        <p:spPr>
+          <a:xfrm>
+            <a:off x="548640" y="685800"/>
+            <a:ext cx="10972800" cy="640080"/>
+          </a:xfrm>
+          <a:prstGeom prst="rect">
+            <a:avLst/>
+          </a:prstGeom>
+          <a:noFill/>
+        </p:spPr>
+        <p:txBody>
+          <a:bodyPr wrap="square" anchor="t" lIns="0" rIns="0" tIns="0" bIns="0">
+            <a:spAutoFit/>
+          </a:bodyPr>
+          <a:lstStyle/>
+          <a:p>
+            <a:pPr algn="l">
+              <a:spcAft>
+                <a:spcPts val="1350"/>
+              </a:spcAft>
+            </a:pPr>
+            <a:r>
+              <a:rPr sz="3000" b="1" i="0">
+                <a:solidFill>
+                  <a:srgbClr val="1C1B19"/>
+                </a:solidFill>
+                <a:latin typeface="Source Serif 4"/>
+              </a:rPr>
+              <a:t>Every student in the room</a:t>
+            </a:r>
+          </a:p>
+        </p:txBody>
+      </p:sp>
+      <p:sp>
+        <p:nvSpPr>
+          <p:cNvPr id="5" name="TextBox 4"/>
+          <p:cNvSpPr txBox="1"/>
+          <p:nvPr/>
+        </p:nvSpPr>
+        <p:spPr>
+          <a:xfrm>
+            <a:off x="548640" y="1325880"/>
+            <a:ext cx="10972800" cy="365760"/>
+          </a:xfrm>
+          <a:prstGeom prst="rect">
+            <a:avLst/>
+          </a:prstGeom>
+          <a:noFill/>
+        </p:spPr>
+        <p:txBody>
+          <a:bodyPr wrap="square" anchor="t" lIns="0" rIns="0" tIns="0" bIns="0">
+            <a:spAutoFit/>
+          </a:bodyPr>
+          <a:lstStyle/>
+          <a:p>
+            <a:pPr algn="l">
+              <a:spcAft>
+                <a:spcPts val="630"/>
+              </a:spcAft>
+            </a:pPr>
+            <a:r>
+              <a:rPr sz="1400" b="0" i="0">
+                <a:solidFill>
+                  <a:srgbClr val="5D5A54"/>
+                </a:solidFill>
+                <a:latin typeface="Inter Tight"/>
+              </a:rPr>
+              <a:t>Culture, family, identity, ability and money: what to keep in mind for this topic.</a:t>
+            </a:r>
+          </a:p>
+        </p:txBody>
+      </p:sp>
+      <p:sp>
+        <p:nvSpPr>
+          <p:cNvPr id="6" name="TextBox 5"/>
+          <p:cNvSpPr txBox="1"/>
+          <p:nvPr/>
+        </p:nvSpPr>
+        <p:spPr>
+          <a:xfrm>
+            <a:off x="548640" y="1828800"/>
+            <a:ext cx="5394960" cy="4572000"/>
+          </a:xfrm>
+          <a:prstGeom prst="rect">
+            <a:avLst/>
+          </a:prstGeom>
+          <a:noFill/>
+        </p:spPr>
+        <p:txBody>
+          <a:bodyPr wrap="square" anchor="t" lIns="0" rIns="0" tIns="0" bIns="0">
+            <a:spAutoFit/>
+          </a:bodyPr>
+          <a:lstStyle/>
+          <a:p>
+            <a:pPr algn="l">
+              <a:spcAft>
+                <a:spcPts val="585"/>
+              </a:spcAft>
+            </a:pPr>
+            <a:r>
+              <a:rPr sz="1500" b="1" i="0">
+                <a:solidFill>
+                  <a:srgbClr val="1C1B19"/>
+                </a:solidFill>
+                <a:latin typeface="Source Serif 4"/>
+              </a:rPr>
+              <a:t>Family rules and faith shape plans.</a:t>
+            </a:r>
+          </a:p>
+          <a:p>
+            <a:pPr algn="l">
+              <a:spcAft>
+                <a:spcPts val="585"/>
+              </a:spcAft>
+            </a:pPr>
+            <a:r>
+              <a:rPr sz="1300" b="0" i="0">
+                <a:solidFill>
+                  <a:srgbClr val="1C1B19"/>
+                </a:solidFill>
+                <a:latin typeface="Source Serif 4"/>
+              </a:rPr>
+              <a:t>Curfews, religious services and holy days, family responsibilities, and rules about where students can go mean some miss more plans. Present "I usually can't do Friday nights, but I'm in for Saturday afternoons" as a strong move, and don't assume every family runs the same way.</a:t>
+            </a:r>
+          </a:p>
+          <a:p>
+            <a:pPr algn="l">
+              <a:spcAft>
+                <a:spcPts val="585"/>
+              </a:spcAft>
+            </a:pPr>
+            <a:r>
+              <a:rPr sz="1300" b="0" i="0">
+                <a:solidFill>
+                  <a:srgbClr val="1C1B19"/>
+                </a:solidFill>
+                <a:latin typeface="Source Serif 4"/>
+              </a:rPr>
+              <a:t/>
+            </a:r>
+          </a:p>
+          <a:p>
+            <a:pPr algn="l">
+              <a:spcAft>
+                <a:spcPts val="585"/>
+              </a:spcAft>
+            </a:pPr>
+            <a:r>
+              <a:rPr sz="1500" b="1" i="0">
+                <a:solidFill>
+                  <a:srgbClr val="1C1B19"/>
+                </a:solidFill>
+                <a:latin typeface="Source Serif 4"/>
+              </a:rPr>
+              <a:t>Money, jobs and rides.</a:t>
+            </a:r>
+          </a:p>
+          <a:p>
+            <a:pPr algn="l">
+              <a:spcAft>
+                <a:spcPts val="585"/>
+              </a:spcAft>
+            </a:pPr>
+            <a:r>
+              <a:rPr sz="1300" b="0" i="0">
+                <a:solidFill>
+                  <a:srgbClr val="1C1B19"/>
+                </a:solidFill>
+                <a:latin typeface="Source Serif 4"/>
+              </a:rPr>
+              <a:t>Some students work, can't afford the plan, or don't have a ride. The "car with four seats" example fits here. When you model making a plan, suggest free ones.</a:t>
+            </a:r>
+          </a:p>
+          <a:p>
+            <a:pPr algn="l">
+              <a:spcAft>
+                <a:spcPts val="585"/>
+              </a:spcAft>
+            </a:pPr>
+            <a:r>
+              <a:rPr sz="1300" b="0" i="0">
+                <a:solidFill>
+                  <a:srgbClr val="1C1B19"/>
+                </a:solidFill>
+                <a:latin typeface="Source Serif 4"/>
+              </a:rPr>
+              <a:t/>
+            </a:r>
+          </a:p>
+          <a:p>
+            <a:pPr algn="l">
+              <a:spcAft>
+                <a:spcPts val="585"/>
+              </a:spcAft>
+            </a:pPr>
+            <a:r>
+              <a:rPr sz="1500" b="1" i="0">
+                <a:solidFill>
+                  <a:srgbClr val="1C1B19"/>
+                </a:solidFill>
+                <a:latin typeface="Source Serif 4"/>
+              </a:rPr>
+              <a:t>Dating examples include everyone.</a:t>
+            </a:r>
+          </a:p>
+          <a:p>
+            <a:pPr algn="l">
+              <a:spcAft>
+                <a:spcPts val="585"/>
+              </a:spcAft>
+            </a:pPr>
+            <a:r>
+              <a:rPr sz="1300" b="0" i="0">
+                <a:solidFill>
+                  <a:srgbClr val="1C1B19"/>
+                </a:solidFill>
+                <a:latin typeface="Source Serif 4"/>
+              </a:rPr>
+              <a:t>Nadia's partner Chris could be any gender; say "partner" or "someone you like" when you talk about it. A Close Friends list or a screenshot can also reveal who someone likes, which makes it a counselor conversation and never a discussion topic.</a:t>
+            </a:r>
+          </a:p>
+          <a:p>
+            <a:pPr algn="l">
+              <a:spcAft>
+                <a:spcPts val="585"/>
+              </a:spcAft>
+            </a:pPr>
+            <a:r>
+              <a:rPr sz="1300" b="0" i="0">
+                <a:solidFill>
+                  <a:srgbClr val="1C1B19"/>
+                </a:solidFill>
+                <a:latin typeface="Source Serif 4"/>
+              </a:rPr>
+              <a:t/>
+            </a:r>
+          </a:p>
+        </p:txBody>
+      </p:sp>
+      <p:sp>
+        <p:nvSpPr>
+          <p:cNvPr id="7" name="TextBox 6"/>
+          <p:cNvSpPr txBox="1"/>
+          <p:nvPr/>
+        </p:nvSpPr>
+        <p:spPr>
+          <a:xfrm>
+            <a:off x="6217920" y="1828800"/>
+            <a:ext cx="5394960" cy="4572000"/>
+          </a:xfrm>
+          <a:prstGeom prst="rect">
+            <a:avLst/>
+          </a:prstGeom>
+          <a:noFill/>
+        </p:spPr>
+        <p:txBody>
+          <a:bodyPr wrap="square" anchor="t" lIns="0" rIns="0" tIns="0" bIns="0">
+            <a:spAutoFit/>
+          </a:bodyPr>
+          <a:lstStyle/>
+          <a:p>
+            <a:pPr algn="l">
+              <a:spcAft>
+                <a:spcPts val="585"/>
+              </a:spcAft>
+            </a:pPr>
+            <a:r>
+              <a:rPr sz="1500" b="1" i="0">
+                <a:solidFill>
+                  <a:srgbClr val="1C1B19"/>
+                </a:solidFill>
+                <a:latin typeface="Source Serif 4"/>
+              </a:rPr>
+              <a:t>Social cues and social energy.</a:t>
+            </a:r>
+          </a:p>
+          <a:p>
+            <a:pPr algn="l">
+              <a:spcAft>
+                <a:spcPts val="585"/>
+              </a:spcAft>
+            </a:pPr>
+            <a:r>
+              <a:rPr sz="1300" b="0" i="0">
+                <a:solidFill>
+                  <a:srgbClr val="1C1B19"/>
+                </a:solidFill>
+                <a:latin typeface="Source Serif 4"/>
+              </a:rPr>
+              <a:t>Autistic students, students with ADHD, and students with social anxiety may find it harder to tell whether a plan was open, or to walk up and sit down. The one honest sentence gives a script. Don't treat speaking up in the group as the only sign of a good friend.</a:t>
+            </a:r>
+          </a:p>
+          <a:p>
+            <a:pPr algn="l">
+              <a:spcAft>
+                <a:spcPts val="585"/>
+              </a:spcAft>
+            </a:pPr>
+            <a:r>
+              <a:rPr sz="1300" b="0" i="0">
+                <a:solidFill>
+                  <a:srgbClr val="1C1B19"/>
+                </a:solidFill>
+                <a:latin typeface="Source Serif 4"/>
+              </a:rPr>
+              <a:t/>
+            </a:r>
+          </a:p>
+          <a:p>
+            <a:pPr algn="l">
+              <a:spcAft>
+                <a:spcPts val="585"/>
+              </a:spcAft>
+            </a:pPr>
+            <a:r>
+              <a:rPr sz="1500" b="1" i="0">
+                <a:solidFill>
+                  <a:srgbClr val="1C1B19"/>
+                </a:solidFill>
+                <a:latin typeface="Source Serif 4"/>
+              </a:rPr>
+              <a:t>Two homes, two schedules.</a:t>
+            </a:r>
+          </a:p>
+          <a:p>
+            <a:pPr algn="l">
+              <a:spcAft>
+                <a:spcPts val="585"/>
+              </a:spcAft>
+            </a:pPr>
+            <a:r>
+              <a:rPr sz="1300" b="0" i="0">
+                <a:solidFill>
+                  <a:srgbClr val="1C1B19"/>
+                </a:solidFill>
+                <a:latin typeface="Source Serif 4"/>
+              </a:rPr>
+              <a:t>Students who split time between households, live with grandparents, or are in foster or kinship care may miss plans on certain weekends. Say "the adults at home" and treat it as logistics.</a:t>
+            </a:r>
+          </a:p>
+          <a:p>
+            <a:pPr algn="l">
+              <a:spcAft>
+                <a:spcPts val="585"/>
+              </a:spcAft>
+            </a:pPr>
+            <a:r>
+              <a:rPr sz="1300" b="0" i="0">
+                <a:solidFill>
+                  <a:srgbClr val="1C1B19"/>
+                </a:solidFill>
+                <a:latin typeface="Source Serif 4"/>
+              </a:rPr>
+              <a:t/>
+            </a:r>
+          </a:p>
+          <a:p>
+            <a:pPr algn="l">
+              <a:spcAft>
+                <a:spcPts val="585"/>
+              </a:spcAft>
+            </a:pPr>
+            <a:r>
+              <a:rPr sz="1500" b="1" i="0">
+                <a:solidFill>
+                  <a:srgbClr val="1C1B19"/>
+                </a:solidFill>
+                <a:latin typeface="Source Serif 4"/>
+              </a:rPr>
+              <a:t>New to the group, the school, or the country.</a:t>
+            </a:r>
+          </a:p>
+          <a:p>
+            <a:pPr algn="l">
+              <a:spcAft>
+                <a:spcPts val="585"/>
+              </a:spcAft>
+            </a:pPr>
+            <a:r>
+              <a:rPr sz="1300" b="0" i="0">
+                <a:solidFill>
+                  <a:srgbClr val="1C1B19"/>
+                </a:solidFill>
+                <a:latin typeface="Source Serif 4"/>
+              </a:rPr>
+              <a:t>Students who are new, or who speak another language at home, may feel on the edge when inside jokes and fast talk fly by. Widening your base can include a cultural club, a cousin, or an online group in their language.</a:t>
+            </a:r>
+          </a:p>
+          <a:p>
+            <a:pPr algn="l">
+              <a:spcAft>
+                <a:spcPts val="585"/>
+              </a:spcAft>
+            </a:pPr>
+            <a:r>
+              <a:rPr sz="1300" b="0" i="0">
+                <a:solidFill>
+                  <a:srgbClr val="1C1B19"/>
+                </a:solidFill>
+                <a:latin typeface="Source Serif 4"/>
+              </a:rPr>
+              <a:t/>
+            </a:r>
+          </a:p>
+        </p:txBody>
+      </p:sp>
+    </p:spTree>
+  </p:cSld>
+  <p:clrMapOvr>
+    <a:masterClrMapping/>
+  </p:clrMapOvr>
+</p:sld>
+</file>
+
+<file path=ppt/slides/slide12.xml><?xml version="1.0" encoding="utf-8"?>
+<p:sld xmlns:a="http://schemas.openxmlformats.org/drawingml/2006/main" xmlns:p="http://schemas.openxmlformats.org/presentationml/2006/main" xmlns:r="http://schemas.openxmlformats.org/officeDocument/2006/relationships" show="0">
+  <p:cSld>
+    <p:bg>
+      <p:bgPr>
+        <a:solidFill>
+          <a:srgbClr val="EEEBE4"/>
+        </a:solidFill>
+        <a:effectLst/>
+      </p:bgPr>
+    </p:bg>
+    <p:spTree>
+      <p:nvGrpSpPr>
+        <p:cNvPr id="1" name=""/>
+        <p:cNvGrpSpPr/>
+        <p:nvPr/>
+      </p:nvGrpSpPr>
+      <p:grpSpPr/>
+      <p:sp>
+        <p:nvSpPr>
+          <p:cNvPr id="2" name="Rectangle 1"/>
+          <p:cNvSpPr/>
+          <p:nvPr/>
+        </p:nvSpPr>
+        <p:spPr>
+          <a:xfrm>
+            <a:off x="0" y="0"/>
+            <a:ext cx="12191695" cy="384048"/>
+          </a:xfrm>
+          <a:prstGeom prst="rect">
+            <a:avLst/>
+          </a:prstGeom>
+          <a:solidFill>
+            <a:srgbClr val="0B2D5B"/>
+          </a:solidFill>
+          <a:ln>
+            <a:noFill/>
+          </a:ln>
+          <a:effectLst/>
+        </p:spPr>
+        <p:style>
+          <a:lnRef idx="1">
+            <a:schemeClr val="accent1"/>
+          </a:lnRef>
+          <a:fillRef idx="3">
+            <a:schemeClr val="accent1"/>
+          </a:fillRef>
+          <a:effectRef idx="2">
+            <a:schemeClr val="accent1"/>
+          </a:effectRef>
+          <a:fontRef idx="minor">
+            <a:schemeClr val="lt1"/>
+          </a:fontRef>
+        </p:style>
+        <p:txBody>
+          <a:bodyPr rtlCol="0" anchor="ctr"/>
+          <a:lstStyle/>
+          <a:p>
+            <a:pPr algn="ctr"/>
+          </a:p>
+        </p:txBody>
+      </p:sp>
+      <p:sp>
+        <p:nvSpPr>
+          <p:cNvPr id="3" name="TextBox 2"/>
+          <p:cNvSpPr txBox="1"/>
+          <p:nvPr/>
+        </p:nvSpPr>
+        <p:spPr>
+          <a:xfrm>
+            <a:off x="548640" y="100584"/>
+            <a:ext cx="10972800" cy="274320"/>
+          </a:xfrm>
+          <a:prstGeom prst="rect">
+            <a:avLst/>
+          </a:prstGeom>
+          <a:noFill/>
+        </p:spPr>
+        <p:txBody>
+          <a:bodyPr wrap="square" anchor="t" lIns="0" rIns="0" tIns="0" bIns="0">
+            <a:spAutoFit/>
+          </a:bodyPr>
+          <a:lstStyle/>
+          <a:p>
+            <a:pPr algn="l">
+              <a:spcAft>
+                <a:spcPts val="495"/>
+              </a:spcAft>
+            </a:pPr>
+            <a:r>
+              <a:rPr sz="1100" b="1" i="0">
+                <a:solidFill>
+                  <a:srgbClr val="FFFFFF"/>
+                </a:solidFill>
+                <a:latin typeface="Inter Tight"/>
+              </a:rPr>
+              <a:t>TEACHER PAGE  ·  skipped when you present  ·  Background</a:t>
+            </a:r>
+          </a:p>
+        </p:txBody>
+      </p:sp>
+      <p:sp>
+        <p:nvSpPr>
+          <p:cNvPr id="4" name="TextBox 3"/>
+          <p:cNvSpPr txBox="1"/>
+          <p:nvPr/>
+        </p:nvSpPr>
+        <p:spPr>
+          <a:xfrm>
+            <a:off x="548640" y="685800"/>
+            <a:ext cx="10972800" cy="640080"/>
+          </a:xfrm>
+          <a:prstGeom prst="rect">
+            <a:avLst/>
+          </a:prstGeom>
+          <a:noFill/>
+        </p:spPr>
+        <p:txBody>
+          <a:bodyPr wrap="square" anchor="t" lIns="0" rIns="0" tIns="0" bIns="0">
+            <a:spAutoFit/>
+          </a:bodyPr>
+          <a:lstStyle/>
+          <a:p>
+            <a:pPr algn="l">
+              <a:spcAft>
+                <a:spcPts val="1350"/>
+              </a:spcAft>
+            </a:pPr>
+            <a:r>
+              <a:rPr sz="3000" b="1" i="0">
+                <a:solidFill>
+                  <a:srgbClr val="1C1B19"/>
+                </a:solidFill>
+                <a:latin typeface="Source Serif 4"/>
+              </a:rPr>
+              <a:t>What the research says</a:t>
+            </a:r>
+          </a:p>
+        </p:txBody>
+      </p:sp>
+      <p:sp>
+        <p:nvSpPr>
+          <p:cNvPr id="5" name="TextBox 4"/>
+          <p:cNvSpPr txBox="1"/>
+          <p:nvPr/>
+        </p:nvSpPr>
+        <p:spPr>
+          <a:xfrm>
+            <a:off x="548640" y="1463040"/>
+            <a:ext cx="5394960" cy="4937760"/>
+          </a:xfrm>
+          <a:prstGeom prst="rect">
+            <a:avLst/>
+          </a:prstGeom>
+          <a:noFill/>
+        </p:spPr>
+        <p:txBody>
+          <a:bodyPr wrap="square" anchor="t" lIns="0" rIns="0" tIns="0" bIns="0">
+            <a:spAutoFit/>
+          </a:bodyPr>
+          <a:lstStyle/>
+          <a:p>
+            <a:pPr algn="l">
+              <a:spcAft>
+                <a:spcPts val="585"/>
+              </a:spcAft>
+            </a:pPr>
+            <a:r>
+              <a:rPr sz="1300" b="0" i="0">
+                <a:solidFill>
+                  <a:srgbClr val="1C1B19"/>
+                </a:solidFill>
+                <a:latin typeface="Source Serif 4"/>
+              </a:rPr>
+              <a:t>Psychologist Kipling Williams's model says being ignored or left out threatens four needs: belonging, self-esteem, control, and a sense that your presence matters ("meaningful existence").</a:t>
+            </a:r>
+          </a:p>
+          <a:p>
+            <a:pPr algn="l">
+              <a:spcAft>
+                <a:spcPts val="585"/>
+              </a:spcAft>
+            </a:pPr>
+            <a:r>
+              <a:rPr sz="1050" b="0" i="0">
+                <a:solidFill>
+                  <a:srgbClr val="5D5A54"/>
+                </a:solidFill>
+                <a:latin typeface="Inter Tight"/>
+              </a:rPr>
+              <a:t>Williams, Advances in Experimental Social Psychology, 2009</a:t>
+            </a:r>
+          </a:p>
+          <a:p>
+            <a:pPr algn="l">
+              <a:spcAft>
+                <a:spcPts val="585"/>
+              </a:spcAft>
+            </a:pPr>
+            <a:r>
+              <a:rPr sz="1300" b="0" i="0">
+                <a:solidFill>
+                  <a:srgbClr val="1C1B19"/>
+                </a:solidFill>
+                <a:latin typeface="Source Serif 4"/>
+              </a:rPr>
+              <a:t>The model describes stages. The first two (the quick hurt, then a reflective stage) are well studied in experiments. The third, resignation, comes mostly from interviews and long-term observation, so it's less certain.</a:t>
+            </a:r>
+          </a:p>
+          <a:p>
+            <a:pPr algn="l">
+              <a:spcAft>
+                <a:spcPts val="585"/>
+              </a:spcAft>
+            </a:pPr>
+            <a:r>
+              <a:rPr sz="1050" b="0" i="0">
+                <a:solidFill>
+                  <a:srgbClr val="5D5A54"/>
+                </a:solidFill>
+                <a:latin typeface="Inter Tight"/>
+              </a:rPr>
+              <a:t>Williams, 2009</a:t>
+            </a:r>
+          </a:p>
+          <a:p>
+            <a:pPr algn="l">
+              <a:spcAft>
+                <a:spcPts val="585"/>
+              </a:spcAft>
+            </a:pPr>
+            <a:r>
+              <a:rPr sz="1300" b="0" i="0">
+                <a:solidFill>
+                  <a:srgbClr val="1C1B19"/>
+                </a:solidFill>
+                <a:latin typeface="Source Serif 4"/>
+              </a:rPr>
+              <a:t>1,486 people from 62 countries played an online ball toss with two "players" who were really a computer. Those who stopped getting the ball felt worse and reported a weaker sense of belonging, even with strangers in a game that didn't matter.</a:t>
+            </a:r>
+          </a:p>
+          <a:p>
+            <a:pPr algn="l">
+              <a:spcAft>
+                <a:spcPts val="585"/>
+              </a:spcAft>
+            </a:pPr>
+            <a:r>
+              <a:rPr sz="1050" b="0" i="0">
+                <a:solidFill>
+                  <a:srgbClr val="5D5A54"/>
+                </a:solidFill>
+                <a:latin typeface="Inter Tight"/>
+              </a:rPr>
+              <a:t>Williams, Cheung and Choi, Journal of Personality and Social Psychology, 2000</a:t>
+            </a:r>
+          </a:p>
+        </p:txBody>
+      </p:sp>
+      <p:sp>
+        <p:nvSpPr>
+          <p:cNvPr id="6" name="TextBox 5"/>
+          <p:cNvSpPr txBox="1"/>
+          <p:nvPr/>
+        </p:nvSpPr>
+        <p:spPr>
+          <a:xfrm>
+            <a:off x="6217920" y="1463040"/>
+            <a:ext cx="5394960" cy="4937760"/>
+          </a:xfrm>
+          <a:prstGeom prst="rect">
+            <a:avLst/>
+          </a:prstGeom>
+          <a:noFill/>
+        </p:spPr>
+        <p:txBody>
+          <a:bodyPr wrap="square" anchor="t" lIns="0" rIns="0" tIns="0" bIns="0">
+            <a:spAutoFit/>
+          </a:bodyPr>
+          <a:lstStyle/>
+          <a:p>
+            <a:pPr algn="l">
+              <a:spcAft>
+                <a:spcPts val="585"/>
+              </a:spcAft>
+            </a:pPr>
+            <a:r>
+              <a:rPr sz="1300" b="0" i="0">
+                <a:solidFill>
+                  <a:srgbClr val="1C1B19"/>
+                </a:solidFill>
+                <a:latin typeface="Source Serif 4"/>
+              </a:rPr>
+              <a:t>Cornell students who wore an embarrassing T-shirt into a room guessed about half the room would notice. About a quarter did.</a:t>
+            </a:r>
+          </a:p>
+          <a:p>
+            <a:pPr algn="l">
+              <a:spcAft>
+                <a:spcPts val="585"/>
+              </a:spcAft>
+            </a:pPr>
+            <a:r>
+              <a:rPr sz="1050" b="0" i="0">
+                <a:solidFill>
+                  <a:srgbClr val="5D5A54"/>
+                </a:solidFill>
+                <a:latin typeface="Inter Tight"/>
+              </a:rPr>
+              <a:t>Gilovich, Medvec and Savitsky, Journal of Personality and Social Psychology, 2000</a:t>
+            </a:r>
+          </a:p>
+          <a:p>
+            <a:pPr algn="l">
+              <a:spcAft>
+                <a:spcPts val="585"/>
+              </a:spcAft>
+            </a:pPr>
+            <a:r>
+              <a:rPr sz="1300" b="0" i="0">
+                <a:solidFill>
+                  <a:srgbClr val="1C1B19"/>
+                </a:solidFill>
+                <a:latin typeface="Source Serif 4"/>
+              </a:rPr>
+              <a:t>In a survey of 540 adults, people in a romantic relationship had smaller close support networks. Even counting the new partner, they had lost about two close people on average.</a:t>
+            </a:r>
+          </a:p>
+          <a:p>
+            <a:pPr algn="l">
+              <a:spcAft>
+                <a:spcPts val="585"/>
+              </a:spcAft>
+            </a:pPr>
+            <a:r>
+              <a:rPr sz="1050" b="0" i="0">
+                <a:solidFill>
+                  <a:srgbClr val="5D5A54"/>
+                </a:solidFill>
+                <a:latin typeface="Inter Tight"/>
+              </a:rPr>
+              <a:t>Burton-Chellew and Dunbar, Evolutionary Behavioral Sciences, 2015</a:t>
+            </a:r>
+          </a:p>
+          <a:p>
+            <a:pPr algn="l">
+              <a:spcAft>
+                <a:spcPts val="585"/>
+              </a:spcAft>
+            </a:pPr>
+            <a:r>
+              <a:rPr sz="1300" b="0" i="0">
+                <a:solidFill>
+                  <a:srgbClr val="1C1B19"/>
+                </a:solidFill>
+                <a:latin typeface="Source Serif 4"/>
+              </a:rPr>
+              <a:t>Being left out hits control in particular, because it happens to you. That's why doing something about it, like making a plan yourself, often helps.</a:t>
+            </a:r>
+          </a:p>
+          <a:p>
+            <a:pPr algn="l">
+              <a:spcAft>
+                <a:spcPts val="585"/>
+              </a:spcAft>
+            </a:pPr>
+            <a:r>
+              <a:rPr sz="1050" b="0" i="0">
+                <a:solidFill>
+                  <a:srgbClr val="5D5A54"/>
+                </a:solidFill>
+                <a:latin typeface="Inter Tight"/>
+              </a:rPr>
+              <a:t>Williams, 2009</a:t>
+            </a:r>
+          </a:p>
+        </p:txBody>
+      </p:sp>
+    </p:spTree>
+  </p:cSld>
+  <p:clrMapOvr>
+    <a:masterClrMapping/>
+  </p:clrMapOvr>
+</p:sld>
+</file>
+
+<file path=ppt/slides/slide2.xml><?xml version="1.0" encoding="utf-8"?>
+<p:sld xmlns:a="http://schemas.openxmlformats.org/drawingml/2006/main" xmlns:p="http://schemas.openxmlformats.org/presentationml/2006/main" xmlns:r="http://schemas.openxmlformats.org/officeDocument/2006/relationships">
+  <p:cSld>
+    <p:bg>
+      <p:bgPr>
+        <a:solidFill>
+          <a:srgbClr val="0B2D5B"/>
+        </a:solidFill>
+        <a:effectLst/>
+      </p:bgPr>
+    </p:bg>
+    <p:spTree>
+      <p:nvGrpSpPr>
+        <p:cNvPr id="1" name=""/>
+        <p:cNvGrpSpPr/>
+        <p:nvPr/>
+      </p:nvGrpSpPr>
+      <p:grpSpPr/>
+      <p:sp>
+        <p:nvSpPr>
+          <p:cNvPr id="2" name="Rectangle 1"/>
+          <p:cNvSpPr/>
+          <p:nvPr/>
+        </p:nvSpPr>
+        <p:spPr>
+          <a:xfrm>
+            <a:off x="548640" y="502920"/>
+            <a:ext cx="457200" cy="54864"/>
+          </a:xfrm>
+          <a:prstGeom prst="rect">
+            <a:avLst/>
+          </a:prstGeom>
+          <a:solidFill>
+            <a:srgbClr val="F47B20"/>
+          </a:solidFill>
+          <a:ln>
+            <a:noFill/>
+          </a:ln>
+          <a:effectLst/>
+        </p:spPr>
+        <p:style>
+          <a:lnRef idx="1">
+            <a:schemeClr val="accent1"/>
+          </a:lnRef>
+          <a:fillRef idx="3">
+            <a:schemeClr val="accent1"/>
+          </a:fillRef>
+          <a:effectRef idx="2">
+            <a:schemeClr val="accent1"/>
+          </a:effectRef>
+          <a:fontRef idx="minor">
+            <a:schemeClr val="lt1"/>
+          </a:fontRef>
+        </p:style>
+        <p:txBody>
+          <a:bodyPr rtlCol="0" anchor="ctr"/>
+          <a:lstStyle/>
+          <a:p>
+            <a:pPr algn="ctr"/>
+          </a:p>
+        </p:txBody>
+      </p:sp>
+      <p:sp>
+        <p:nvSpPr>
+          <p:cNvPr id="3" name="TextBox 2"/>
+          <p:cNvSpPr txBox="1"/>
+          <p:nvPr/>
+        </p:nvSpPr>
+        <p:spPr>
+          <a:xfrm>
+            <a:off x="1143000" y="393192"/>
+            <a:ext cx="8229600" cy="274320"/>
+          </a:xfrm>
+          <a:prstGeom prst="rect">
+            <a:avLst/>
+          </a:prstGeom>
+          <a:noFill/>
+        </p:spPr>
+        <p:txBody>
+          <a:bodyPr wrap="square" anchor="t" lIns="0" rIns="0" tIns="0" bIns="0">
+            <a:spAutoFit/>
+          </a:bodyPr>
+          <a:lstStyle/>
+          <a:p>
+            <a:pPr algn="l">
+              <a:spcAft>
+                <a:spcPts val="540"/>
+              </a:spcAft>
+            </a:pPr>
+            <a:r>
+              <a:rPr sz="1200" b="1" i="0">
+                <a:solidFill>
+                  <a:srgbClr val="5D5A54"/>
+                </a:solidFill>
+                <a:latin typeface="Inter Tight"/>
+              </a:rPr>
+              <a:t>THE THIRD WHEEL</a:t>
+            </a:r>
+          </a:p>
+        </p:txBody>
+      </p:sp>
+      <p:sp>
+        <p:nvSpPr>
+          <p:cNvPr id="4" name="TextBox 3"/>
+          <p:cNvSpPr txBox="1"/>
+          <p:nvPr/>
+        </p:nvSpPr>
+        <p:spPr>
+          <a:xfrm>
+            <a:off x="8229600" y="6400800"/>
+            <a:ext cx="3410712" cy="274320"/>
+          </a:xfrm>
+          <a:prstGeom prst="rect">
+            <a:avLst/>
+          </a:prstGeom>
+          <a:noFill/>
+        </p:spPr>
+        <p:txBody>
+          <a:bodyPr wrap="square" anchor="t" lIns="0" rIns="0" tIns="0" bIns="0">
+            <a:spAutoFit/>
+          </a:bodyPr>
+          <a:lstStyle/>
+          <a:p>
+            <a:pPr algn="r">
+              <a:spcAft>
+                <a:spcPts val="450"/>
+              </a:spcAft>
+            </a:pPr>
+            <a:r>
+              <a:rPr sz="1000" b="0" i="0">
+                <a:solidFill>
+                  <a:srgbClr val="5D5A54"/>
+                </a:solidFill>
+                <a:latin typeface="Inter Tight"/>
+              </a:rPr>
+              <a:t>Beaver Counseling</a:t>
+            </a:r>
+          </a:p>
+        </p:txBody>
+      </p:sp>
+      <p:sp>
+        <p:nvSpPr>
+          <p:cNvPr id="5" name="TextBox 4"/>
+          <p:cNvSpPr txBox="1"/>
+          <p:nvPr/>
+        </p:nvSpPr>
+        <p:spPr>
+          <a:xfrm>
+            <a:off x="822960" y="2011680"/>
+            <a:ext cx="10515600" cy="1463040"/>
+          </a:xfrm>
+          <a:prstGeom prst="rect">
+            <a:avLst/>
+          </a:prstGeom>
+          <a:noFill/>
+        </p:spPr>
+        <p:txBody>
+          <a:bodyPr wrap="square" anchor="b" lIns="0" rIns="0" tIns="0" bIns="0">
+            <a:spAutoFit/>
+          </a:bodyPr>
+          <a:lstStyle/>
+          <a:p>
+            <a:pPr algn="l">
+              <a:spcAft>
+                <a:spcPts val="2700"/>
+              </a:spcAft>
+            </a:pPr>
+            <a:r>
+              <a:rPr sz="6000" b="1" i="0">
+                <a:solidFill>
+                  <a:srgbClr val="FFFFFF"/>
+                </a:solidFill>
+                <a:latin typeface="Source Serif 4"/>
+              </a:rPr>
+              <a:t>The Third Wheel</a:t>
+            </a:r>
+          </a:p>
+        </p:txBody>
+      </p:sp>
+      <p:sp>
+        <p:nvSpPr>
+          <p:cNvPr id="6" name="TextBox 5"/>
+          <p:cNvSpPr txBox="1"/>
+          <p:nvPr/>
+        </p:nvSpPr>
+        <p:spPr>
+          <a:xfrm>
+            <a:off x="822960" y="3611880"/>
+            <a:ext cx="10515600" cy="914400"/>
+          </a:xfrm>
+          <a:prstGeom prst="rect">
+            <a:avLst/>
+          </a:prstGeom>
+          <a:noFill/>
+        </p:spPr>
+        <p:txBody>
+          <a:bodyPr wrap="square" anchor="t" lIns="0" rIns="0" tIns="0" bIns="0">
+            <a:spAutoFit/>
+          </a:bodyPr>
+          <a:lstStyle/>
+          <a:p>
+            <a:pPr algn="l">
+              <a:spcAft>
+                <a:spcPts val="1080"/>
+              </a:spcAft>
+            </a:pPr>
+            <a:r>
+              <a:rPr sz="2400" b="0" i="1">
+                <a:solidFill>
+                  <a:srgbClr val="E8E4DA"/>
+                </a:solidFill>
+                <a:latin typeface="Source Serif 4"/>
+              </a:rPr>
+              <a:t>Technically in the group. Somehow always on the edge.</a:t>
+            </a:r>
+          </a:p>
+        </p:txBody>
+      </p:sp>
+      <p:sp>
+        <p:nvSpPr>
+          <p:cNvPr id="7" name="TextBox 6"/>
+          <p:cNvSpPr txBox="1"/>
+          <p:nvPr/>
+        </p:nvSpPr>
+        <p:spPr>
+          <a:xfrm>
+            <a:off x="822960" y="6035040"/>
+            <a:ext cx="7315200" cy="365760"/>
+          </a:xfrm>
+          <a:prstGeom prst="rect">
+            <a:avLst/>
+          </a:prstGeom>
+          <a:noFill/>
+        </p:spPr>
+        <p:txBody>
+          <a:bodyPr wrap="square" anchor="t" lIns="0" rIns="0" tIns="0" bIns="0">
+            <a:spAutoFit/>
+          </a:bodyPr>
+          <a:lstStyle/>
+          <a:p>
+            <a:pPr algn="l">
+              <a:spcAft>
+                <a:spcPts val="585"/>
+              </a:spcAft>
+            </a:pPr>
+            <a:r>
+              <a:rPr sz="1300" b="0" i="0">
+                <a:solidFill>
+                  <a:srgbClr val="E8E4DA"/>
+                </a:solidFill>
+                <a:latin typeface="Inter Tight"/>
+              </a:rPr>
+              <a:t>Beaver Upper School · Counseling</a:t>
+            </a:r>
+          </a:p>
+        </p:txBody>
+      </p:sp>
+    </p:spTree>
+  </p:cSld>
+  <p:clrMapOvr>
+    <a:masterClrMapping/>
+  </p:clrMapOvr>
+</p:sld>
+</file>
+
+<file path=ppt/slides/slide3.xml><?xml version="1.0" encoding="utf-8"?>
 <p:sld xmlns:a="http://schemas.openxmlformats.org/drawingml/2006/main" xmlns:p="http://schemas.openxmlformats.org/presentationml/2006/main" xmlns:r="http://schemas.openxmlformats.org/officeDocument/2006/relationships">
   <p:cSld>
     <p:bg>
@@ -4628,7 +6109,7 @@
                 </a:solidFill>
                 <a:latin typeface="Inter Tight"/>
               </a:rPr>
-              <a:t>ONE HONEST SENTENCE</a:t>
+              <a:t>THE GUESS</a:t>
             </a:r>
           </a:p>
         </p:txBody>
@@ -4750,7 +6231,7 @@
                 </a:solidFill>
                 <a:latin typeface="Source Serif 4"/>
               </a:rPr>
-              <a:t>"When... I felt... Could we...?"</a:t>
+              <a:t>How many people in this circle felt on the edge of a group at least once this month?</a:t>
             </a:r>
           </a:p>
         </p:txBody>
@@ -4789,7 +6270,7 @@
                 </a:solidFill>
                 <a:latin typeface="Inter Tight"/>
               </a:rPr>
-              <a:t>On a card, privately, write one you might say to someone. You decide if you ever say it.</a:t>
+              <a:t>Write your guess. On a second scrap, write yes or no for yourself. Fold it. No names.</a:t>
             </a:r>
           </a:p>
         </p:txBody>
@@ -4802,7 +6283,7 @@
 </p:sld>
 </file>
 
-<file path=ppt/slides/slide11.xml><?xml version="1.0" encoding="utf-8"?>
+<file path=ppt/slides/slide4.xml><?xml version="1.0" encoding="utf-8"?>
 <p:sld xmlns:a="http://schemas.openxmlformats.org/drawingml/2006/main" xmlns:p="http://schemas.openxmlformats.org/presentationml/2006/main" xmlns:r="http://schemas.openxmlformats.org/officeDocument/2006/relationships">
   <p:cSld>
     <p:bg>
@@ -4898,7 +6379,7 @@
                 </a:solidFill>
                 <a:latin typeface="Inter Tight"/>
               </a:rPr>
-              <a:t>BEFORE YOU GO</a:t>
+              <a:t>WHAT EXCLUSION DOES</a:t>
             </a:r>
           </a:p>
         </p:txBody>
@@ -4950,8 +6431,8 @@
         </p:nvSpPr>
         <p:spPr>
           <a:xfrm>
-            <a:off x="822960" y="1188720"/>
-            <a:ext cx="10515600" cy="914400"/>
+            <a:off x="822960" y="1005840"/>
+            <a:ext cx="10515600" cy="1097280"/>
           </a:xfrm>
           <a:prstGeom prst="rect">
             <a:avLst/>
@@ -4976,7 +6457,7 @@
                 </a:solidFill>
                 <a:latin typeface="Source Serif 4"/>
               </a:rPr>
-              <a:t>One move this week, if you want</a:t>
+              <a:t>Hurt first. Then your brain looks for a reason.</a:t>
             </a:r>
           </a:p>
         </p:txBody>
@@ -4989,8 +6470,8 @@
         </p:nvSpPr>
         <p:spPr>
           <a:xfrm>
-            <a:off x="822960" y="2286000"/>
-            <a:ext cx="10515600" cy="1463040"/>
+            <a:off x="822960" y="2194560"/>
+            <a:ext cx="548640" cy="1005840"/>
           </a:xfrm>
           <a:prstGeom prst="rect">
             <a:avLst/>
@@ -5005,42 +6486,403 @@
           <a:p>
             <a:pPr algn="l">
               <a:spcAft>
-                <a:spcPts val="1080"/>
-              </a:spcAft>
-            </a:pPr>
-            <a:r>
-              <a:rPr sz="2400" b="0" i="0">
+                <a:spcPts val="1170"/>
+              </a:spcAft>
+            </a:pPr>
+            <a:r>
+              <a:rPr sz="2600" b="1" i="0">
+                <a:solidFill>
+                  <a:srgbClr val="F47B20"/>
+                </a:solidFill>
+                <a:latin typeface="Source Serif 4"/>
+              </a:rPr>
+              <a:t>1</a:t>
+            </a:r>
+          </a:p>
+        </p:txBody>
+      </p:sp>
+      <p:sp>
+        <p:nvSpPr>
+          <p:cNvPr id="7" name="TextBox 6"/>
+          <p:cNvSpPr txBox="1"/>
+          <p:nvPr/>
+        </p:nvSpPr>
+        <p:spPr>
+          <a:xfrm>
+            <a:off x="1463040" y="2231136"/>
+            <a:ext cx="9875520" cy="1005840"/>
+          </a:xfrm>
+          <a:prstGeom prst="rect">
+            <a:avLst/>
+          </a:prstGeom>
+          <a:noFill/>
+        </p:spPr>
+        <p:txBody>
+          <a:bodyPr wrap="square" anchor="t" lIns="0" rIns="0" tIns="0" bIns="0">
+            <a:spAutoFit/>
+          </a:bodyPr>
+          <a:lstStyle/>
+          <a:p>
+            <a:pPr algn="l">
+              <a:spcAft>
+                <a:spcPts val="945"/>
+              </a:spcAft>
+            </a:pPr>
+            <a:r>
+              <a:rPr sz="2100" b="1" i="0">
                 <a:solidFill>
                   <a:srgbClr val="1C1B19"/>
                 </a:solidFill>
                 <a:latin typeface="Source Serif 4"/>
               </a:rPr>
-              <a:t>Ask "can I come?", make a plan, mute a story, or turn off the map.</a:t>
-            </a:r>
-          </a:p>
-        </p:txBody>
-      </p:sp>
-      <p:sp>
-        <p:nvSpPr>
-          <p:cNvPr id="7" name="Rectangle 6"/>
+              <a:t>Belonging</a:t>
+            </a:r>
+          </a:p>
+          <a:p>
+            <a:pPr algn="l">
+              <a:spcAft>
+                <a:spcPts val="945"/>
+              </a:spcAft>
+            </a:pPr>
+            <a:r>
+              <a:rPr sz="1600" b="0" i="0">
+                <a:solidFill>
+                  <a:srgbClr val="5D5A54"/>
+                </a:solidFill>
+                <a:latin typeface="Source Serif 4"/>
+              </a:rPr>
+              <a:t>The sense you're part of something takes a hit.</a:t>
+            </a:r>
+          </a:p>
+        </p:txBody>
+      </p:sp>
+      <p:sp>
+        <p:nvSpPr>
+          <p:cNvPr id="8" name="TextBox 7"/>
+          <p:cNvSpPr txBox="1"/>
+          <p:nvPr/>
+        </p:nvSpPr>
+        <p:spPr>
+          <a:xfrm>
+            <a:off x="822960" y="3200400"/>
+            <a:ext cx="548640" cy="1005840"/>
+          </a:xfrm>
+          <a:prstGeom prst="rect">
+            <a:avLst/>
+          </a:prstGeom>
+          <a:noFill/>
+        </p:spPr>
+        <p:txBody>
+          <a:bodyPr wrap="square" anchor="t" lIns="0" rIns="0" tIns="0" bIns="0">
+            <a:spAutoFit/>
+          </a:bodyPr>
+          <a:lstStyle/>
+          <a:p>
+            <a:pPr algn="l">
+              <a:spcAft>
+                <a:spcPts val="1170"/>
+              </a:spcAft>
+            </a:pPr>
+            <a:r>
+              <a:rPr sz="2600" b="1" i="0">
+                <a:solidFill>
+                  <a:srgbClr val="F47B20"/>
+                </a:solidFill>
+                <a:latin typeface="Source Serif 4"/>
+              </a:rPr>
+              <a:t>2</a:t>
+            </a:r>
+          </a:p>
+        </p:txBody>
+      </p:sp>
+      <p:sp>
+        <p:nvSpPr>
+          <p:cNvPr id="9" name="TextBox 8"/>
+          <p:cNvSpPr txBox="1"/>
+          <p:nvPr/>
+        </p:nvSpPr>
+        <p:spPr>
+          <a:xfrm>
+            <a:off x="1463040" y="3236976"/>
+            <a:ext cx="9875520" cy="1005840"/>
+          </a:xfrm>
+          <a:prstGeom prst="rect">
+            <a:avLst/>
+          </a:prstGeom>
+          <a:noFill/>
+        </p:spPr>
+        <p:txBody>
+          <a:bodyPr wrap="square" anchor="t" lIns="0" rIns="0" tIns="0" bIns="0">
+            <a:spAutoFit/>
+          </a:bodyPr>
+          <a:lstStyle/>
+          <a:p>
+            <a:pPr algn="l">
+              <a:spcAft>
+                <a:spcPts val="945"/>
+              </a:spcAft>
+            </a:pPr>
+            <a:r>
+              <a:rPr sz="2100" b="1" i="0">
+                <a:solidFill>
+                  <a:srgbClr val="1C1B19"/>
+                </a:solidFill>
+                <a:latin typeface="Source Serif 4"/>
+              </a:rPr>
+              <a:t>Self-esteem</a:t>
+            </a:r>
+          </a:p>
+          <a:p>
+            <a:pPr algn="l">
+              <a:spcAft>
+                <a:spcPts val="945"/>
+              </a:spcAft>
+            </a:pPr>
+            <a:r>
+              <a:rPr sz="1600" b="0" i="0">
+                <a:solidFill>
+                  <a:srgbClr val="5D5A54"/>
+                </a:solidFill>
+                <a:latin typeface="Source Serif 4"/>
+              </a:rPr>
+              <a:t>"What's wrong with me?" Even when it was an accident.</a:t>
+            </a:r>
+          </a:p>
+        </p:txBody>
+      </p:sp>
+      <p:sp>
+        <p:nvSpPr>
+          <p:cNvPr id="10" name="TextBox 9"/>
+          <p:cNvSpPr txBox="1"/>
+          <p:nvPr/>
+        </p:nvSpPr>
+        <p:spPr>
+          <a:xfrm>
+            <a:off x="822960" y="4206240"/>
+            <a:ext cx="548640" cy="1005840"/>
+          </a:xfrm>
+          <a:prstGeom prst="rect">
+            <a:avLst/>
+          </a:prstGeom>
+          <a:noFill/>
+        </p:spPr>
+        <p:txBody>
+          <a:bodyPr wrap="square" anchor="t" lIns="0" rIns="0" tIns="0" bIns="0">
+            <a:spAutoFit/>
+          </a:bodyPr>
+          <a:lstStyle/>
+          <a:p>
+            <a:pPr algn="l">
+              <a:spcAft>
+                <a:spcPts val="1170"/>
+              </a:spcAft>
+            </a:pPr>
+            <a:r>
+              <a:rPr sz="2600" b="1" i="0">
+                <a:solidFill>
+                  <a:srgbClr val="F47B20"/>
+                </a:solidFill>
+                <a:latin typeface="Source Serif 4"/>
+              </a:rPr>
+              <a:t>3</a:t>
+            </a:r>
+          </a:p>
+        </p:txBody>
+      </p:sp>
+      <p:sp>
+        <p:nvSpPr>
+          <p:cNvPr id="11" name="TextBox 10"/>
+          <p:cNvSpPr txBox="1"/>
+          <p:nvPr/>
+        </p:nvSpPr>
+        <p:spPr>
+          <a:xfrm>
+            <a:off x="1463040" y="4242816"/>
+            <a:ext cx="9875520" cy="1005840"/>
+          </a:xfrm>
+          <a:prstGeom prst="rect">
+            <a:avLst/>
+          </a:prstGeom>
+          <a:noFill/>
+        </p:spPr>
+        <p:txBody>
+          <a:bodyPr wrap="square" anchor="t" lIns="0" rIns="0" tIns="0" bIns="0">
+            <a:spAutoFit/>
+          </a:bodyPr>
+          <a:lstStyle/>
+          <a:p>
+            <a:pPr algn="l">
+              <a:spcAft>
+                <a:spcPts val="945"/>
+              </a:spcAft>
+            </a:pPr>
+            <a:r>
+              <a:rPr sz="2100" b="1" i="0">
+                <a:solidFill>
+                  <a:srgbClr val="1C1B19"/>
+                </a:solidFill>
+                <a:latin typeface="Source Serif 4"/>
+              </a:rPr>
+              <a:t>Control</a:t>
+            </a:r>
+          </a:p>
+          <a:p>
+            <a:pPr algn="l">
+              <a:spcAft>
+                <a:spcPts val="945"/>
+              </a:spcAft>
+            </a:pPr>
+            <a:r>
+              <a:rPr sz="1600" b="0" i="0">
+                <a:solidFill>
+                  <a:srgbClr val="5D5A54"/>
+                </a:solidFill>
+                <a:latin typeface="Source Serif 4"/>
+              </a:rPr>
+              <a:t>It happened to you. Doing something helps.</a:t>
+            </a:r>
+          </a:p>
+        </p:txBody>
+      </p:sp>
+      <p:sp>
+        <p:nvSpPr>
+          <p:cNvPr id="12" name="TextBox 11"/>
+          <p:cNvSpPr txBox="1"/>
+          <p:nvPr/>
+        </p:nvSpPr>
+        <p:spPr>
+          <a:xfrm>
+            <a:off x="822960" y="5212080"/>
+            <a:ext cx="548640" cy="1005840"/>
+          </a:xfrm>
+          <a:prstGeom prst="rect">
+            <a:avLst/>
+          </a:prstGeom>
+          <a:noFill/>
+        </p:spPr>
+        <p:txBody>
+          <a:bodyPr wrap="square" anchor="t" lIns="0" rIns="0" tIns="0" bIns="0">
+            <a:spAutoFit/>
+          </a:bodyPr>
+          <a:lstStyle/>
+          <a:p>
+            <a:pPr algn="l">
+              <a:spcAft>
+                <a:spcPts val="1170"/>
+              </a:spcAft>
+            </a:pPr>
+            <a:r>
+              <a:rPr sz="2600" b="1" i="0">
+                <a:solidFill>
+                  <a:srgbClr val="F47B20"/>
+                </a:solidFill>
+                <a:latin typeface="Source Serif 4"/>
+              </a:rPr>
+              <a:t>4</a:t>
+            </a:r>
+          </a:p>
+        </p:txBody>
+      </p:sp>
+      <p:sp>
+        <p:nvSpPr>
+          <p:cNvPr id="13" name="TextBox 12"/>
+          <p:cNvSpPr txBox="1"/>
+          <p:nvPr/>
+        </p:nvSpPr>
+        <p:spPr>
+          <a:xfrm>
+            <a:off x="1463040" y="5248656"/>
+            <a:ext cx="9875520" cy="1005840"/>
+          </a:xfrm>
+          <a:prstGeom prst="rect">
+            <a:avLst/>
+          </a:prstGeom>
+          <a:noFill/>
+        </p:spPr>
+        <p:txBody>
+          <a:bodyPr wrap="square" anchor="t" lIns="0" rIns="0" tIns="0" bIns="0">
+            <a:spAutoFit/>
+          </a:bodyPr>
+          <a:lstStyle/>
+          <a:p>
+            <a:pPr algn="l">
+              <a:spcAft>
+                <a:spcPts val="945"/>
+              </a:spcAft>
+            </a:pPr>
+            <a:r>
+              <a:rPr sz="2100" b="1" i="0">
+                <a:solidFill>
+                  <a:srgbClr val="1C1B19"/>
+                </a:solidFill>
+                <a:latin typeface="Source Serif 4"/>
+              </a:rPr>
+              <a:t>Mattering</a:t>
+            </a:r>
+          </a:p>
+          <a:p>
+            <a:pPr algn="l">
+              <a:spcAft>
+                <a:spcPts val="945"/>
+              </a:spcAft>
+            </a:pPr>
+            <a:r>
+              <a:rPr sz="1600" b="0" i="0">
+                <a:solidFill>
+                  <a:srgbClr val="5D5A54"/>
+                </a:solidFill>
+                <a:latin typeface="Source Serif 4"/>
+              </a:rPr>
+              <a:t>Wondering if your being there makes a difference.</a:t>
+            </a:r>
+          </a:p>
+        </p:txBody>
+      </p:sp>
+    </p:spTree>
+  </p:cSld>
+  <p:clrMapOvr>
+    <a:masterClrMapping/>
+  </p:clrMapOvr>
+</p:sld>
+</file>
+
+<file path=ppt/slides/slide5.xml><?xml version="1.0" encoding="utf-8"?>
+<p:sld xmlns:a="http://schemas.openxmlformats.org/drawingml/2006/main" xmlns:p="http://schemas.openxmlformats.org/presentationml/2006/main" xmlns:r="http://schemas.openxmlformats.org/officeDocument/2006/relationships">
+  <p:cSld>
+    <p:bg>
+      <p:bgPr>
+        <a:solidFill>
+          <a:srgbClr val="F7F4EE"/>
+        </a:solidFill>
+        <a:effectLst/>
+      </p:bgPr>
+    </p:bg>
+    <p:spTree>
+      <p:nvGrpSpPr>
+        <p:cNvPr id="1" name=""/>
+        <p:cNvGrpSpPr/>
+        <p:nvPr/>
+      </p:nvGrpSpPr>
+      <p:grpSpPr/>
+      <p:sp>
+        <p:nvSpPr>
+          <p:cNvPr id="2" name="Rectangle 1"/>
           <p:cNvSpPr/>
           <p:nvPr/>
         </p:nvSpPr>
         <p:spPr>
           <a:xfrm>
-            <a:off x="822960" y="4023360"/>
-            <a:ext cx="10515600" cy="1371600"/>
+            <a:off x="548640" y="502920"/>
+            <a:ext cx="457200" cy="54864"/>
           </a:xfrm>
           <a:prstGeom prst="rect">
             <a:avLst/>
           </a:prstGeom>
           <a:solidFill>
-            <a:srgbClr val="FFFFFF"/>
+            <a:srgbClr val="F47B20"/>
           </a:solidFill>
-          <a:ln w="15875">
-            <a:solidFill>
-              <a:srgbClr val="1C1B19"/>
-            </a:solidFill>
+          <a:ln>
+            <a:noFill/>
           </a:ln>
           <a:effectLst/>
         </p:spPr>
@@ -5068,14 +6910,225 @@
       </p:sp>
       <p:sp>
         <p:nvSpPr>
+          <p:cNvPr id="3" name="TextBox 2"/>
+          <p:cNvSpPr txBox="1"/>
+          <p:nvPr/>
+        </p:nvSpPr>
+        <p:spPr>
+          <a:xfrm>
+            <a:off x="1143000" y="393192"/>
+            <a:ext cx="8229600" cy="274320"/>
+          </a:xfrm>
+          <a:prstGeom prst="rect">
+            <a:avLst/>
+          </a:prstGeom>
+          <a:noFill/>
+        </p:spPr>
+        <p:txBody>
+          <a:bodyPr wrap="square" anchor="t" lIns="0" rIns="0" tIns="0" bIns="0">
+            <a:spAutoFit/>
+          </a:bodyPr>
+          <a:lstStyle/>
+          <a:p>
+            <a:pPr algn="l">
+              <a:spcAft>
+                <a:spcPts val="540"/>
+              </a:spcAft>
+            </a:pPr>
+            <a:r>
+              <a:rPr sz="1200" b="1" i="0">
+                <a:solidFill>
+                  <a:srgbClr val="5D5A54"/>
+                </a:solidFill>
+                <a:latin typeface="Inter Tight"/>
+              </a:rPr>
+              <a:t>CHECK FIRST</a:t>
+            </a:r>
+          </a:p>
+        </p:txBody>
+      </p:sp>
+      <p:sp>
+        <p:nvSpPr>
+          <p:cNvPr id="4" name="TextBox 3"/>
+          <p:cNvSpPr txBox="1"/>
+          <p:nvPr/>
+        </p:nvSpPr>
+        <p:spPr>
+          <a:xfrm>
+            <a:off x="8229600" y="6400800"/>
+            <a:ext cx="3410712" cy="274320"/>
+          </a:xfrm>
+          <a:prstGeom prst="rect">
+            <a:avLst/>
+          </a:prstGeom>
+          <a:noFill/>
+        </p:spPr>
+        <p:txBody>
+          <a:bodyPr wrap="square" anchor="t" lIns="0" rIns="0" tIns="0" bIns="0">
+            <a:spAutoFit/>
+          </a:bodyPr>
+          <a:lstStyle/>
+          <a:p>
+            <a:pPr algn="r">
+              <a:spcAft>
+                <a:spcPts val="450"/>
+              </a:spcAft>
+            </a:pPr>
+            <a:r>
+              <a:rPr sz="1000" b="0" i="0">
+                <a:solidFill>
+                  <a:srgbClr val="5D5A54"/>
+                </a:solidFill>
+                <a:latin typeface="Inter Tight"/>
+              </a:rPr>
+              <a:t>Beaver Counseling</a:t>
+            </a:r>
+          </a:p>
+        </p:txBody>
+      </p:sp>
+      <p:sp>
+        <p:nvSpPr>
+          <p:cNvPr id="5" name="TextBox 4"/>
+          <p:cNvSpPr txBox="1"/>
+          <p:nvPr/>
+        </p:nvSpPr>
+        <p:spPr>
+          <a:xfrm>
+            <a:off x="822960" y="1005840"/>
+            <a:ext cx="10515600" cy="1097280"/>
+          </a:xfrm>
+          <a:prstGeom prst="rect">
+            <a:avLst/>
+          </a:prstGeom>
+          <a:noFill/>
+        </p:spPr>
+        <p:txBody>
+          <a:bodyPr wrap="square" anchor="t" lIns="0" rIns="0" tIns="0" bIns="0">
+            <a:spAutoFit/>
+          </a:bodyPr>
+          <a:lstStyle/>
+          <a:p>
+            <a:pPr algn="l">
+              <a:spcAft>
+                <a:spcPts val="1620"/>
+              </a:spcAft>
+            </a:pPr>
+            <a:r>
+              <a:rPr sz="3600" b="1" i="0">
+                <a:solidFill>
+                  <a:srgbClr val="1C1B19"/>
+                </a:solidFill>
+                <a:latin typeface="Source Serif 4"/>
+              </a:rPr>
+              <a:t>Accident, drift, or on purpose?</a:t>
+            </a:r>
+          </a:p>
+        </p:txBody>
+      </p:sp>
+      <p:sp>
+        <p:nvSpPr>
+          <p:cNvPr id="6" name="TextBox 5"/>
+          <p:cNvSpPr txBox="1"/>
+          <p:nvPr/>
+        </p:nvSpPr>
+        <p:spPr>
+          <a:xfrm>
+            <a:off x="822960" y="2194560"/>
+            <a:ext cx="548640" cy="1051560"/>
+          </a:xfrm>
+          <a:prstGeom prst="rect">
+            <a:avLst/>
+          </a:prstGeom>
+          <a:noFill/>
+        </p:spPr>
+        <p:txBody>
+          <a:bodyPr wrap="square" anchor="t" lIns="0" rIns="0" tIns="0" bIns="0">
+            <a:spAutoFit/>
+          </a:bodyPr>
+          <a:lstStyle/>
+          <a:p>
+            <a:pPr algn="l">
+              <a:spcAft>
+                <a:spcPts val="1170"/>
+              </a:spcAft>
+            </a:pPr>
+            <a:r>
+              <a:rPr sz="2600" b="1" i="0">
+                <a:solidFill>
+                  <a:srgbClr val="F47B20"/>
+                </a:solidFill>
+                <a:latin typeface="Source Serif 4"/>
+              </a:rPr>
+              <a:t>•</a:t>
+            </a:r>
+          </a:p>
+        </p:txBody>
+      </p:sp>
+      <p:sp>
+        <p:nvSpPr>
+          <p:cNvPr id="7" name="TextBox 6"/>
+          <p:cNvSpPr txBox="1"/>
+          <p:nvPr/>
+        </p:nvSpPr>
+        <p:spPr>
+          <a:xfrm>
+            <a:off x="1463040" y="2231136"/>
+            <a:ext cx="9875520" cy="1051560"/>
+          </a:xfrm>
+          <a:prstGeom prst="rect">
+            <a:avLst/>
+          </a:prstGeom>
+          <a:noFill/>
+        </p:spPr>
+        <p:txBody>
+          <a:bodyPr wrap="square" anchor="t" lIns="0" rIns="0" tIns="0" bIns="0">
+            <a:spAutoFit/>
+          </a:bodyPr>
+          <a:lstStyle/>
+          <a:p>
+            <a:pPr algn="l">
+              <a:spcAft>
+                <a:spcPts val="945"/>
+              </a:spcAft>
+            </a:pPr>
+            <a:r>
+              <a:rPr sz="2100" b="1" i="0">
+                <a:solidFill>
+                  <a:srgbClr val="1C1B19"/>
+                </a:solidFill>
+                <a:latin typeface="Source Serif 4"/>
+              </a:rPr>
+              <a:t>An accident</a:t>
+            </a:r>
+          </a:p>
+          <a:p>
+            <a:pPr algn="l">
+              <a:spcAft>
+                <a:spcPts val="945"/>
+              </a:spcAft>
+            </a:pPr>
+            <a:r>
+              <a:rPr sz="1600" b="0" i="0">
+                <a:solidFill>
+                  <a:srgbClr val="5D5A54"/>
+                </a:solidFill>
+                <a:latin typeface="Source Serif 4"/>
+              </a:rPr>
+              <a:t>Someone didn't think, or assumed you were busy.</a:t>
+            </a:r>
+          </a:p>
+        </p:txBody>
+      </p:sp>
+      <p:sp>
+        <p:nvSpPr>
           <p:cNvPr id="8" name="TextBox 7"/>
           <p:cNvSpPr txBox="1"/>
           <p:nvPr/>
         </p:nvSpPr>
         <p:spPr>
           <a:xfrm>
-            <a:off x="1097280" y="4206240"/>
-            <a:ext cx="10058400" cy="365760"/>
+            <a:off x="822960" y="3246120"/>
+            <a:ext cx="548640" cy="1051560"/>
           </a:xfrm>
           <a:prstGeom prst="rect">
             <a:avLst/>
@@ -5090,17 +7143,17 @@
           <a:p>
             <a:pPr algn="l">
               <a:spcAft>
-                <a:spcPts val="540"/>
-              </a:spcAft>
-            </a:pPr>
-            <a:r>
-              <a:rPr sz="1200" b="1" i="0">
-                <a:solidFill>
-                  <a:srgbClr val="0B2D5B"/>
-                </a:solidFill>
-                <a:latin typeface="Inter Tight"/>
-              </a:rPr>
-              <a:t>STUDENT PAGE</a:t>
+                <a:spcPts val="1170"/>
+              </a:spcAft>
+            </a:pPr>
+            <a:r>
+              <a:rPr sz="2600" b="1" i="0">
+                <a:solidFill>
+                  <a:srgbClr val="F47B20"/>
+                </a:solidFill>
+                <a:latin typeface="Source Serif 4"/>
+              </a:rPr>
+              <a:t>•</a:t>
             </a:r>
           </a:p>
         </p:txBody>
@@ -5113,8 +7166,8 @@
         </p:nvSpPr>
         <p:spPr>
           <a:xfrm>
-            <a:off x="1097280" y="4617720"/>
-            <a:ext cx="10058400" cy="640080"/>
+            <a:off x="1463040" y="3282696"/>
+            <a:ext cx="9875520" cy="1051560"/>
           </a:xfrm>
           <a:prstGeom prst="rect">
             <a:avLst/>
@@ -5129,101 +7182,47 @@
           <a:p>
             <a:pPr algn="l">
               <a:spcAft>
-                <a:spcPts val="900"/>
-              </a:spcAft>
-            </a:pPr>
-            <a:r>
-              <a:rPr sz="2000" b="0" i="0">
+                <a:spcPts val="945"/>
+              </a:spcAft>
+            </a:pPr>
+            <a:r>
+              <a:rPr sz="2100" b="1" i="0">
                 <a:solidFill>
                   <a:srgbClr val="1C1B19"/>
                 </a:solidFill>
-                <a:latin typeface="Inter Tight"/>
-              </a:rPr>
-              <a:t>https://rmwtoolkit.github.io/bcds-toolkit/the-third-wheel-high-school.html</a:t>
-            </a:r>
-          </a:p>
-        </p:txBody>
-      </p:sp>
-    </p:spTree>
-  </p:cSld>
-  <p:clrMapOvr>
-    <a:masterClrMapping/>
-  </p:clrMapOvr>
-</p:sld>
-</file>
-
-<file path=ppt/slides/slide2.xml><?xml version="1.0" encoding="utf-8"?>
-<p:sld xmlns:a="http://schemas.openxmlformats.org/drawingml/2006/main" xmlns:p="http://schemas.openxmlformats.org/presentationml/2006/main" xmlns:r="http://schemas.openxmlformats.org/officeDocument/2006/relationships" show="0">
-  <p:cSld>
-    <p:bg>
-      <p:bgPr>
-        <a:solidFill>
-          <a:srgbClr val="EEEBE4"/>
-        </a:solidFill>
-        <a:effectLst/>
-      </p:bgPr>
-    </p:bg>
-    <p:spTree>
-      <p:nvGrpSpPr>
-        <p:cNvPr id="1" name=""/>
-        <p:cNvGrpSpPr/>
-        <p:nvPr/>
-      </p:nvGrpSpPr>
-      <p:grpSpPr/>
-      <p:sp>
-        <p:nvSpPr>
-          <p:cNvPr id="2" name="Rectangle 1"/>
-          <p:cNvSpPr/>
-          <p:nvPr/>
-        </p:nvSpPr>
-        <p:spPr>
-          <a:xfrm>
-            <a:off x="0" y="0"/>
-            <a:ext cx="12191695" cy="384048"/>
-          </a:xfrm>
-          <a:prstGeom prst="rect">
-            <a:avLst/>
-          </a:prstGeom>
-          <a:solidFill>
-            <a:srgbClr val="0B2D5B"/>
-          </a:solidFill>
-          <a:ln>
-            <a:noFill/>
-          </a:ln>
-          <a:effectLst/>
-        </p:spPr>
-        <p:style>
-          <a:lnRef idx="1">
-            <a:schemeClr val="accent1"/>
-          </a:lnRef>
-          <a:fillRef idx="3">
-            <a:schemeClr val="accent1"/>
-          </a:fillRef>
-          <a:effectRef idx="2">
-            <a:schemeClr val="accent1"/>
-          </a:effectRef>
-          <a:fontRef idx="minor">
-            <a:schemeClr val="lt1"/>
-          </a:fontRef>
-        </p:style>
-        <p:txBody>
-          <a:bodyPr rtlCol="0" anchor="ctr"/>
-          <a:lstStyle/>
-          <a:p>
-            <a:pPr algn="ctr"/>
-          </a:p>
-        </p:txBody>
-      </p:sp>
-      <p:sp>
-        <p:nvSpPr>
-          <p:cNvPr id="3" name="TextBox 2"/>
+                <a:latin typeface="Source Serif 4"/>
+              </a:rPr>
+              <a:t>A drift</a:t>
+            </a:r>
+          </a:p>
+          <a:p>
+            <a:pPr algn="l">
+              <a:spcAft>
+                <a:spcPts val="945"/>
+              </a:spcAft>
+            </a:pPr>
+            <a:r>
+              <a:rPr sz="1600" b="0" i="0">
+                <a:solidFill>
+                  <a:srgbClr val="5D5A54"/>
+                </a:solidFill>
+                <a:latin typeface="Source Serif 4"/>
+              </a:rPr>
+              <a:t>Schedules, jobs or relationships pulled people apart.</a:t>
+            </a:r>
+          </a:p>
+        </p:txBody>
+      </p:sp>
+      <p:sp>
+        <p:nvSpPr>
+          <p:cNvPr id="10" name="TextBox 9"/>
           <p:cNvSpPr txBox="1"/>
           <p:nvPr/>
         </p:nvSpPr>
         <p:spPr>
           <a:xfrm>
-            <a:off x="548640" y="100584"/>
-            <a:ext cx="10972800" cy="274320"/>
+            <a:off x="822960" y="4297679"/>
+            <a:ext cx="548640" cy="1051560"/>
           </a:xfrm>
           <a:prstGeom prst="rect">
             <a:avLst/>
@@ -5238,31 +7237,31 @@
           <a:p>
             <a:pPr algn="l">
               <a:spcAft>
-                <a:spcPts val="495"/>
-              </a:spcAft>
-            </a:pPr>
-            <a:r>
-              <a:rPr sz="1100" b="1" i="0">
-                <a:solidFill>
-                  <a:srgbClr val="FFFFFF"/>
-                </a:solidFill>
-                <a:latin typeface="Inter Tight"/>
-              </a:rPr>
-              <a:t>TEACHER PAGE  ·  skipped when you present  ·  Before you teach</a:t>
-            </a:r>
-          </a:p>
-        </p:txBody>
-      </p:sp>
-      <p:sp>
-        <p:nvSpPr>
-          <p:cNvPr id="4" name="TextBox 3"/>
+                <a:spcPts val="1170"/>
+              </a:spcAft>
+            </a:pPr>
+            <a:r>
+              <a:rPr sz="2600" b="1" i="0">
+                <a:solidFill>
+                  <a:srgbClr val="F47B20"/>
+                </a:solidFill>
+                <a:latin typeface="Source Serif 4"/>
+              </a:rPr>
+              <a:t>•</a:t>
+            </a:r>
+          </a:p>
+        </p:txBody>
+      </p:sp>
+      <p:sp>
+        <p:nvSpPr>
+          <p:cNvPr id="11" name="TextBox 10"/>
           <p:cNvSpPr txBox="1"/>
           <p:nvPr/>
         </p:nvSpPr>
         <p:spPr>
           <a:xfrm>
-            <a:off x="548640" y="685800"/>
-            <a:ext cx="10972800" cy="640080"/>
+            <a:off x="1463040" y="4334255"/>
+            <a:ext cx="9875520" cy="1051560"/>
           </a:xfrm>
           <a:prstGeom prst="rect">
             <a:avLst/>
@@ -5277,1523 +7276,33 @@
           <a:p>
             <a:pPr algn="l">
               <a:spcAft>
-                <a:spcPts val="1350"/>
-              </a:spcAft>
-            </a:pPr>
-            <a:r>
-              <a:rPr sz="3000" b="1" i="0">
+                <a:spcPts val="945"/>
+              </a:spcAft>
+            </a:pPr>
+            <a:r>
+              <a:rPr sz="2100" b="1" i="0">
                 <a:solidFill>
                   <a:srgbClr val="1C1B19"/>
                 </a:solidFill>
                 <a:latin typeface="Source Serif 4"/>
               </a:rPr>
-              <a:t>Before you teach</a:t>
-            </a:r>
-          </a:p>
-        </p:txBody>
-      </p:sp>
-      <p:sp>
-        <p:nvSpPr>
-          <p:cNvPr id="5" name="TextBox 4"/>
-          <p:cNvSpPr txBox="1"/>
-          <p:nvPr/>
-        </p:nvSpPr>
-        <p:spPr>
-          <a:xfrm>
-            <a:off x="548640" y="1463040"/>
-            <a:ext cx="5394960" cy="4937760"/>
-          </a:xfrm>
-          <a:prstGeom prst="rect">
-            <a:avLst/>
-          </a:prstGeom>
-          <a:noFill/>
-        </p:spPr>
-        <p:txBody>
-          <a:bodyPr wrap="square" anchor="t" lIns="0" rIns="0" tIns="0" bIns="0">
-            <a:spAutoFit/>
-          </a:bodyPr>
-          <a:lstStyle/>
-          <a:p>
-            <a:pPr algn="l">
-              <a:spcAft>
-                <a:spcPts val="585"/>
-              </a:spcAft>
-            </a:pPr>
-            <a:r>
-              <a:rPr sz="1500" b="1" i="0">
-                <a:solidFill>
-                  <a:srgbClr val="1C1B19"/>
+              <a:t>On purpose</a:t>
+            </a:r>
+          </a:p>
+          <a:p>
+            <a:pPr algn="l">
+              <a:spcAft>
+                <a:spcPts val="945"/>
+              </a:spcAft>
+            </a:pPr>
+            <a:r>
+              <a:rPr sz="1600" b="0" i="0">
+                <a:solidFill>
+                  <a:srgbClr val="5D5A54"/>
                 </a:solidFill>
                 <a:latin typeface="Source Serif 4"/>
               </a:rPr>
-              <a:t>It may be happening in this circle.</a:t>
-            </a:r>
-          </a:p>
-          <a:p>
-            <a:pPr algn="l">
-              <a:spcAft>
-                <a:spcPts val="585"/>
-              </a:spcAft>
-            </a:pPr>
-            <a:r>
-              <a:rPr sz="1300" b="0" i="0">
-                <a:solidFill>
-                  <a:srgbClr val="1C1B19"/>
-                </a:solidFill>
-                <a:latin typeface="Source Serif 4"/>
-              </a:rPr>
-              <a:t>Advisory groups are small, and the student on the edge of a friend group may be sitting near that group. Don't ask for real examples, names, or plans. Use only the slide scenarios.</a:t>
-            </a:r>
-          </a:p>
-          <a:p>
-            <a:pPr algn="l">
-              <a:spcAft>
-                <a:spcPts val="585"/>
-              </a:spcAft>
-            </a:pPr>
-            <a:r>
-              <a:rPr sz="1300" b="0" i="0">
-                <a:solidFill>
-                  <a:srgbClr val="1C1B19"/>
-                </a:solidFill>
-                <a:latin typeface="Source Serif 4"/>
-              </a:rPr>
-              <a:t/>
-            </a:r>
-          </a:p>
-          <a:p>
-            <a:pPr algn="l">
-              <a:spcAft>
-                <a:spcPts val="585"/>
-              </a:spcAft>
-            </a:pPr>
-            <a:r>
-              <a:rPr sz="1500" b="1" i="0">
-                <a:solidFill>
-                  <a:srgbClr val="1C1B19"/>
-                </a:solidFill>
-                <a:latin typeface="Source Serif 4"/>
-              </a:rPr>
-              <a:t>Make pairing easy.</a:t>
-            </a:r>
-          </a:p>
-          <a:p>
-            <a:pPr algn="l">
-              <a:spcAft>
-                <a:spcPts val="585"/>
-              </a:spcAft>
-            </a:pPr>
-            <a:r>
-              <a:rPr sz="1300" b="0" i="0">
-                <a:solidFill>
-                  <a:srgbClr val="1C1B19"/>
-                </a:solidFill>
-                <a:latin typeface="Source Serif 4"/>
-              </a:rPr>
-              <a:t>Being the odd one out is the topic, so don't let students choose partners. Count off, and join a pair yourself if the numbers are uneven.</a:t>
-            </a:r>
-          </a:p>
-          <a:p>
-            <a:pPr algn="l">
-              <a:spcAft>
-                <a:spcPts val="585"/>
-              </a:spcAft>
-            </a:pPr>
-            <a:r>
-              <a:rPr sz="1300" b="0" i="0">
-                <a:solidFill>
-                  <a:srgbClr val="1C1B19"/>
-                </a:solidFill>
-                <a:latin typeface="Source Serif 4"/>
-              </a:rPr>
-              <a:t/>
-            </a:r>
-          </a:p>
-          <a:p>
-            <a:pPr algn="l">
-              <a:spcAft>
-                <a:spcPts val="585"/>
-              </a:spcAft>
-            </a:pPr>
-            <a:r>
-              <a:rPr sz="1500" b="1" i="0">
-                <a:solidFill>
-                  <a:srgbClr val="1C1B19"/>
-                </a:solidFill>
-                <a:latin typeface="Source Serif 4"/>
-              </a:rPr>
-              <a:t>On purpose, again and again, is bullying.</a:t>
-            </a:r>
-          </a:p>
-          <a:p>
-            <a:pPr algn="l">
-              <a:spcAft>
-                <a:spcPts val="585"/>
-              </a:spcAft>
-            </a:pPr>
-            <a:r>
-              <a:rPr sz="1300" b="0" i="0">
-                <a:solidFill>
-                  <a:srgbClr val="1C1B19"/>
-                </a:solidFill>
-                <a:latin typeface="Source Serif 4"/>
-              </a:rPr>
-              <a:t>If a student describes being deliberately left out, rumors, or someone telling others not to hang out with them, thank them, move on, and follow up privately that day with a counselor or dean.</a:t>
-            </a:r>
-          </a:p>
-          <a:p>
-            <a:pPr algn="l">
-              <a:spcAft>
-                <a:spcPts val="585"/>
-              </a:spcAft>
-            </a:pPr>
-            <a:r>
-              <a:rPr sz="1300" b="0" i="0">
-                <a:solidFill>
-                  <a:srgbClr val="1C1B19"/>
-                </a:solidFill>
-                <a:latin typeface="Source Serif 4"/>
-              </a:rPr>
-              <a:t/>
-            </a:r>
-          </a:p>
-        </p:txBody>
-      </p:sp>
-      <p:sp>
-        <p:nvSpPr>
-          <p:cNvPr id="6" name="TextBox 5"/>
-          <p:cNvSpPr txBox="1"/>
-          <p:nvPr/>
-        </p:nvSpPr>
-        <p:spPr>
-          <a:xfrm>
-            <a:off x="6217920" y="1463040"/>
-            <a:ext cx="5394960" cy="4937760"/>
-          </a:xfrm>
-          <a:prstGeom prst="rect">
-            <a:avLst/>
-          </a:prstGeom>
-          <a:noFill/>
-        </p:spPr>
-        <p:txBody>
-          <a:bodyPr wrap="square" anchor="t" lIns="0" rIns="0" tIns="0" bIns="0">
-            <a:spAutoFit/>
-          </a:bodyPr>
-          <a:lstStyle/>
-          <a:p>
-            <a:pPr algn="l">
-              <a:spcAft>
-                <a:spcPts val="585"/>
-              </a:spcAft>
-            </a:pPr>
-            <a:r>
-              <a:rPr sz="1500" b="1" i="0">
-                <a:solidFill>
-                  <a:srgbClr val="1C1B19"/>
-                </a:solidFill>
-                <a:latin typeface="Source Serif 4"/>
-              </a:rPr>
-              <a:t>Weeks of feeling low go to a counselor.</a:t>
-            </a:r>
-          </a:p>
-          <a:p>
-            <a:pPr algn="l">
-              <a:spcAft>
-                <a:spcPts val="585"/>
-              </a:spcAft>
-            </a:pPr>
-            <a:r>
-              <a:rPr sz="1300" b="0" i="0">
-                <a:solidFill>
-                  <a:srgbClr val="1C1B19"/>
-                </a:solidFill>
-                <a:latin typeface="Source Serif 4"/>
-              </a:rPr>
-              <a:t>The student page names feeling low or alone for weeks as a reason to get help. Don't ask about this in the circle. Any disclosure goes to a counselor the same day.</a:t>
-            </a:r>
-          </a:p>
-          <a:p>
-            <a:pPr algn="l">
-              <a:spcAft>
-                <a:spcPts val="585"/>
-              </a:spcAft>
-            </a:pPr>
-            <a:r>
-              <a:rPr sz="1300" b="0" i="0">
-                <a:solidFill>
-                  <a:srgbClr val="1C1B19"/>
-                </a:solidFill>
-                <a:latin typeface="Source Serif 4"/>
-              </a:rPr>
-              <a:t/>
-            </a:r>
-          </a:p>
-          <a:p>
-            <a:pPr algn="l">
-              <a:spcAft>
-                <a:spcPts val="585"/>
-              </a:spcAft>
-            </a:pPr>
-            <a:r>
-              <a:rPr sz="1500" b="1" i="0">
-                <a:solidFill>
-                  <a:srgbClr val="1C1B19"/>
-                </a:solidFill>
-                <a:latin typeface="Source Serif 4"/>
-              </a:rPr>
-              <a:t>Jealousy is allowed.</a:t>
-            </a:r>
-          </a:p>
-          <a:p>
-            <a:pPr algn="l">
-              <a:spcAft>
-                <a:spcPts val="585"/>
-              </a:spcAft>
-            </a:pPr>
-            <a:r>
-              <a:rPr sz="1300" b="0" i="0">
-                <a:solidFill>
-                  <a:srgbClr val="1C1B19"/>
-                </a:solidFill>
-                <a:latin typeface="Source Serif 4"/>
-              </a:rPr>
-              <a:t>Students may admit they're jealous of a friend's new friend or partner. Treat it as a sign the friendship matters and keep shame out of it.</a:t>
-            </a:r>
-          </a:p>
-          <a:p>
-            <a:pPr algn="l">
-              <a:spcAft>
-                <a:spcPts val="585"/>
-              </a:spcAft>
-            </a:pPr>
-            <a:r>
-              <a:rPr sz="1300" b="0" i="0">
-                <a:solidFill>
-                  <a:srgbClr val="1C1B19"/>
-                </a:solidFill>
-                <a:latin typeface="Source Serif 4"/>
-              </a:rPr>
-              <a:t/>
-            </a:r>
-          </a:p>
-          <a:p>
-            <a:pPr algn="l">
-              <a:spcAft>
-                <a:spcPts val="585"/>
-              </a:spcAft>
-            </a:pPr>
-            <a:r>
-              <a:rPr sz="1500" b="1" i="0">
-                <a:solidFill>
-                  <a:srgbClr val="1C1B19"/>
-                </a:solidFill>
-                <a:latin typeface="Source Serif 4"/>
-              </a:rPr>
-              <a:t>Leave room for students who did the leaving out.</a:t>
-            </a:r>
-          </a:p>
-          <a:p>
-            <a:pPr algn="l">
-              <a:spcAft>
-                <a:spcPts val="585"/>
-              </a:spcAft>
-            </a:pPr>
-            <a:r>
-              <a:rPr sz="1300" b="0" i="0">
-                <a:solidFill>
-                  <a:srgbClr val="1C1B19"/>
-                </a:solidFill>
-                <a:latin typeface="Source Serif 4"/>
-              </a:rPr>
-              <a:t>Some students have started a separate chat or forgotten someone. Give them a way in: a quick "want to come?" fixes a lot of accidents.</a:t>
-            </a:r>
-          </a:p>
-          <a:p>
-            <a:pPr algn="l">
-              <a:spcAft>
-                <a:spcPts val="585"/>
-              </a:spcAft>
-            </a:pPr>
-            <a:r>
-              <a:rPr sz="1300" b="0" i="0">
-                <a:solidFill>
-                  <a:srgbClr val="1C1B19"/>
-                </a:solidFill>
-                <a:latin typeface="Source Serif 4"/>
-              </a:rPr>
-              <a:t/>
-            </a:r>
-          </a:p>
-        </p:txBody>
-      </p:sp>
-    </p:spTree>
-  </p:cSld>
-  <p:clrMapOvr>
-    <a:masterClrMapping/>
-  </p:clrMapOvr>
-</p:sld>
-</file>
-
-<file path=ppt/slides/slide3.xml><?xml version="1.0" encoding="utf-8"?>
-<p:sld xmlns:a="http://schemas.openxmlformats.org/drawingml/2006/main" xmlns:p="http://schemas.openxmlformats.org/presentationml/2006/main" xmlns:r="http://schemas.openxmlformats.org/officeDocument/2006/relationships" show="0">
-  <p:cSld>
-    <p:bg>
-      <p:bgPr>
-        <a:solidFill>
-          <a:srgbClr val="EEEBE4"/>
-        </a:solidFill>
-        <a:effectLst/>
-      </p:bgPr>
-    </p:bg>
-    <p:spTree>
-      <p:nvGrpSpPr>
-        <p:cNvPr id="1" name=""/>
-        <p:cNvGrpSpPr/>
-        <p:nvPr/>
-      </p:nvGrpSpPr>
-      <p:grpSpPr/>
-      <p:sp>
-        <p:nvSpPr>
-          <p:cNvPr id="2" name="Rectangle 1"/>
-          <p:cNvSpPr/>
-          <p:nvPr/>
-        </p:nvSpPr>
-        <p:spPr>
-          <a:xfrm>
-            <a:off x="0" y="0"/>
-            <a:ext cx="12191695" cy="384048"/>
-          </a:xfrm>
-          <a:prstGeom prst="rect">
-            <a:avLst/>
-          </a:prstGeom>
-          <a:solidFill>
-            <a:srgbClr val="0B2D5B"/>
-          </a:solidFill>
-          <a:ln>
-            <a:noFill/>
-          </a:ln>
-          <a:effectLst/>
-        </p:spPr>
-        <p:style>
-          <a:lnRef idx="1">
-            <a:schemeClr val="accent1"/>
-          </a:lnRef>
-          <a:fillRef idx="3">
-            <a:schemeClr val="accent1"/>
-          </a:fillRef>
-          <a:effectRef idx="2">
-            <a:schemeClr val="accent1"/>
-          </a:effectRef>
-          <a:fontRef idx="minor">
-            <a:schemeClr val="lt1"/>
-          </a:fontRef>
-        </p:style>
-        <p:txBody>
-          <a:bodyPr rtlCol="0" anchor="ctr"/>
-          <a:lstStyle/>
-          <a:p>
-            <a:pPr algn="ctr"/>
-          </a:p>
-        </p:txBody>
-      </p:sp>
-      <p:sp>
-        <p:nvSpPr>
-          <p:cNvPr id="3" name="TextBox 2"/>
-          <p:cNvSpPr txBox="1"/>
-          <p:nvPr/>
-        </p:nvSpPr>
-        <p:spPr>
-          <a:xfrm>
-            <a:off x="548640" y="100584"/>
-            <a:ext cx="10972800" cy="274320"/>
-          </a:xfrm>
-          <a:prstGeom prst="rect">
-            <a:avLst/>
-          </a:prstGeom>
-          <a:noFill/>
-        </p:spPr>
-        <p:txBody>
-          <a:bodyPr wrap="square" anchor="t" lIns="0" rIns="0" tIns="0" bIns="0">
-            <a:spAutoFit/>
-          </a:bodyPr>
-          <a:lstStyle/>
-          <a:p>
-            <a:pPr algn="l">
-              <a:spcAft>
-                <a:spcPts val="495"/>
-              </a:spcAft>
-            </a:pPr>
-            <a:r>
-              <a:rPr sz="1100" b="1" i="0">
-                <a:solidFill>
-                  <a:srgbClr val="FFFFFF"/>
-                </a:solidFill>
-                <a:latin typeface="Inter Tight"/>
-              </a:rPr>
-              <a:t>TEACHER PAGE  ·  skipped when you present  ·  Every student in the room</a:t>
-            </a:r>
-          </a:p>
-        </p:txBody>
-      </p:sp>
-      <p:sp>
-        <p:nvSpPr>
-          <p:cNvPr id="4" name="TextBox 3"/>
-          <p:cNvSpPr txBox="1"/>
-          <p:nvPr/>
-        </p:nvSpPr>
-        <p:spPr>
-          <a:xfrm>
-            <a:off x="548640" y="685800"/>
-            <a:ext cx="10972800" cy="640080"/>
-          </a:xfrm>
-          <a:prstGeom prst="rect">
-            <a:avLst/>
-          </a:prstGeom>
-          <a:noFill/>
-        </p:spPr>
-        <p:txBody>
-          <a:bodyPr wrap="square" anchor="t" lIns="0" rIns="0" tIns="0" bIns="0">
-            <a:spAutoFit/>
-          </a:bodyPr>
-          <a:lstStyle/>
-          <a:p>
-            <a:pPr algn="l">
-              <a:spcAft>
-                <a:spcPts val="1350"/>
-              </a:spcAft>
-            </a:pPr>
-            <a:r>
-              <a:rPr sz="3000" b="1" i="0">
-                <a:solidFill>
-                  <a:srgbClr val="1C1B19"/>
-                </a:solidFill>
-                <a:latin typeface="Source Serif 4"/>
-              </a:rPr>
-              <a:t>Every student in the room</a:t>
-            </a:r>
-          </a:p>
-        </p:txBody>
-      </p:sp>
-      <p:sp>
-        <p:nvSpPr>
-          <p:cNvPr id="5" name="TextBox 4"/>
-          <p:cNvSpPr txBox="1"/>
-          <p:nvPr/>
-        </p:nvSpPr>
-        <p:spPr>
-          <a:xfrm>
-            <a:off x="548640" y="1325880"/>
-            <a:ext cx="10972800" cy="365760"/>
-          </a:xfrm>
-          <a:prstGeom prst="rect">
-            <a:avLst/>
-          </a:prstGeom>
-          <a:noFill/>
-        </p:spPr>
-        <p:txBody>
-          <a:bodyPr wrap="square" anchor="t" lIns="0" rIns="0" tIns="0" bIns="0">
-            <a:spAutoFit/>
-          </a:bodyPr>
-          <a:lstStyle/>
-          <a:p>
-            <a:pPr algn="l">
-              <a:spcAft>
-                <a:spcPts val="630"/>
-              </a:spcAft>
-            </a:pPr>
-            <a:r>
-              <a:rPr sz="1400" b="0" i="0">
-                <a:solidFill>
-                  <a:srgbClr val="5D5A54"/>
-                </a:solidFill>
-                <a:latin typeface="Inter Tight"/>
-              </a:rPr>
-              <a:t>Culture, family, identity, ability and money: what to keep in mind for this topic.</a:t>
-            </a:r>
-          </a:p>
-        </p:txBody>
-      </p:sp>
-      <p:sp>
-        <p:nvSpPr>
-          <p:cNvPr id="6" name="TextBox 5"/>
-          <p:cNvSpPr txBox="1"/>
-          <p:nvPr/>
-        </p:nvSpPr>
-        <p:spPr>
-          <a:xfrm>
-            <a:off x="548640" y="1828800"/>
-            <a:ext cx="5394960" cy="4572000"/>
-          </a:xfrm>
-          <a:prstGeom prst="rect">
-            <a:avLst/>
-          </a:prstGeom>
-          <a:noFill/>
-        </p:spPr>
-        <p:txBody>
-          <a:bodyPr wrap="square" anchor="t" lIns="0" rIns="0" tIns="0" bIns="0">
-            <a:spAutoFit/>
-          </a:bodyPr>
-          <a:lstStyle/>
-          <a:p>
-            <a:pPr algn="l">
-              <a:spcAft>
-                <a:spcPts val="585"/>
-              </a:spcAft>
-            </a:pPr>
-            <a:r>
-              <a:rPr sz="1500" b="1" i="0">
-                <a:solidFill>
-                  <a:srgbClr val="1C1B19"/>
-                </a:solidFill>
-                <a:latin typeface="Source Serif 4"/>
-              </a:rPr>
-              <a:t>Family rules and faith shape plans.</a:t>
-            </a:r>
-          </a:p>
-          <a:p>
-            <a:pPr algn="l">
-              <a:spcAft>
-                <a:spcPts val="585"/>
-              </a:spcAft>
-            </a:pPr>
-            <a:r>
-              <a:rPr sz="1300" b="0" i="0">
-                <a:solidFill>
-                  <a:srgbClr val="1C1B19"/>
-                </a:solidFill>
-                <a:latin typeface="Source Serif 4"/>
-              </a:rPr>
-              <a:t>Curfews, religious services and holy days, family responsibilities, and rules about where students can go mean some miss more plans. Present "I usually can't do Friday nights, but I'm in for Saturday afternoons" as a strong move, and don't assume every family runs the same way.</a:t>
-            </a:r>
-          </a:p>
-          <a:p>
-            <a:pPr algn="l">
-              <a:spcAft>
-                <a:spcPts val="585"/>
-              </a:spcAft>
-            </a:pPr>
-            <a:r>
-              <a:rPr sz="1300" b="0" i="0">
-                <a:solidFill>
-                  <a:srgbClr val="1C1B19"/>
-                </a:solidFill>
-                <a:latin typeface="Source Serif 4"/>
-              </a:rPr>
-              <a:t/>
-            </a:r>
-          </a:p>
-          <a:p>
-            <a:pPr algn="l">
-              <a:spcAft>
-                <a:spcPts val="585"/>
-              </a:spcAft>
-            </a:pPr>
-            <a:r>
-              <a:rPr sz="1500" b="1" i="0">
-                <a:solidFill>
-                  <a:srgbClr val="1C1B19"/>
-                </a:solidFill>
-                <a:latin typeface="Source Serif 4"/>
-              </a:rPr>
-              <a:t>Money, jobs and rides.</a:t>
-            </a:r>
-          </a:p>
-          <a:p>
-            <a:pPr algn="l">
-              <a:spcAft>
-                <a:spcPts val="585"/>
-              </a:spcAft>
-            </a:pPr>
-            <a:r>
-              <a:rPr sz="1300" b="0" i="0">
-                <a:solidFill>
-                  <a:srgbClr val="1C1B19"/>
-                </a:solidFill>
-                <a:latin typeface="Source Serif 4"/>
-              </a:rPr>
-              <a:t>Some students work, can't afford the plan, or don't have a ride. The "car with four seats" example fits here. When you model making a plan, suggest free ones.</a:t>
-            </a:r>
-          </a:p>
-          <a:p>
-            <a:pPr algn="l">
-              <a:spcAft>
-                <a:spcPts val="585"/>
-              </a:spcAft>
-            </a:pPr>
-            <a:r>
-              <a:rPr sz="1300" b="0" i="0">
-                <a:solidFill>
-                  <a:srgbClr val="1C1B19"/>
-                </a:solidFill>
-                <a:latin typeface="Source Serif 4"/>
-              </a:rPr>
-              <a:t/>
-            </a:r>
-          </a:p>
-          <a:p>
-            <a:pPr algn="l">
-              <a:spcAft>
-                <a:spcPts val="585"/>
-              </a:spcAft>
-            </a:pPr>
-            <a:r>
-              <a:rPr sz="1500" b="1" i="0">
-                <a:solidFill>
-                  <a:srgbClr val="1C1B19"/>
-                </a:solidFill>
-                <a:latin typeface="Source Serif 4"/>
-              </a:rPr>
-              <a:t>Dating examples include everyone.</a:t>
-            </a:r>
-          </a:p>
-          <a:p>
-            <a:pPr algn="l">
-              <a:spcAft>
-                <a:spcPts val="585"/>
-              </a:spcAft>
-            </a:pPr>
-            <a:r>
-              <a:rPr sz="1300" b="0" i="0">
-                <a:solidFill>
-                  <a:srgbClr val="1C1B19"/>
-                </a:solidFill>
-                <a:latin typeface="Source Serif 4"/>
-              </a:rPr>
-              <a:t>Nadia's partner Chris could be any gender; say "partner" or "someone you like" when you talk about it. A Close Friends list or a screenshot can also reveal who someone likes, which makes it a counselor conversation and never a discussion topic.</a:t>
-            </a:r>
-          </a:p>
-          <a:p>
-            <a:pPr algn="l">
-              <a:spcAft>
-                <a:spcPts val="585"/>
-              </a:spcAft>
-            </a:pPr>
-            <a:r>
-              <a:rPr sz="1300" b="0" i="0">
-                <a:solidFill>
-                  <a:srgbClr val="1C1B19"/>
-                </a:solidFill>
-                <a:latin typeface="Source Serif 4"/>
-              </a:rPr>
-              <a:t/>
-            </a:r>
-          </a:p>
-        </p:txBody>
-      </p:sp>
-      <p:sp>
-        <p:nvSpPr>
-          <p:cNvPr id="7" name="TextBox 6"/>
-          <p:cNvSpPr txBox="1"/>
-          <p:nvPr/>
-        </p:nvSpPr>
-        <p:spPr>
-          <a:xfrm>
-            <a:off x="6217920" y="1828800"/>
-            <a:ext cx="5394960" cy="4572000"/>
-          </a:xfrm>
-          <a:prstGeom prst="rect">
-            <a:avLst/>
-          </a:prstGeom>
-          <a:noFill/>
-        </p:spPr>
-        <p:txBody>
-          <a:bodyPr wrap="square" anchor="t" lIns="0" rIns="0" tIns="0" bIns="0">
-            <a:spAutoFit/>
-          </a:bodyPr>
-          <a:lstStyle/>
-          <a:p>
-            <a:pPr algn="l">
-              <a:spcAft>
-                <a:spcPts val="585"/>
-              </a:spcAft>
-            </a:pPr>
-            <a:r>
-              <a:rPr sz="1500" b="1" i="0">
-                <a:solidFill>
-                  <a:srgbClr val="1C1B19"/>
-                </a:solidFill>
-                <a:latin typeface="Source Serif 4"/>
-              </a:rPr>
-              <a:t>Social cues and social energy.</a:t>
-            </a:r>
-          </a:p>
-          <a:p>
-            <a:pPr algn="l">
-              <a:spcAft>
-                <a:spcPts val="585"/>
-              </a:spcAft>
-            </a:pPr>
-            <a:r>
-              <a:rPr sz="1300" b="0" i="0">
-                <a:solidFill>
-                  <a:srgbClr val="1C1B19"/>
-                </a:solidFill>
-                <a:latin typeface="Source Serif 4"/>
-              </a:rPr>
-              <a:t>Autistic students, students with ADHD, and students with social anxiety may find it harder to tell whether a plan was open, or to walk up and sit down. The one honest sentence gives a script. Don't treat speaking up in the group as the only sign of a good friend.</a:t>
-            </a:r>
-          </a:p>
-          <a:p>
-            <a:pPr algn="l">
-              <a:spcAft>
-                <a:spcPts val="585"/>
-              </a:spcAft>
-            </a:pPr>
-            <a:r>
-              <a:rPr sz="1300" b="0" i="0">
-                <a:solidFill>
-                  <a:srgbClr val="1C1B19"/>
-                </a:solidFill>
-                <a:latin typeface="Source Serif 4"/>
-              </a:rPr>
-              <a:t/>
-            </a:r>
-          </a:p>
-          <a:p>
-            <a:pPr algn="l">
-              <a:spcAft>
-                <a:spcPts val="585"/>
-              </a:spcAft>
-            </a:pPr>
-            <a:r>
-              <a:rPr sz="1500" b="1" i="0">
-                <a:solidFill>
-                  <a:srgbClr val="1C1B19"/>
-                </a:solidFill>
-                <a:latin typeface="Source Serif 4"/>
-              </a:rPr>
-              <a:t>Two homes, two schedules.</a:t>
-            </a:r>
-          </a:p>
-          <a:p>
-            <a:pPr algn="l">
-              <a:spcAft>
-                <a:spcPts val="585"/>
-              </a:spcAft>
-            </a:pPr>
-            <a:r>
-              <a:rPr sz="1300" b="0" i="0">
-                <a:solidFill>
-                  <a:srgbClr val="1C1B19"/>
-                </a:solidFill>
-                <a:latin typeface="Source Serif 4"/>
-              </a:rPr>
-              <a:t>Students who split time between households, live with grandparents, or are in foster or kinship care may miss plans on certain weekends. Say "the adults at home" and treat it as logistics.</a:t>
-            </a:r>
-          </a:p>
-          <a:p>
-            <a:pPr algn="l">
-              <a:spcAft>
-                <a:spcPts val="585"/>
-              </a:spcAft>
-            </a:pPr>
-            <a:r>
-              <a:rPr sz="1300" b="0" i="0">
-                <a:solidFill>
-                  <a:srgbClr val="1C1B19"/>
-                </a:solidFill>
-                <a:latin typeface="Source Serif 4"/>
-              </a:rPr>
-              <a:t/>
-            </a:r>
-          </a:p>
-          <a:p>
-            <a:pPr algn="l">
-              <a:spcAft>
-                <a:spcPts val="585"/>
-              </a:spcAft>
-            </a:pPr>
-            <a:r>
-              <a:rPr sz="1500" b="1" i="0">
-                <a:solidFill>
-                  <a:srgbClr val="1C1B19"/>
-                </a:solidFill>
-                <a:latin typeface="Source Serif 4"/>
-              </a:rPr>
-              <a:t>New to the group, the school, or the country.</a:t>
-            </a:r>
-          </a:p>
-          <a:p>
-            <a:pPr algn="l">
-              <a:spcAft>
-                <a:spcPts val="585"/>
-              </a:spcAft>
-            </a:pPr>
-            <a:r>
-              <a:rPr sz="1300" b="0" i="0">
-                <a:solidFill>
-                  <a:srgbClr val="1C1B19"/>
-                </a:solidFill>
-                <a:latin typeface="Source Serif 4"/>
-              </a:rPr>
-              <a:t>Students who are new, or who speak another language at home, may feel on the edge when inside jokes and fast talk fly by. Widening your base can include a cultural club, a cousin, or an online group in their language.</a:t>
-            </a:r>
-          </a:p>
-          <a:p>
-            <a:pPr algn="l">
-              <a:spcAft>
-                <a:spcPts val="585"/>
-              </a:spcAft>
-            </a:pPr>
-            <a:r>
-              <a:rPr sz="1300" b="0" i="0">
-                <a:solidFill>
-                  <a:srgbClr val="1C1B19"/>
-                </a:solidFill>
-                <a:latin typeface="Source Serif 4"/>
-              </a:rPr>
-              <a:t/>
-            </a:r>
-          </a:p>
-        </p:txBody>
-      </p:sp>
-    </p:spTree>
-  </p:cSld>
-  <p:clrMapOvr>
-    <a:masterClrMapping/>
-  </p:clrMapOvr>
-</p:sld>
-</file>
-
-<file path=ppt/slides/slide4.xml><?xml version="1.0" encoding="utf-8"?>
-<p:sld xmlns:a="http://schemas.openxmlformats.org/drawingml/2006/main" xmlns:p="http://schemas.openxmlformats.org/presentationml/2006/main" xmlns:r="http://schemas.openxmlformats.org/officeDocument/2006/relationships" show="0">
-  <p:cSld>
-    <p:bg>
-      <p:bgPr>
-        <a:solidFill>
-          <a:srgbClr val="EEEBE4"/>
-        </a:solidFill>
-        <a:effectLst/>
-      </p:bgPr>
-    </p:bg>
-    <p:spTree>
-      <p:nvGrpSpPr>
-        <p:cNvPr id="1" name=""/>
-        <p:cNvGrpSpPr/>
-        <p:nvPr/>
-      </p:nvGrpSpPr>
-      <p:grpSpPr/>
-      <p:sp>
-        <p:nvSpPr>
-          <p:cNvPr id="2" name="Rectangle 1"/>
-          <p:cNvSpPr/>
-          <p:nvPr/>
-        </p:nvSpPr>
-        <p:spPr>
-          <a:xfrm>
-            <a:off x="0" y="0"/>
-            <a:ext cx="12191695" cy="384048"/>
-          </a:xfrm>
-          <a:prstGeom prst="rect">
-            <a:avLst/>
-          </a:prstGeom>
-          <a:solidFill>
-            <a:srgbClr val="0B2D5B"/>
-          </a:solidFill>
-          <a:ln>
-            <a:noFill/>
-          </a:ln>
-          <a:effectLst/>
-        </p:spPr>
-        <p:style>
-          <a:lnRef idx="1">
-            <a:schemeClr val="accent1"/>
-          </a:lnRef>
-          <a:fillRef idx="3">
-            <a:schemeClr val="accent1"/>
-          </a:fillRef>
-          <a:effectRef idx="2">
-            <a:schemeClr val="accent1"/>
-          </a:effectRef>
-          <a:fontRef idx="minor">
-            <a:schemeClr val="lt1"/>
-          </a:fontRef>
-        </p:style>
-        <p:txBody>
-          <a:bodyPr rtlCol="0" anchor="ctr"/>
-          <a:lstStyle/>
-          <a:p>
-            <a:pPr algn="ctr"/>
-          </a:p>
-        </p:txBody>
-      </p:sp>
-      <p:sp>
-        <p:nvSpPr>
-          <p:cNvPr id="3" name="TextBox 2"/>
-          <p:cNvSpPr txBox="1"/>
-          <p:nvPr/>
-        </p:nvSpPr>
-        <p:spPr>
-          <a:xfrm>
-            <a:off x="548640" y="100584"/>
-            <a:ext cx="10972800" cy="274320"/>
-          </a:xfrm>
-          <a:prstGeom prst="rect">
-            <a:avLst/>
-          </a:prstGeom>
-          <a:noFill/>
-        </p:spPr>
-        <p:txBody>
-          <a:bodyPr wrap="square" anchor="t" lIns="0" rIns="0" tIns="0" bIns="0">
-            <a:spAutoFit/>
-          </a:bodyPr>
-          <a:lstStyle/>
-          <a:p>
-            <a:pPr algn="l">
-              <a:spcAft>
-                <a:spcPts val="495"/>
-              </a:spcAft>
-            </a:pPr>
-            <a:r>
-              <a:rPr sz="1100" b="1" i="0">
-                <a:solidFill>
-                  <a:srgbClr val="FFFFFF"/>
-                </a:solidFill>
-                <a:latin typeface="Inter Tight"/>
-              </a:rPr>
-              <a:t>TEACHER PAGE  ·  skipped when you present  ·  Background</a:t>
-            </a:r>
-          </a:p>
-        </p:txBody>
-      </p:sp>
-      <p:sp>
-        <p:nvSpPr>
-          <p:cNvPr id="4" name="TextBox 3"/>
-          <p:cNvSpPr txBox="1"/>
-          <p:nvPr/>
-        </p:nvSpPr>
-        <p:spPr>
-          <a:xfrm>
-            <a:off x="548640" y="685800"/>
-            <a:ext cx="10972800" cy="640080"/>
-          </a:xfrm>
-          <a:prstGeom prst="rect">
-            <a:avLst/>
-          </a:prstGeom>
-          <a:noFill/>
-        </p:spPr>
-        <p:txBody>
-          <a:bodyPr wrap="square" anchor="t" lIns="0" rIns="0" tIns="0" bIns="0">
-            <a:spAutoFit/>
-          </a:bodyPr>
-          <a:lstStyle/>
-          <a:p>
-            <a:pPr algn="l">
-              <a:spcAft>
-                <a:spcPts val="1350"/>
-              </a:spcAft>
-            </a:pPr>
-            <a:r>
-              <a:rPr sz="3000" b="1" i="0">
-                <a:solidFill>
-                  <a:srgbClr val="1C1B19"/>
-                </a:solidFill>
-                <a:latin typeface="Source Serif 4"/>
-              </a:rPr>
-              <a:t>What the research says</a:t>
-            </a:r>
-          </a:p>
-        </p:txBody>
-      </p:sp>
-      <p:sp>
-        <p:nvSpPr>
-          <p:cNvPr id="5" name="TextBox 4"/>
-          <p:cNvSpPr txBox="1"/>
-          <p:nvPr/>
-        </p:nvSpPr>
-        <p:spPr>
-          <a:xfrm>
-            <a:off x="548640" y="1463040"/>
-            <a:ext cx="5394960" cy="4937760"/>
-          </a:xfrm>
-          <a:prstGeom prst="rect">
-            <a:avLst/>
-          </a:prstGeom>
-          <a:noFill/>
-        </p:spPr>
-        <p:txBody>
-          <a:bodyPr wrap="square" anchor="t" lIns="0" rIns="0" tIns="0" bIns="0">
-            <a:spAutoFit/>
-          </a:bodyPr>
-          <a:lstStyle/>
-          <a:p>
-            <a:pPr algn="l">
-              <a:spcAft>
-                <a:spcPts val="585"/>
-              </a:spcAft>
-            </a:pPr>
-            <a:r>
-              <a:rPr sz="1300" b="0" i="0">
-                <a:solidFill>
-                  <a:srgbClr val="1C1B19"/>
-                </a:solidFill>
-                <a:latin typeface="Source Serif 4"/>
-              </a:rPr>
-              <a:t>Psychologist Kipling Williams's model says being ignored or left out threatens four needs: belonging, self-esteem, control, and a sense that your presence matters ("meaningful existence").</a:t>
-            </a:r>
-          </a:p>
-          <a:p>
-            <a:pPr algn="l">
-              <a:spcAft>
-                <a:spcPts val="585"/>
-              </a:spcAft>
-            </a:pPr>
-            <a:r>
-              <a:rPr sz="1050" b="0" i="0">
-                <a:solidFill>
-                  <a:srgbClr val="5D5A54"/>
-                </a:solidFill>
-                <a:latin typeface="Inter Tight"/>
-              </a:rPr>
-              <a:t>Williams, Advances in Experimental Social Psychology, 2009</a:t>
-            </a:r>
-          </a:p>
-          <a:p>
-            <a:pPr algn="l">
-              <a:spcAft>
-                <a:spcPts val="585"/>
-              </a:spcAft>
-            </a:pPr>
-            <a:r>
-              <a:rPr sz="1300" b="0" i="0">
-                <a:solidFill>
-                  <a:srgbClr val="1C1B19"/>
-                </a:solidFill>
-                <a:latin typeface="Source Serif 4"/>
-              </a:rPr>
-              <a:t>The model describes stages. The first two (the quick hurt, then a reflective stage) are well studied in experiments. The third, resignation, comes mostly from interviews and long-term observation, so it's less certain.</a:t>
-            </a:r>
-          </a:p>
-          <a:p>
-            <a:pPr algn="l">
-              <a:spcAft>
-                <a:spcPts val="585"/>
-              </a:spcAft>
-            </a:pPr>
-            <a:r>
-              <a:rPr sz="1050" b="0" i="0">
-                <a:solidFill>
-                  <a:srgbClr val="5D5A54"/>
-                </a:solidFill>
-                <a:latin typeface="Inter Tight"/>
-              </a:rPr>
-              <a:t>Williams, 2009</a:t>
-            </a:r>
-          </a:p>
-          <a:p>
-            <a:pPr algn="l">
-              <a:spcAft>
-                <a:spcPts val="585"/>
-              </a:spcAft>
-            </a:pPr>
-            <a:r>
-              <a:rPr sz="1300" b="0" i="0">
-                <a:solidFill>
-                  <a:srgbClr val="1C1B19"/>
-                </a:solidFill>
-                <a:latin typeface="Source Serif 4"/>
-              </a:rPr>
-              <a:t>1,486 people from 62 countries played an online ball toss with two "players" who were really a computer. Those who stopped getting the ball felt worse and reported a weaker sense of belonging, even with strangers in a game that didn't matter.</a:t>
-            </a:r>
-          </a:p>
-          <a:p>
-            <a:pPr algn="l">
-              <a:spcAft>
-                <a:spcPts val="585"/>
-              </a:spcAft>
-            </a:pPr>
-            <a:r>
-              <a:rPr sz="1050" b="0" i="0">
-                <a:solidFill>
-                  <a:srgbClr val="5D5A54"/>
-                </a:solidFill>
-                <a:latin typeface="Inter Tight"/>
-              </a:rPr>
-              <a:t>Williams, Cheung and Choi, Journal of Personality and Social Psychology, 2000</a:t>
-            </a:r>
-          </a:p>
-        </p:txBody>
-      </p:sp>
-      <p:sp>
-        <p:nvSpPr>
-          <p:cNvPr id="6" name="TextBox 5"/>
-          <p:cNvSpPr txBox="1"/>
-          <p:nvPr/>
-        </p:nvSpPr>
-        <p:spPr>
-          <a:xfrm>
-            <a:off x="6217920" y="1463040"/>
-            <a:ext cx="5394960" cy="4937760"/>
-          </a:xfrm>
-          <a:prstGeom prst="rect">
-            <a:avLst/>
-          </a:prstGeom>
-          <a:noFill/>
-        </p:spPr>
-        <p:txBody>
-          <a:bodyPr wrap="square" anchor="t" lIns="0" rIns="0" tIns="0" bIns="0">
-            <a:spAutoFit/>
-          </a:bodyPr>
-          <a:lstStyle/>
-          <a:p>
-            <a:pPr algn="l">
-              <a:spcAft>
-                <a:spcPts val="585"/>
-              </a:spcAft>
-            </a:pPr>
-            <a:r>
-              <a:rPr sz="1300" b="0" i="0">
-                <a:solidFill>
-                  <a:srgbClr val="1C1B19"/>
-                </a:solidFill>
-                <a:latin typeface="Source Serif 4"/>
-              </a:rPr>
-              <a:t>Cornell students who wore an embarrassing T-shirt into a room guessed about half the room would notice. About a quarter did.</a:t>
-            </a:r>
-          </a:p>
-          <a:p>
-            <a:pPr algn="l">
-              <a:spcAft>
-                <a:spcPts val="585"/>
-              </a:spcAft>
-            </a:pPr>
-            <a:r>
-              <a:rPr sz="1050" b="0" i="0">
-                <a:solidFill>
-                  <a:srgbClr val="5D5A54"/>
-                </a:solidFill>
-                <a:latin typeface="Inter Tight"/>
-              </a:rPr>
-              <a:t>Gilovich, Medvec and Savitsky, Journal of Personality and Social Psychology, 2000</a:t>
-            </a:r>
-          </a:p>
-          <a:p>
-            <a:pPr algn="l">
-              <a:spcAft>
-                <a:spcPts val="585"/>
-              </a:spcAft>
-            </a:pPr>
-            <a:r>
-              <a:rPr sz="1300" b="0" i="0">
-                <a:solidFill>
-                  <a:srgbClr val="1C1B19"/>
-                </a:solidFill>
-                <a:latin typeface="Source Serif 4"/>
-              </a:rPr>
-              <a:t>In a survey of 540 adults, people in a romantic relationship had smaller close support networks. Even counting the new partner, they had lost about two close people on average.</a:t>
-            </a:r>
-          </a:p>
-          <a:p>
-            <a:pPr algn="l">
-              <a:spcAft>
-                <a:spcPts val="585"/>
-              </a:spcAft>
-            </a:pPr>
-            <a:r>
-              <a:rPr sz="1050" b="0" i="0">
-                <a:solidFill>
-                  <a:srgbClr val="5D5A54"/>
-                </a:solidFill>
-                <a:latin typeface="Inter Tight"/>
-              </a:rPr>
-              <a:t>Burton-Chellew and Dunbar, Evolutionary Behavioral Sciences, 2015</a:t>
-            </a:r>
-          </a:p>
-          <a:p>
-            <a:pPr algn="l">
-              <a:spcAft>
-                <a:spcPts val="585"/>
-              </a:spcAft>
-            </a:pPr>
-            <a:r>
-              <a:rPr sz="1300" b="0" i="0">
-                <a:solidFill>
-                  <a:srgbClr val="1C1B19"/>
-                </a:solidFill>
-                <a:latin typeface="Source Serif 4"/>
-              </a:rPr>
-              <a:t>Being left out hits control in particular, because it happens to you. That's why doing something about it, like making a plan yourself, often helps.</a:t>
-            </a:r>
-          </a:p>
-          <a:p>
-            <a:pPr algn="l">
-              <a:spcAft>
-                <a:spcPts val="585"/>
-              </a:spcAft>
-            </a:pPr>
-            <a:r>
-              <a:rPr sz="1050" b="0" i="0">
-                <a:solidFill>
-                  <a:srgbClr val="5D5A54"/>
-                </a:solidFill>
-                <a:latin typeface="Inter Tight"/>
-              </a:rPr>
-              <a:t>Williams, 2009</a:t>
-            </a:r>
-          </a:p>
-        </p:txBody>
-      </p:sp>
-    </p:spTree>
-  </p:cSld>
-  <p:clrMapOvr>
-    <a:masterClrMapping/>
-  </p:clrMapOvr>
-</p:sld>
-</file>
-
-<file path=ppt/slides/slide5.xml><?xml version="1.0" encoding="utf-8"?>
-<p:sld xmlns:a="http://schemas.openxmlformats.org/drawingml/2006/main" xmlns:p="http://schemas.openxmlformats.org/presentationml/2006/main" xmlns:r="http://schemas.openxmlformats.org/officeDocument/2006/relationships">
-  <p:cSld>
-    <p:bg>
-      <p:bgPr>
-        <a:solidFill>
-          <a:srgbClr val="0B2D5B"/>
-        </a:solidFill>
-        <a:effectLst/>
-      </p:bgPr>
-    </p:bg>
-    <p:spTree>
-      <p:nvGrpSpPr>
-        <p:cNvPr id="1" name=""/>
-        <p:cNvGrpSpPr/>
-        <p:nvPr/>
-      </p:nvGrpSpPr>
-      <p:grpSpPr/>
-      <p:sp>
-        <p:nvSpPr>
-          <p:cNvPr id="2" name="Rectangle 1"/>
-          <p:cNvSpPr/>
-          <p:nvPr/>
-        </p:nvSpPr>
-        <p:spPr>
-          <a:xfrm>
-            <a:off x="548640" y="502920"/>
-            <a:ext cx="457200" cy="54864"/>
-          </a:xfrm>
-          <a:prstGeom prst="rect">
-            <a:avLst/>
-          </a:prstGeom>
-          <a:solidFill>
-            <a:srgbClr val="F47B20"/>
-          </a:solidFill>
-          <a:ln>
-            <a:noFill/>
-          </a:ln>
-          <a:effectLst/>
-        </p:spPr>
-        <p:style>
-          <a:lnRef idx="1">
-            <a:schemeClr val="accent1"/>
-          </a:lnRef>
-          <a:fillRef idx="3">
-            <a:schemeClr val="accent1"/>
-          </a:fillRef>
-          <a:effectRef idx="2">
-            <a:schemeClr val="accent1"/>
-          </a:effectRef>
-          <a:fontRef idx="minor">
-            <a:schemeClr val="lt1"/>
-          </a:fontRef>
-        </p:style>
-        <p:txBody>
-          <a:bodyPr rtlCol="0" anchor="ctr"/>
-          <a:lstStyle/>
-          <a:p>
-            <a:pPr algn="ctr"/>
-          </a:p>
-        </p:txBody>
-      </p:sp>
-      <p:sp>
-        <p:nvSpPr>
-          <p:cNvPr id="3" name="TextBox 2"/>
-          <p:cNvSpPr txBox="1"/>
-          <p:nvPr/>
-        </p:nvSpPr>
-        <p:spPr>
-          <a:xfrm>
-            <a:off x="1143000" y="393192"/>
-            <a:ext cx="8229600" cy="274320"/>
-          </a:xfrm>
-          <a:prstGeom prst="rect">
-            <a:avLst/>
-          </a:prstGeom>
-          <a:noFill/>
-        </p:spPr>
-        <p:txBody>
-          <a:bodyPr wrap="square" anchor="t" lIns="0" rIns="0" tIns="0" bIns="0">
-            <a:spAutoFit/>
-          </a:bodyPr>
-          <a:lstStyle/>
-          <a:p>
-            <a:pPr algn="l">
-              <a:spcAft>
-                <a:spcPts val="540"/>
-              </a:spcAft>
-            </a:pPr>
-            <a:r>
-              <a:rPr sz="1200" b="1" i="0">
-                <a:solidFill>
-                  <a:srgbClr val="5D5A54"/>
-                </a:solidFill>
-                <a:latin typeface="Inter Tight"/>
-              </a:rPr>
-              <a:t>THE THIRD WHEEL</a:t>
-            </a:r>
-          </a:p>
-        </p:txBody>
-      </p:sp>
-      <p:sp>
-        <p:nvSpPr>
-          <p:cNvPr id="4" name="TextBox 3"/>
-          <p:cNvSpPr txBox="1"/>
-          <p:nvPr/>
-        </p:nvSpPr>
-        <p:spPr>
-          <a:xfrm>
-            <a:off x="8229600" y="6400800"/>
-            <a:ext cx="3410712" cy="274320"/>
-          </a:xfrm>
-          <a:prstGeom prst="rect">
-            <a:avLst/>
-          </a:prstGeom>
-          <a:noFill/>
-        </p:spPr>
-        <p:txBody>
-          <a:bodyPr wrap="square" anchor="t" lIns="0" rIns="0" tIns="0" bIns="0">
-            <a:spAutoFit/>
-          </a:bodyPr>
-          <a:lstStyle/>
-          <a:p>
-            <a:pPr algn="r">
-              <a:spcAft>
-                <a:spcPts val="450"/>
-              </a:spcAft>
-            </a:pPr>
-            <a:r>
-              <a:rPr sz="1000" b="0" i="0">
-                <a:solidFill>
-                  <a:srgbClr val="5D5A54"/>
-                </a:solidFill>
-                <a:latin typeface="Inter Tight"/>
-              </a:rPr>
-              <a:t>Beaver Counseling</a:t>
-            </a:r>
-          </a:p>
-        </p:txBody>
-      </p:sp>
-      <p:sp>
-        <p:nvSpPr>
-          <p:cNvPr id="5" name="TextBox 4"/>
-          <p:cNvSpPr txBox="1"/>
-          <p:nvPr/>
-        </p:nvSpPr>
-        <p:spPr>
-          <a:xfrm>
-            <a:off x="822960" y="2011680"/>
-            <a:ext cx="10515600" cy="1463040"/>
-          </a:xfrm>
-          <a:prstGeom prst="rect">
-            <a:avLst/>
-          </a:prstGeom>
-          <a:noFill/>
-        </p:spPr>
-        <p:txBody>
-          <a:bodyPr wrap="square" anchor="b" lIns="0" rIns="0" tIns="0" bIns="0">
-            <a:spAutoFit/>
-          </a:bodyPr>
-          <a:lstStyle/>
-          <a:p>
-            <a:pPr algn="l">
-              <a:spcAft>
-                <a:spcPts val="2700"/>
-              </a:spcAft>
-            </a:pPr>
-            <a:r>
-              <a:rPr sz="6000" b="1" i="0">
-                <a:solidFill>
-                  <a:srgbClr val="FFFFFF"/>
-                </a:solidFill>
-                <a:latin typeface="Source Serif 4"/>
-              </a:rPr>
-              <a:t>The Third Wheel</a:t>
-            </a:r>
-          </a:p>
-        </p:txBody>
-      </p:sp>
-      <p:sp>
-        <p:nvSpPr>
-          <p:cNvPr id="6" name="TextBox 5"/>
-          <p:cNvSpPr txBox="1"/>
-          <p:nvPr/>
-        </p:nvSpPr>
-        <p:spPr>
-          <a:xfrm>
-            <a:off x="822960" y="3611880"/>
-            <a:ext cx="10515600" cy="914400"/>
-          </a:xfrm>
-          <a:prstGeom prst="rect">
-            <a:avLst/>
-          </a:prstGeom>
-          <a:noFill/>
-        </p:spPr>
-        <p:txBody>
-          <a:bodyPr wrap="square" anchor="t" lIns="0" rIns="0" tIns="0" bIns="0">
-            <a:spAutoFit/>
-          </a:bodyPr>
-          <a:lstStyle/>
-          <a:p>
-            <a:pPr algn="l">
-              <a:spcAft>
-                <a:spcPts val="1080"/>
-              </a:spcAft>
-            </a:pPr>
-            <a:r>
-              <a:rPr sz="2400" b="0" i="1">
-                <a:solidFill>
-                  <a:srgbClr val="E8E4DA"/>
-                </a:solidFill>
-                <a:latin typeface="Source Serif 4"/>
-              </a:rPr>
-              <a:t>Technically in the group. Somehow always on the edge.</a:t>
-            </a:r>
-          </a:p>
-        </p:txBody>
-      </p:sp>
-      <p:sp>
-        <p:nvSpPr>
-          <p:cNvPr id="7" name="TextBox 6"/>
-          <p:cNvSpPr txBox="1"/>
-          <p:nvPr/>
-        </p:nvSpPr>
-        <p:spPr>
-          <a:xfrm>
-            <a:off x="822960" y="6035040"/>
-            <a:ext cx="7315200" cy="365760"/>
-          </a:xfrm>
-          <a:prstGeom prst="rect">
-            <a:avLst/>
-          </a:prstGeom>
-          <a:noFill/>
-        </p:spPr>
-        <p:txBody>
-          <a:bodyPr wrap="square" anchor="t" lIns="0" rIns="0" tIns="0" bIns="0">
-            <a:spAutoFit/>
-          </a:bodyPr>
-          <a:lstStyle/>
-          <a:p>
-            <a:pPr algn="l">
-              <a:spcAft>
-                <a:spcPts val="585"/>
-              </a:spcAft>
-            </a:pPr>
-            <a:r>
-              <a:rPr sz="1300" b="0" i="0">
-                <a:solidFill>
-                  <a:srgbClr val="E8E4DA"/>
-                </a:solidFill>
-                <a:latin typeface="Inter Tight"/>
-              </a:rPr>
-              <a:t>Beaver Upper School · Counseling</a:t>
+              <a:t>Someone is choosing to keep you out. That isn't okay.</a:t>
             </a:r>
           </a:p>
         </p:txBody>
@@ -6902,7 +7411,7 @@
                 </a:solidFill>
                 <a:latin typeface="Inter Tight"/>
               </a:rPr>
-              <a:t>THE GUESS</a:t>
+              <a:t>YOU DECIDE</a:t>
             </a:r>
           </a:p>
         </p:txBody>
@@ -6948,23 +7457,64 @@
       </p:sp>
       <p:sp>
         <p:nvSpPr>
-          <p:cNvPr id="5" name="Rectangle 4"/>
+          <p:cNvPr id="5" name="TextBox 4"/>
+          <p:cNvSpPr txBox="1"/>
+          <p:nvPr/>
+        </p:nvSpPr>
+        <p:spPr>
+          <a:xfrm>
+            <a:off x="822960" y="1005840"/>
+            <a:ext cx="10515600" cy="914400"/>
+          </a:xfrm>
+          <a:prstGeom prst="rect">
+            <a:avLst/>
+          </a:prstGeom>
+          <a:noFill/>
+        </p:spPr>
+        <p:txBody>
+          <a:bodyPr wrap="square" anchor="t" lIns="0" rIns="0" tIns="0" bIns="0">
+            <a:spAutoFit/>
+          </a:bodyPr>
+          <a:lstStyle/>
+          <a:p>
+            <a:pPr algn="l">
+              <a:spcAft>
+                <a:spcPts val="1530"/>
+              </a:spcAft>
+            </a:pPr>
+            <a:r>
+              <a:rPr sz="3400" b="1" i="0">
+                <a:solidFill>
+                  <a:srgbClr val="1C1B19"/>
+                </a:solidFill>
+                <a:latin typeface="Source Serif 4"/>
+              </a:rPr>
+              <a:t>Accident, drift, or on purpose?</a:t>
+            </a:r>
+          </a:p>
+        </p:txBody>
+      </p:sp>
+      <p:sp>
+        <p:nvSpPr>
+          <p:cNvPr id="6" name="Rectangle 5"/>
           <p:cNvSpPr/>
           <p:nvPr/>
         </p:nvSpPr>
         <p:spPr>
           <a:xfrm>
-            <a:off x="822960" y="1371600"/>
-            <a:ext cx="73152" cy="3566160"/>
+            <a:off x="822960" y="2103120"/>
+            <a:ext cx="3322320" cy="3840480"/>
           </a:xfrm>
           <a:prstGeom prst="rect">
             <a:avLst/>
           </a:prstGeom>
           <a:solidFill>
-            <a:srgbClr val="F47B20"/>
+            <a:srgbClr val="FFFFFF"/>
           </a:solidFill>
-          <a:ln>
-            <a:noFill/>
+          <a:ln w="15875">
+            <a:solidFill>
+              <a:srgbClr val="D8D2C6"/>
+            </a:solidFill>
           </a:ln>
           <a:effectLst/>
         </p:spPr>
@@ -6992,53 +7542,14 @@
       </p:sp>
       <p:sp>
         <p:nvSpPr>
-          <p:cNvPr id="6" name="TextBox 5"/>
-          <p:cNvSpPr txBox="1"/>
-          <p:nvPr/>
-        </p:nvSpPr>
-        <p:spPr>
-          <a:xfrm>
-            <a:off x="1188720" y="1371600"/>
-            <a:ext cx="10058400" cy="3566160"/>
-          </a:xfrm>
-          <a:prstGeom prst="rect">
-            <a:avLst/>
-          </a:prstGeom>
-          <a:noFill/>
-        </p:spPr>
-        <p:txBody>
-          <a:bodyPr wrap="square" anchor="ctr" lIns="0" rIns="0" tIns="0" bIns="0">
-            <a:spAutoFit/>
-          </a:bodyPr>
-          <a:lstStyle/>
-          <a:p>
-            <a:pPr algn="l">
-              <a:spcAft>
-                <a:spcPts val="1800"/>
-              </a:spcAft>
-            </a:pPr>
-            <a:r>
-              <a:rPr sz="4000" b="0" i="1">
-                <a:solidFill>
-                  <a:srgbClr val="1C1B19"/>
-                </a:solidFill>
-                <a:latin typeface="Source Serif 4"/>
-              </a:rPr>
-              <a:t>How many people in this circle felt on the edge of a group at least once this month?</a:t>
-            </a:r>
-          </a:p>
-        </p:txBody>
-      </p:sp>
-      <p:sp>
-        <p:nvSpPr>
           <p:cNvPr id="7" name="TextBox 6"/>
           <p:cNvSpPr txBox="1"/>
           <p:nvPr/>
         </p:nvSpPr>
         <p:spPr>
           <a:xfrm>
-            <a:off x="1188720" y="5120640"/>
-            <a:ext cx="10058400" cy="914400"/>
+            <a:off x="1051560" y="2286000"/>
+            <a:ext cx="2865120" cy="365760"/>
           </a:xfrm>
           <a:prstGeom prst="rect">
             <a:avLst/>
@@ -7053,17 +7564,304 @@
           <a:p>
             <a:pPr algn="l">
               <a:spcAft>
+                <a:spcPts val="585"/>
+              </a:spcAft>
+            </a:pPr>
+            <a:r>
+              <a:rPr sz="1300" b="1" i="0">
+                <a:solidFill>
+                  <a:srgbClr val="0B2D5B"/>
+                </a:solidFill>
+                <a:latin typeface="Inter Tight"/>
+              </a:rPr>
+              <a:t>NADIA</a:t>
+            </a:r>
+          </a:p>
+        </p:txBody>
+      </p:sp>
+      <p:sp>
+        <p:nvSpPr>
+          <p:cNvPr id="8" name="TextBox 7"/>
+          <p:cNvSpPr txBox="1"/>
+          <p:nvPr/>
+        </p:nvSpPr>
+        <p:spPr>
+          <a:xfrm>
+            <a:off x="1051560" y="2743200"/>
+            <a:ext cx="2865120" cy="3017520"/>
+          </a:xfrm>
+          <a:prstGeom prst="rect">
+            <a:avLst/>
+          </a:prstGeom>
+          <a:noFill/>
+        </p:spPr>
+        <p:txBody>
+          <a:bodyPr wrap="square" anchor="t" lIns="0" rIns="0" tIns="0" bIns="0">
+            <a:spAutoFit/>
+          </a:bodyPr>
+          <a:lstStyle/>
+          <a:p>
+            <a:pPr algn="l">
+              <a:spcAft>
                 <a:spcPts val="810"/>
               </a:spcAft>
             </a:pPr>
             <a:r>
               <a:rPr sz="1800" b="0" i="0">
                 <a:solidFill>
-                  <a:srgbClr val="5D5A54"/>
+                  <a:srgbClr val="1C1B19"/>
+                </a:solidFill>
+                <a:latin typeface="Source Serif 4"/>
+              </a:rPr>
+              <a:t>Started dating Chris in October. She used to drive you home after practice. Now she drives Chris. She still texts you most nights.</a:t>
+            </a:r>
+          </a:p>
+        </p:txBody>
+      </p:sp>
+      <p:sp>
+        <p:nvSpPr>
+          <p:cNvPr id="9" name="Rectangle 8"/>
+          <p:cNvSpPr/>
+          <p:nvPr/>
+        </p:nvSpPr>
+        <p:spPr>
+          <a:xfrm>
+            <a:off x="4419600" y="2103120"/>
+            <a:ext cx="3322320" cy="3840480"/>
+          </a:xfrm>
+          <a:prstGeom prst="rect">
+            <a:avLst/>
+          </a:prstGeom>
+          <a:solidFill>
+            <a:srgbClr val="FFFFFF"/>
+          </a:solidFill>
+          <a:ln w="15875">
+            <a:solidFill>
+              <a:srgbClr val="D8D2C6"/>
+            </a:solidFill>
+          </a:ln>
+          <a:effectLst/>
+        </p:spPr>
+        <p:style>
+          <a:lnRef idx="1">
+            <a:schemeClr val="accent1"/>
+          </a:lnRef>
+          <a:fillRef idx="3">
+            <a:schemeClr val="accent1"/>
+          </a:fillRef>
+          <a:effectRef idx="2">
+            <a:schemeClr val="accent1"/>
+          </a:effectRef>
+          <a:fontRef idx="minor">
+            <a:schemeClr val="lt1"/>
+          </a:fontRef>
+        </p:style>
+        <p:txBody>
+          <a:bodyPr rtlCol="0" anchor="ctr"/>
+          <a:lstStyle/>
+          <a:p>
+            <a:pPr algn="ctr"/>
+          </a:p>
+        </p:txBody>
+      </p:sp>
+      <p:sp>
+        <p:nvSpPr>
+          <p:cNvPr id="10" name="TextBox 9"/>
+          <p:cNvSpPr txBox="1"/>
+          <p:nvPr/>
+        </p:nvSpPr>
+        <p:spPr>
+          <a:xfrm>
+            <a:off x="4648200" y="2286000"/>
+            <a:ext cx="2865120" cy="365760"/>
+          </a:xfrm>
+          <a:prstGeom prst="rect">
+            <a:avLst/>
+          </a:prstGeom>
+          <a:noFill/>
+        </p:spPr>
+        <p:txBody>
+          <a:bodyPr wrap="square" anchor="t" lIns="0" rIns="0" tIns="0" bIns="0">
+            <a:spAutoFit/>
+          </a:bodyPr>
+          <a:lstStyle/>
+          <a:p>
+            <a:pPr algn="l">
+              <a:spcAft>
+                <a:spcPts val="585"/>
+              </a:spcAft>
+            </a:pPr>
+            <a:r>
+              <a:rPr sz="1300" b="1" i="0">
+                <a:solidFill>
+                  <a:srgbClr val="0B2D5B"/>
                 </a:solidFill>
                 <a:latin typeface="Inter Tight"/>
               </a:rPr>
-              <a:t>Write your guess. On a second scrap, write yes or no for yourself. Fold it. No names.</a:t>
+              <a:t>ROHAN</a:t>
+            </a:r>
+          </a:p>
+        </p:txBody>
+      </p:sp>
+      <p:sp>
+        <p:nvSpPr>
+          <p:cNvPr id="11" name="TextBox 10"/>
+          <p:cNvSpPr txBox="1"/>
+          <p:nvPr/>
+        </p:nvSpPr>
+        <p:spPr>
+          <a:xfrm>
+            <a:off x="4648200" y="2743200"/>
+            <a:ext cx="2865120" cy="3017520"/>
+          </a:xfrm>
+          <a:prstGeom prst="rect">
+            <a:avLst/>
+          </a:prstGeom>
+          <a:noFill/>
+        </p:spPr>
+        <p:txBody>
+          <a:bodyPr wrap="square" anchor="t" lIns="0" rIns="0" tIns="0" bIns="0">
+            <a:spAutoFit/>
+          </a:bodyPr>
+          <a:lstStyle/>
+          <a:p>
+            <a:pPr algn="l">
+              <a:spcAft>
+                <a:spcPts val="810"/>
+              </a:spcAft>
+            </a:pPr>
+            <a:r>
+              <a:rPr sz="1800" b="0" i="0">
+                <a:solidFill>
+                  <a:srgbClr val="1C1B19"/>
+                </a:solidFill>
+                <a:latin typeface="Source Serif 4"/>
+              </a:rPr>
+              <a:t>Posts a story from a late study session at the library with three friends. Earlier that week, you mentioned you work Tuesday nights.</a:t>
+            </a:r>
+          </a:p>
+        </p:txBody>
+      </p:sp>
+      <p:sp>
+        <p:nvSpPr>
+          <p:cNvPr id="12" name="Rectangle 11"/>
+          <p:cNvSpPr/>
+          <p:nvPr/>
+        </p:nvSpPr>
+        <p:spPr>
+          <a:xfrm>
+            <a:off x="8016239" y="2103120"/>
+            <a:ext cx="3322320" cy="3840480"/>
+          </a:xfrm>
+          <a:prstGeom prst="rect">
+            <a:avLst/>
+          </a:prstGeom>
+          <a:solidFill>
+            <a:srgbClr val="FFFFFF"/>
+          </a:solidFill>
+          <a:ln w="15875">
+            <a:solidFill>
+              <a:srgbClr val="D8D2C6"/>
+            </a:solidFill>
+          </a:ln>
+          <a:effectLst/>
+        </p:spPr>
+        <p:style>
+          <a:lnRef idx="1">
+            <a:schemeClr val="accent1"/>
+          </a:lnRef>
+          <a:fillRef idx="3">
+            <a:schemeClr val="accent1"/>
+          </a:fillRef>
+          <a:effectRef idx="2">
+            <a:schemeClr val="accent1"/>
+          </a:effectRef>
+          <a:fontRef idx="minor">
+            <a:schemeClr val="lt1"/>
+          </a:fontRef>
+        </p:style>
+        <p:txBody>
+          <a:bodyPr rtlCol="0" anchor="ctr"/>
+          <a:lstStyle/>
+          <a:p>
+            <a:pPr algn="ctr"/>
+          </a:p>
+        </p:txBody>
+      </p:sp>
+      <p:sp>
+        <p:nvSpPr>
+          <p:cNvPr id="13" name="TextBox 12"/>
+          <p:cNvSpPr txBox="1"/>
+          <p:nvPr/>
+        </p:nvSpPr>
+        <p:spPr>
+          <a:xfrm>
+            <a:off x="8244839" y="2286000"/>
+            <a:ext cx="2865120" cy="365760"/>
+          </a:xfrm>
+          <a:prstGeom prst="rect">
+            <a:avLst/>
+          </a:prstGeom>
+          <a:noFill/>
+        </p:spPr>
+        <p:txBody>
+          <a:bodyPr wrap="square" anchor="t" lIns="0" rIns="0" tIns="0" bIns="0">
+            <a:spAutoFit/>
+          </a:bodyPr>
+          <a:lstStyle/>
+          <a:p>
+            <a:pPr algn="l">
+              <a:spcAft>
+                <a:spcPts val="585"/>
+              </a:spcAft>
+            </a:pPr>
+            <a:r>
+              <a:rPr sz="1300" b="1" i="0">
+                <a:solidFill>
+                  <a:srgbClr val="0B2D5B"/>
+                </a:solidFill>
+                <a:latin typeface="Inter Tight"/>
+              </a:rPr>
+              <a:t>THE LUNCH GROUP</a:t>
+            </a:r>
+          </a:p>
+        </p:txBody>
+      </p:sp>
+      <p:sp>
+        <p:nvSpPr>
+          <p:cNvPr id="14" name="TextBox 13"/>
+          <p:cNvSpPr txBox="1"/>
+          <p:nvPr/>
+        </p:nvSpPr>
+        <p:spPr>
+          <a:xfrm>
+            <a:off x="8244839" y="2743200"/>
+            <a:ext cx="2865120" cy="3017520"/>
+          </a:xfrm>
+          <a:prstGeom prst="rect">
+            <a:avLst/>
+          </a:prstGeom>
+          <a:noFill/>
+        </p:spPr>
+        <p:txBody>
+          <a:bodyPr wrap="square" anchor="t" lIns="0" rIns="0" tIns="0" bIns="0">
+            <a:spAutoFit/>
+          </a:bodyPr>
+          <a:lstStyle/>
+          <a:p>
+            <a:pPr algn="l">
+              <a:spcAft>
+                <a:spcPts val="810"/>
+              </a:spcAft>
+            </a:pPr>
+            <a:r>
+              <a:rPr sz="1800" b="0" i="0">
+                <a:solidFill>
+                  <a:srgbClr val="1C1B19"/>
+                </a:solidFill>
+                <a:latin typeface="Source Serif 4"/>
+              </a:rPr>
+              <a:t>For three weekends, plans happen in a separate chat. When you walk up, the talk stops. "It's nothing, just a small thing."</a:t>
             </a:r>
           </a:p>
         </p:txBody>
@@ -7172,7 +7970,7 @@
                 </a:solidFill>
                 <a:latin typeface="Inter Tight"/>
               </a:rPr>
-              <a:t>WHAT EXCLUSION DOES</a:t>
+              <a:t>ONE HONEST SENTENCE</a:t>
             </a:r>
           </a:p>
         </p:txBody>
@@ -7218,14 +8016,97 @@
       </p:sp>
       <p:sp>
         <p:nvSpPr>
-          <p:cNvPr id="5" name="TextBox 4"/>
+          <p:cNvPr id="5" name="Rectangle 4"/>
+          <p:cNvSpPr/>
+          <p:nvPr/>
+        </p:nvSpPr>
+        <p:spPr>
+          <a:xfrm>
+            <a:off x="822960" y="1371600"/>
+            <a:ext cx="73152" cy="3566160"/>
+          </a:xfrm>
+          <a:prstGeom prst="rect">
+            <a:avLst/>
+          </a:prstGeom>
+          <a:solidFill>
+            <a:srgbClr val="F47B20"/>
+          </a:solidFill>
+          <a:ln>
+            <a:noFill/>
+          </a:ln>
+          <a:effectLst/>
+        </p:spPr>
+        <p:style>
+          <a:lnRef idx="1">
+            <a:schemeClr val="accent1"/>
+          </a:lnRef>
+          <a:fillRef idx="3">
+            <a:schemeClr val="accent1"/>
+          </a:fillRef>
+          <a:effectRef idx="2">
+            <a:schemeClr val="accent1"/>
+          </a:effectRef>
+          <a:fontRef idx="minor">
+            <a:schemeClr val="lt1"/>
+          </a:fontRef>
+        </p:style>
+        <p:txBody>
+          <a:bodyPr rtlCol="0" anchor="ctr"/>
+          <a:lstStyle/>
+          <a:p>
+            <a:pPr algn="ctr"/>
+          </a:p>
+        </p:txBody>
+      </p:sp>
+      <p:sp>
+        <p:nvSpPr>
+          <p:cNvPr id="6" name="TextBox 5"/>
           <p:cNvSpPr txBox="1"/>
           <p:nvPr/>
         </p:nvSpPr>
         <p:spPr>
           <a:xfrm>
-            <a:off x="822960" y="1005840"/>
-            <a:ext cx="10515600" cy="1097280"/>
+            <a:off x="1188720" y="1371600"/>
+            <a:ext cx="10058400" cy="3566160"/>
+          </a:xfrm>
+          <a:prstGeom prst="rect">
+            <a:avLst/>
+          </a:prstGeom>
+          <a:noFill/>
+        </p:spPr>
+        <p:txBody>
+          <a:bodyPr wrap="square" anchor="ctr" lIns="0" rIns="0" tIns="0" bIns="0">
+            <a:spAutoFit/>
+          </a:bodyPr>
+          <a:lstStyle/>
+          <a:p>
+            <a:pPr algn="l">
+              <a:spcAft>
+                <a:spcPts val="1800"/>
+              </a:spcAft>
+            </a:pPr>
+            <a:r>
+              <a:rPr sz="4000" b="0" i="1">
+                <a:solidFill>
+                  <a:srgbClr val="1C1B19"/>
+                </a:solidFill>
+                <a:latin typeface="Source Serif 4"/>
+              </a:rPr>
+              <a:t>"When... I felt... Could we...?"</a:t>
+            </a:r>
+          </a:p>
+        </p:txBody>
+      </p:sp>
+      <p:sp>
+        <p:nvSpPr>
+          <p:cNvPr id="7" name="TextBox 6"/>
+          <p:cNvSpPr txBox="1"/>
+          <p:nvPr/>
+        </p:nvSpPr>
+        <p:spPr>
+          <a:xfrm>
+            <a:off x="1188720" y="5120640"/>
+            <a:ext cx="10058400" cy="914400"/>
           </a:xfrm>
           <a:prstGeom prst="rect">
             <a:avLst/>
@@ -7240,393 +8121,17 @@
           <a:p>
             <a:pPr algn="l">
               <a:spcAft>
-                <a:spcPts val="1620"/>
-              </a:spcAft>
-            </a:pPr>
-            <a:r>
-              <a:rPr sz="3600" b="1" i="0">
-                <a:solidFill>
-                  <a:srgbClr val="1C1B19"/>
-                </a:solidFill>
-                <a:latin typeface="Source Serif 4"/>
-              </a:rPr>
-              <a:t>Hurt first. Then your brain looks for a reason.</a:t>
-            </a:r>
-          </a:p>
-        </p:txBody>
-      </p:sp>
-      <p:sp>
-        <p:nvSpPr>
-          <p:cNvPr id="6" name="TextBox 5"/>
-          <p:cNvSpPr txBox="1"/>
-          <p:nvPr/>
-        </p:nvSpPr>
-        <p:spPr>
-          <a:xfrm>
-            <a:off x="822960" y="2194560"/>
-            <a:ext cx="548640" cy="1005840"/>
-          </a:xfrm>
-          <a:prstGeom prst="rect">
-            <a:avLst/>
-          </a:prstGeom>
-          <a:noFill/>
-        </p:spPr>
-        <p:txBody>
-          <a:bodyPr wrap="square" anchor="t" lIns="0" rIns="0" tIns="0" bIns="0">
-            <a:spAutoFit/>
-          </a:bodyPr>
-          <a:lstStyle/>
-          <a:p>
-            <a:pPr algn="l">
-              <a:spcAft>
-                <a:spcPts val="1170"/>
-              </a:spcAft>
-            </a:pPr>
-            <a:r>
-              <a:rPr sz="2600" b="1" i="0">
-                <a:solidFill>
-                  <a:srgbClr val="F47B20"/>
-                </a:solidFill>
-                <a:latin typeface="Source Serif 4"/>
-              </a:rPr>
-              <a:t>1</a:t>
-            </a:r>
-          </a:p>
-        </p:txBody>
-      </p:sp>
-      <p:sp>
-        <p:nvSpPr>
-          <p:cNvPr id="7" name="TextBox 6"/>
-          <p:cNvSpPr txBox="1"/>
-          <p:nvPr/>
-        </p:nvSpPr>
-        <p:spPr>
-          <a:xfrm>
-            <a:off x="1463040" y="2231136"/>
-            <a:ext cx="9875520" cy="1005840"/>
-          </a:xfrm>
-          <a:prstGeom prst="rect">
-            <a:avLst/>
-          </a:prstGeom>
-          <a:noFill/>
-        </p:spPr>
-        <p:txBody>
-          <a:bodyPr wrap="square" anchor="t" lIns="0" rIns="0" tIns="0" bIns="0">
-            <a:spAutoFit/>
-          </a:bodyPr>
-          <a:lstStyle/>
-          <a:p>
-            <a:pPr algn="l">
-              <a:spcAft>
-                <a:spcPts val="945"/>
-              </a:spcAft>
-            </a:pPr>
-            <a:r>
-              <a:rPr sz="2100" b="1" i="0">
-                <a:solidFill>
-                  <a:srgbClr val="1C1B19"/>
-                </a:solidFill>
-                <a:latin typeface="Source Serif 4"/>
-              </a:rPr>
-              <a:t>Belonging</a:t>
-            </a:r>
-          </a:p>
-          <a:p>
-            <a:pPr algn="l">
-              <a:spcAft>
-                <a:spcPts val="945"/>
-              </a:spcAft>
-            </a:pPr>
-            <a:r>
-              <a:rPr sz="1600" b="0" i="0">
+                <a:spcPts val="810"/>
+              </a:spcAft>
+            </a:pPr>
+            <a:r>
+              <a:rPr sz="1800" b="0" i="0">
                 <a:solidFill>
                   <a:srgbClr val="5D5A54"/>
                 </a:solidFill>
-                <a:latin typeface="Source Serif 4"/>
-              </a:rPr>
-              <a:t>The sense you're part of something takes a hit.</a:t>
-            </a:r>
-          </a:p>
-        </p:txBody>
-      </p:sp>
-      <p:sp>
-        <p:nvSpPr>
-          <p:cNvPr id="8" name="TextBox 7"/>
-          <p:cNvSpPr txBox="1"/>
-          <p:nvPr/>
-        </p:nvSpPr>
-        <p:spPr>
-          <a:xfrm>
-            <a:off x="822960" y="3200400"/>
-            <a:ext cx="548640" cy="1005840"/>
-          </a:xfrm>
-          <a:prstGeom prst="rect">
-            <a:avLst/>
-          </a:prstGeom>
-          <a:noFill/>
-        </p:spPr>
-        <p:txBody>
-          <a:bodyPr wrap="square" anchor="t" lIns="0" rIns="0" tIns="0" bIns="0">
-            <a:spAutoFit/>
-          </a:bodyPr>
-          <a:lstStyle/>
-          <a:p>
-            <a:pPr algn="l">
-              <a:spcAft>
-                <a:spcPts val="1170"/>
-              </a:spcAft>
-            </a:pPr>
-            <a:r>
-              <a:rPr sz="2600" b="1" i="0">
-                <a:solidFill>
-                  <a:srgbClr val="F47B20"/>
-                </a:solidFill>
-                <a:latin typeface="Source Serif 4"/>
-              </a:rPr>
-              <a:t>2</a:t>
-            </a:r>
-          </a:p>
-        </p:txBody>
-      </p:sp>
-      <p:sp>
-        <p:nvSpPr>
-          <p:cNvPr id="9" name="TextBox 8"/>
-          <p:cNvSpPr txBox="1"/>
-          <p:nvPr/>
-        </p:nvSpPr>
-        <p:spPr>
-          <a:xfrm>
-            <a:off x="1463040" y="3236976"/>
-            <a:ext cx="9875520" cy="1005840"/>
-          </a:xfrm>
-          <a:prstGeom prst="rect">
-            <a:avLst/>
-          </a:prstGeom>
-          <a:noFill/>
-        </p:spPr>
-        <p:txBody>
-          <a:bodyPr wrap="square" anchor="t" lIns="0" rIns="0" tIns="0" bIns="0">
-            <a:spAutoFit/>
-          </a:bodyPr>
-          <a:lstStyle/>
-          <a:p>
-            <a:pPr algn="l">
-              <a:spcAft>
-                <a:spcPts val="945"/>
-              </a:spcAft>
-            </a:pPr>
-            <a:r>
-              <a:rPr sz="2100" b="1" i="0">
-                <a:solidFill>
-                  <a:srgbClr val="1C1B19"/>
-                </a:solidFill>
-                <a:latin typeface="Source Serif 4"/>
-              </a:rPr>
-              <a:t>Self-esteem</a:t>
-            </a:r>
-          </a:p>
-          <a:p>
-            <a:pPr algn="l">
-              <a:spcAft>
-                <a:spcPts val="945"/>
-              </a:spcAft>
-            </a:pPr>
-            <a:r>
-              <a:rPr sz="1600" b="0" i="0">
-                <a:solidFill>
-                  <a:srgbClr val="5D5A54"/>
-                </a:solidFill>
-                <a:latin typeface="Source Serif 4"/>
-              </a:rPr>
-              <a:t>"What's wrong with me?" Even when it was an accident.</a:t>
-            </a:r>
-          </a:p>
-        </p:txBody>
-      </p:sp>
-      <p:sp>
-        <p:nvSpPr>
-          <p:cNvPr id="10" name="TextBox 9"/>
-          <p:cNvSpPr txBox="1"/>
-          <p:nvPr/>
-        </p:nvSpPr>
-        <p:spPr>
-          <a:xfrm>
-            <a:off x="822960" y="4206240"/>
-            <a:ext cx="548640" cy="1005840"/>
-          </a:xfrm>
-          <a:prstGeom prst="rect">
-            <a:avLst/>
-          </a:prstGeom>
-          <a:noFill/>
-        </p:spPr>
-        <p:txBody>
-          <a:bodyPr wrap="square" anchor="t" lIns="0" rIns="0" tIns="0" bIns="0">
-            <a:spAutoFit/>
-          </a:bodyPr>
-          <a:lstStyle/>
-          <a:p>
-            <a:pPr algn="l">
-              <a:spcAft>
-                <a:spcPts val="1170"/>
-              </a:spcAft>
-            </a:pPr>
-            <a:r>
-              <a:rPr sz="2600" b="1" i="0">
-                <a:solidFill>
-                  <a:srgbClr val="F47B20"/>
-                </a:solidFill>
-                <a:latin typeface="Source Serif 4"/>
-              </a:rPr>
-              <a:t>3</a:t>
-            </a:r>
-          </a:p>
-        </p:txBody>
-      </p:sp>
-      <p:sp>
-        <p:nvSpPr>
-          <p:cNvPr id="11" name="TextBox 10"/>
-          <p:cNvSpPr txBox="1"/>
-          <p:nvPr/>
-        </p:nvSpPr>
-        <p:spPr>
-          <a:xfrm>
-            <a:off x="1463040" y="4242816"/>
-            <a:ext cx="9875520" cy="1005840"/>
-          </a:xfrm>
-          <a:prstGeom prst="rect">
-            <a:avLst/>
-          </a:prstGeom>
-          <a:noFill/>
-        </p:spPr>
-        <p:txBody>
-          <a:bodyPr wrap="square" anchor="t" lIns="0" rIns="0" tIns="0" bIns="0">
-            <a:spAutoFit/>
-          </a:bodyPr>
-          <a:lstStyle/>
-          <a:p>
-            <a:pPr algn="l">
-              <a:spcAft>
-                <a:spcPts val="945"/>
-              </a:spcAft>
-            </a:pPr>
-            <a:r>
-              <a:rPr sz="2100" b="1" i="0">
-                <a:solidFill>
-                  <a:srgbClr val="1C1B19"/>
-                </a:solidFill>
-                <a:latin typeface="Source Serif 4"/>
-              </a:rPr>
-              <a:t>Control</a:t>
-            </a:r>
-          </a:p>
-          <a:p>
-            <a:pPr algn="l">
-              <a:spcAft>
-                <a:spcPts val="945"/>
-              </a:spcAft>
-            </a:pPr>
-            <a:r>
-              <a:rPr sz="1600" b="0" i="0">
-                <a:solidFill>
-                  <a:srgbClr val="5D5A54"/>
-                </a:solidFill>
-                <a:latin typeface="Source Serif 4"/>
-              </a:rPr>
-              <a:t>It happened to you. Doing something helps.</a:t>
-            </a:r>
-          </a:p>
-        </p:txBody>
-      </p:sp>
-      <p:sp>
-        <p:nvSpPr>
-          <p:cNvPr id="12" name="TextBox 11"/>
-          <p:cNvSpPr txBox="1"/>
-          <p:nvPr/>
-        </p:nvSpPr>
-        <p:spPr>
-          <a:xfrm>
-            <a:off x="822960" y="5212080"/>
-            <a:ext cx="548640" cy="1005840"/>
-          </a:xfrm>
-          <a:prstGeom prst="rect">
-            <a:avLst/>
-          </a:prstGeom>
-          <a:noFill/>
-        </p:spPr>
-        <p:txBody>
-          <a:bodyPr wrap="square" anchor="t" lIns="0" rIns="0" tIns="0" bIns="0">
-            <a:spAutoFit/>
-          </a:bodyPr>
-          <a:lstStyle/>
-          <a:p>
-            <a:pPr algn="l">
-              <a:spcAft>
-                <a:spcPts val="1170"/>
-              </a:spcAft>
-            </a:pPr>
-            <a:r>
-              <a:rPr sz="2600" b="1" i="0">
-                <a:solidFill>
-                  <a:srgbClr val="F47B20"/>
-                </a:solidFill>
-                <a:latin typeface="Source Serif 4"/>
-              </a:rPr>
-              <a:t>4</a:t>
-            </a:r>
-          </a:p>
-        </p:txBody>
-      </p:sp>
-      <p:sp>
-        <p:nvSpPr>
-          <p:cNvPr id="13" name="TextBox 12"/>
-          <p:cNvSpPr txBox="1"/>
-          <p:nvPr/>
-        </p:nvSpPr>
-        <p:spPr>
-          <a:xfrm>
-            <a:off x="1463040" y="5248656"/>
-            <a:ext cx="9875520" cy="1005840"/>
-          </a:xfrm>
-          <a:prstGeom prst="rect">
-            <a:avLst/>
-          </a:prstGeom>
-          <a:noFill/>
-        </p:spPr>
-        <p:txBody>
-          <a:bodyPr wrap="square" anchor="t" lIns="0" rIns="0" tIns="0" bIns="0">
-            <a:spAutoFit/>
-          </a:bodyPr>
-          <a:lstStyle/>
-          <a:p>
-            <a:pPr algn="l">
-              <a:spcAft>
-                <a:spcPts val="945"/>
-              </a:spcAft>
-            </a:pPr>
-            <a:r>
-              <a:rPr sz="2100" b="1" i="0">
-                <a:solidFill>
-                  <a:srgbClr val="1C1B19"/>
-                </a:solidFill>
-                <a:latin typeface="Source Serif 4"/>
-              </a:rPr>
-              <a:t>Mattering</a:t>
-            </a:r>
-          </a:p>
-          <a:p>
-            <a:pPr algn="l">
-              <a:spcAft>
-                <a:spcPts val="945"/>
-              </a:spcAft>
-            </a:pPr>
-            <a:r>
-              <a:rPr sz="1600" b="0" i="0">
-                <a:solidFill>
-                  <a:srgbClr val="5D5A54"/>
-                </a:solidFill>
-                <a:latin typeface="Source Serif 4"/>
-              </a:rPr>
-              <a:t>Wondering if your being there makes a difference.</a:t>
+                <a:latin typeface="Inter Tight"/>
+              </a:rPr>
+              <a:t>On a card, privately, write one you might say to someone. You decide if you ever say it.</a:t>
             </a:r>
           </a:p>
         </p:txBody>
@@ -7735,7 +8240,7 @@
                 </a:solidFill>
                 <a:latin typeface="Inter Tight"/>
               </a:rPr>
-              <a:t>CHECK FIRST</a:t>
+              <a:t>BEFORE YOU GO</a:t>
             </a:r>
           </a:p>
         </p:txBody>
@@ -7787,8 +8292,8 @@
         </p:nvSpPr>
         <p:spPr>
           <a:xfrm>
-            <a:off x="822960" y="1005840"/>
-            <a:ext cx="10515600" cy="1097280"/>
+            <a:off x="822960" y="1188720"/>
+            <a:ext cx="10515600" cy="914400"/>
           </a:xfrm>
           <a:prstGeom prst="rect">
             <a:avLst/>
@@ -7813,7 +8318,7 @@
                 </a:solidFill>
                 <a:latin typeface="Source Serif 4"/>
               </a:rPr>
-              <a:t>Accident, drift, or on purpose?</a:t>
+              <a:t>One move this week, if you want</a:t>
             </a:r>
           </a:p>
         </p:txBody>
@@ -7826,8 +8331,8 @@
         </p:nvSpPr>
         <p:spPr>
           <a:xfrm>
-            <a:off x="822960" y="2194560"/>
-            <a:ext cx="548640" cy="1051560"/>
+            <a:off x="822960" y="2286000"/>
+            <a:ext cx="10515600" cy="1463040"/>
           </a:xfrm>
           <a:prstGeom prst="rect">
             <a:avLst/>
@@ -7842,309 +8347,42 @@
           <a:p>
             <a:pPr algn="l">
               <a:spcAft>
-                <a:spcPts val="1170"/>
-              </a:spcAft>
-            </a:pPr>
-            <a:r>
-              <a:rPr sz="2600" b="1" i="0">
-                <a:solidFill>
-                  <a:srgbClr val="F47B20"/>
+                <a:spcPts val="1080"/>
+              </a:spcAft>
+            </a:pPr>
+            <a:r>
+              <a:rPr sz="2400" b="0" i="0">
+                <a:solidFill>
+                  <a:srgbClr val="1C1B19"/>
                 </a:solidFill>
                 <a:latin typeface="Source Serif 4"/>
               </a:rPr>
-              <a:t>•</a:t>
-            </a:r>
-          </a:p>
-        </p:txBody>
-      </p:sp>
-      <p:sp>
-        <p:nvSpPr>
-          <p:cNvPr id="7" name="TextBox 6"/>
-          <p:cNvSpPr txBox="1"/>
-          <p:nvPr/>
-        </p:nvSpPr>
-        <p:spPr>
-          <a:xfrm>
-            <a:off x="1463040" y="2231136"/>
-            <a:ext cx="9875520" cy="1051560"/>
-          </a:xfrm>
-          <a:prstGeom prst="rect">
-            <a:avLst/>
-          </a:prstGeom>
-          <a:noFill/>
-        </p:spPr>
-        <p:txBody>
-          <a:bodyPr wrap="square" anchor="t" lIns="0" rIns="0" tIns="0" bIns="0">
-            <a:spAutoFit/>
-          </a:bodyPr>
-          <a:lstStyle/>
-          <a:p>
-            <a:pPr algn="l">
-              <a:spcAft>
-                <a:spcPts val="945"/>
-              </a:spcAft>
-            </a:pPr>
-            <a:r>
-              <a:rPr sz="2100" b="1" i="0">
-                <a:solidFill>
-                  <a:srgbClr val="1C1B19"/>
-                </a:solidFill>
-                <a:latin typeface="Source Serif 4"/>
-              </a:rPr>
-              <a:t>An accident</a:t>
-            </a:r>
-          </a:p>
-          <a:p>
-            <a:pPr algn="l">
-              <a:spcAft>
-                <a:spcPts val="945"/>
-              </a:spcAft>
-            </a:pPr>
-            <a:r>
-              <a:rPr sz="1600" b="0" i="0">
-                <a:solidFill>
-                  <a:srgbClr val="5D5A54"/>
-                </a:solidFill>
-                <a:latin typeface="Source Serif 4"/>
-              </a:rPr>
-              <a:t>Someone didn't think, or assumed you were busy.</a:t>
-            </a:r>
-          </a:p>
-        </p:txBody>
-      </p:sp>
-      <p:sp>
-        <p:nvSpPr>
-          <p:cNvPr id="8" name="TextBox 7"/>
-          <p:cNvSpPr txBox="1"/>
-          <p:nvPr/>
-        </p:nvSpPr>
-        <p:spPr>
-          <a:xfrm>
-            <a:off x="822960" y="3246120"/>
-            <a:ext cx="548640" cy="1051560"/>
-          </a:xfrm>
-          <a:prstGeom prst="rect">
-            <a:avLst/>
-          </a:prstGeom>
-          <a:noFill/>
-        </p:spPr>
-        <p:txBody>
-          <a:bodyPr wrap="square" anchor="t" lIns="0" rIns="0" tIns="0" bIns="0">
-            <a:spAutoFit/>
-          </a:bodyPr>
-          <a:lstStyle/>
-          <a:p>
-            <a:pPr algn="l">
-              <a:spcAft>
-                <a:spcPts val="1170"/>
-              </a:spcAft>
-            </a:pPr>
-            <a:r>
-              <a:rPr sz="2600" b="1" i="0">
-                <a:solidFill>
-                  <a:srgbClr val="F47B20"/>
-                </a:solidFill>
-                <a:latin typeface="Source Serif 4"/>
-              </a:rPr>
-              <a:t>•</a:t>
-            </a:r>
-          </a:p>
-        </p:txBody>
-      </p:sp>
-      <p:sp>
-        <p:nvSpPr>
-          <p:cNvPr id="9" name="TextBox 8"/>
-          <p:cNvSpPr txBox="1"/>
-          <p:nvPr/>
-        </p:nvSpPr>
-        <p:spPr>
-          <a:xfrm>
-            <a:off x="1463040" y="3282696"/>
-            <a:ext cx="9875520" cy="1051560"/>
-          </a:xfrm>
-          <a:prstGeom prst="rect">
-            <a:avLst/>
-          </a:prstGeom>
-          <a:noFill/>
-        </p:spPr>
-        <p:txBody>
-          <a:bodyPr wrap="square" anchor="t" lIns="0" rIns="0" tIns="0" bIns="0">
-            <a:spAutoFit/>
-          </a:bodyPr>
-          <a:lstStyle/>
-          <a:p>
-            <a:pPr algn="l">
-              <a:spcAft>
-                <a:spcPts val="945"/>
-              </a:spcAft>
-            </a:pPr>
-            <a:r>
-              <a:rPr sz="2100" b="1" i="0">
-                <a:solidFill>
-                  <a:srgbClr val="1C1B19"/>
-                </a:solidFill>
-                <a:latin typeface="Source Serif 4"/>
-              </a:rPr>
-              <a:t>A drift</a:t>
-            </a:r>
-          </a:p>
-          <a:p>
-            <a:pPr algn="l">
-              <a:spcAft>
-                <a:spcPts val="945"/>
-              </a:spcAft>
-            </a:pPr>
-            <a:r>
-              <a:rPr sz="1600" b="0" i="0">
-                <a:solidFill>
-                  <a:srgbClr val="5D5A54"/>
-                </a:solidFill>
-                <a:latin typeface="Source Serif 4"/>
-              </a:rPr>
-              <a:t>Schedules, jobs or relationships pulled people apart.</a:t>
-            </a:r>
-          </a:p>
-        </p:txBody>
-      </p:sp>
-      <p:sp>
-        <p:nvSpPr>
-          <p:cNvPr id="10" name="TextBox 9"/>
-          <p:cNvSpPr txBox="1"/>
-          <p:nvPr/>
-        </p:nvSpPr>
-        <p:spPr>
-          <a:xfrm>
-            <a:off x="822960" y="4297679"/>
-            <a:ext cx="548640" cy="1051560"/>
-          </a:xfrm>
-          <a:prstGeom prst="rect">
-            <a:avLst/>
-          </a:prstGeom>
-          <a:noFill/>
-        </p:spPr>
-        <p:txBody>
-          <a:bodyPr wrap="square" anchor="t" lIns="0" rIns="0" tIns="0" bIns="0">
-            <a:spAutoFit/>
-          </a:bodyPr>
-          <a:lstStyle/>
-          <a:p>
-            <a:pPr algn="l">
-              <a:spcAft>
-                <a:spcPts val="1170"/>
-              </a:spcAft>
-            </a:pPr>
-            <a:r>
-              <a:rPr sz="2600" b="1" i="0">
-                <a:solidFill>
-                  <a:srgbClr val="F47B20"/>
-                </a:solidFill>
-                <a:latin typeface="Source Serif 4"/>
-              </a:rPr>
-              <a:t>•</a:t>
-            </a:r>
-          </a:p>
-        </p:txBody>
-      </p:sp>
-      <p:sp>
-        <p:nvSpPr>
-          <p:cNvPr id="11" name="TextBox 10"/>
-          <p:cNvSpPr txBox="1"/>
-          <p:nvPr/>
-        </p:nvSpPr>
-        <p:spPr>
-          <a:xfrm>
-            <a:off x="1463040" y="4334255"/>
-            <a:ext cx="9875520" cy="1051560"/>
-          </a:xfrm>
-          <a:prstGeom prst="rect">
-            <a:avLst/>
-          </a:prstGeom>
-          <a:noFill/>
-        </p:spPr>
-        <p:txBody>
-          <a:bodyPr wrap="square" anchor="t" lIns="0" rIns="0" tIns="0" bIns="0">
-            <a:spAutoFit/>
-          </a:bodyPr>
-          <a:lstStyle/>
-          <a:p>
-            <a:pPr algn="l">
-              <a:spcAft>
-                <a:spcPts val="945"/>
-              </a:spcAft>
-            </a:pPr>
-            <a:r>
-              <a:rPr sz="2100" b="1" i="0">
-                <a:solidFill>
-                  <a:srgbClr val="1C1B19"/>
-                </a:solidFill>
-                <a:latin typeface="Source Serif 4"/>
-              </a:rPr>
-              <a:t>On purpose</a:t>
-            </a:r>
-          </a:p>
-          <a:p>
-            <a:pPr algn="l">
-              <a:spcAft>
-                <a:spcPts val="945"/>
-              </a:spcAft>
-            </a:pPr>
-            <a:r>
-              <a:rPr sz="1600" b="0" i="0">
-                <a:solidFill>
-                  <a:srgbClr val="5D5A54"/>
-                </a:solidFill>
-                <a:latin typeface="Source Serif 4"/>
-              </a:rPr>
-              <a:t>Someone is choosing to keep you out. That isn't okay.</a:t>
-            </a:r>
-          </a:p>
-        </p:txBody>
-      </p:sp>
-    </p:spTree>
-  </p:cSld>
-  <p:clrMapOvr>
-    <a:masterClrMapping/>
-  </p:clrMapOvr>
-</p:sld>
-</file>
-
-<file path=ppt/slides/slide9.xml><?xml version="1.0" encoding="utf-8"?>
-<p:sld xmlns:a="http://schemas.openxmlformats.org/drawingml/2006/main" xmlns:p="http://schemas.openxmlformats.org/presentationml/2006/main" xmlns:r="http://schemas.openxmlformats.org/officeDocument/2006/relationships">
-  <p:cSld>
-    <p:bg>
-      <p:bgPr>
-        <a:solidFill>
-          <a:srgbClr val="F7F4EE"/>
-        </a:solidFill>
-        <a:effectLst/>
-      </p:bgPr>
-    </p:bg>
-    <p:spTree>
-      <p:nvGrpSpPr>
-        <p:cNvPr id="1" name=""/>
-        <p:cNvGrpSpPr/>
-        <p:nvPr/>
-      </p:nvGrpSpPr>
-      <p:grpSpPr/>
-      <p:sp>
-        <p:nvSpPr>
-          <p:cNvPr id="2" name="Rectangle 1"/>
+              <a:t>Ask "can I come?", make a plan, mute a story, or turn off the map.</a:t>
+            </a:r>
+          </a:p>
+        </p:txBody>
+      </p:sp>
+      <p:sp>
+        <p:nvSpPr>
+          <p:cNvPr id="7" name="Rectangle 6"/>
           <p:cNvSpPr/>
           <p:nvPr/>
         </p:nvSpPr>
         <p:spPr>
           <a:xfrm>
-            <a:off x="548640" y="502920"/>
-            <a:ext cx="457200" cy="54864"/>
+            <a:off x="822960" y="4023360"/>
+            <a:ext cx="10515600" cy="1371600"/>
           </a:xfrm>
           <a:prstGeom prst="rect">
             <a:avLst/>
           </a:prstGeom>
           <a:solidFill>
-            <a:srgbClr val="F47B20"/>
+            <a:srgbClr val="FFFFFF"/>
           </a:solidFill>
-          <a:ln>
-            <a:noFill/>
+          <a:ln w="15875">
+            <a:solidFill>
+              <a:srgbClr val="1C1B19"/>
+            </a:solidFill>
           </a:ln>
           <a:effectLst/>
         </p:spPr>
@@ -8172,14 +8410,14 @@
       </p:sp>
       <p:sp>
         <p:nvSpPr>
-          <p:cNvPr id="3" name="TextBox 2"/>
+          <p:cNvPr id="8" name="TextBox 7"/>
           <p:cNvSpPr txBox="1"/>
           <p:nvPr/>
         </p:nvSpPr>
         <p:spPr>
           <a:xfrm>
-            <a:off x="1143000" y="393192"/>
-            <a:ext cx="8229600" cy="274320"/>
+            <a:off x="1097280" y="4206240"/>
+            <a:ext cx="10058400" cy="365760"/>
           </a:xfrm>
           <a:prstGeom prst="rect">
             <a:avLst/>
@@ -8200,25 +8438,25 @@
             <a:r>
               <a:rPr sz="1200" b="1" i="0">
                 <a:solidFill>
-                  <a:srgbClr val="5D5A54"/>
+                  <a:srgbClr val="0B2D5B"/>
                 </a:solidFill>
                 <a:latin typeface="Inter Tight"/>
               </a:rPr>
-              <a:t>YOU DECIDE</a:t>
-            </a:r>
-          </a:p>
-        </p:txBody>
-      </p:sp>
-      <p:sp>
-        <p:nvSpPr>
-          <p:cNvPr id="4" name="TextBox 3"/>
+              <a:t>STUDENT PAGE</a:t>
+            </a:r>
+          </a:p>
+        </p:txBody>
+      </p:sp>
+      <p:sp>
+        <p:nvSpPr>
+          <p:cNvPr id="9" name="TextBox 8"/>
           <p:cNvSpPr txBox="1"/>
           <p:nvPr/>
         </p:nvSpPr>
         <p:spPr>
           <a:xfrm>
-            <a:off x="8229600" y="6400800"/>
-            <a:ext cx="3410712" cy="274320"/>
+            <a:off x="1097280" y="4617720"/>
+            <a:ext cx="10058400" cy="640080"/>
           </a:xfrm>
           <a:prstGeom prst="rect">
             <a:avLst/>
@@ -8231,83 +8469,68 @@
           </a:bodyPr>
           <a:lstStyle/>
           <a:p>
-            <a:pPr algn="r">
-              <a:spcAft>
-                <a:spcPts val="450"/>
-              </a:spcAft>
-            </a:pPr>
-            <a:r>
-              <a:rPr sz="1000" b="0" i="0">
-                <a:solidFill>
-                  <a:srgbClr val="5D5A54"/>
+            <a:pPr algn="l">
+              <a:spcAft>
+                <a:spcPts val="900"/>
+              </a:spcAft>
+            </a:pPr>
+            <a:r>
+              <a:rPr sz="2000" b="0" i="0">
+                <a:solidFill>
+                  <a:srgbClr val="1C1B19"/>
                 </a:solidFill>
                 <a:latin typeface="Inter Tight"/>
               </a:rPr>
-              <a:t>Beaver Counseling</a:t>
-            </a:r>
-          </a:p>
-        </p:txBody>
-      </p:sp>
-      <p:sp>
-        <p:nvSpPr>
-          <p:cNvPr id="5" name="TextBox 4"/>
-          <p:cNvSpPr txBox="1"/>
-          <p:nvPr/>
-        </p:nvSpPr>
-        <p:spPr>
-          <a:xfrm>
-            <a:off x="822960" y="1005840"/>
-            <a:ext cx="10515600" cy="914400"/>
-          </a:xfrm>
-          <a:prstGeom prst="rect">
-            <a:avLst/>
-          </a:prstGeom>
-          <a:noFill/>
-        </p:spPr>
-        <p:txBody>
-          <a:bodyPr wrap="square" anchor="t" lIns="0" rIns="0" tIns="0" bIns="0">
-            <a:spAutoFit/>
-          </a:bodyPr>
-          <a:lstStyle/>
-          <a:p>
-            <a:pPr algn="l">
-              <a:spcAft>
-                <a:spcPts val="1530"/>
-              </a:spcAft>
-            </a:pPr>
-            <a:r>
-              <a:rPr sz="3400" b="1" i="0">
-                <a:solidFill>
-                  <a:srgbClr val="1C1B19"/>
-                </a:solidFill>
-                <a:latin typeface="Source Serif 4"/>
-              </a:rPr>
-              <a:t>Accident, drift, or on purpose?</a:t>
-            </a:r>
-          </a:p>
-        </p:txBody>
-      </p:sp>
-      <p:sp>
-        <p:nvSpPr>
-          <p:cNvPr id="6" name="Rectangle 5"/>
+              <a:t>https://rmwtoolkit.github.io/bcds-toolkit/the-third-wheel-high-school.html</a:t>
+            </a:r>
+          </a:p>
+        </p:txBody>
+      </p:sp>
+    </p:spTree>
+  </p:cSld>
+  <p:clrMapOvr>
+    <a:masterClrMapping/>
+  </p:clrMapOvr>
+</p:sld>
+</file>
+
+<file path=ppt/slides/slide9.xml><?xml version="1.0" encoding="utf-8"?>
+<p:sld xmlns:a="http://schemas.openxmlformats.org/drawingml/2006/main" xmlns:p="http://schemas.openxmlformats.org/presentationml/2006/main" xmlns:r="http://schemas.openxmlformats.org/officeDocument/2006/relationships" show="0">
+  <p:cSld>
+    <p:bg>
+      <p:bgPr>
+        <a:solidFill>
+          <a:srgbClr val="EEEBE4"/>
+        </a:solidFill>
+        <a:effectLst/>
+      </p:bgPr>
+    </p:bg>
+    <p:spTree>
+      <p:nvGrpSpPr>
+        <p:cNvPr id="1" name=""/>
+        <p:cNvGrpSpPr/>
+        <p:nvPr/>
+      </p:nvGrpSpPr>
+      <p:grpSpPr/>
+      <p:sp>
+        <p:nvSpPr>
+          <p:cNvPr id="2" name="Rectangle 1"/>
           <p:cNvSpPr/>
           <p:nvPr/>
         </p:nvSpPr>
         <p:spPr>
           <a:xfrm>
-            <a:off x="822960" y="2103120"/>
-            <a:ext cx="3322320" cy="3840480"/>
+            <a:off x="0" y="0"/>
+            <a:ext cx="12191695" cy="384048"/>
           </a:xfrm>
           <a:prstGeom prst="rect">
             <a:avLst/>
           </a:prstGeom>
           <a:solidFill>
-            <a:srgbClr val="FFFFFF"/>
+            <a:srgbClr val="0B2D5B"/>
           </a:solidFill>
-          <a:ln w="15875">
-            <a:solidFill>
-              <a:srgbClr val="D8D2C6"/>
-            </a:solidFill>
+          <a:ln>
+            <a:noFill/>
           </a:ln>
           <a:effectLst/>
         </p:spPr>
@@ -8335,14 +8558,266 @@
       </p:sp>
       <p:sp>
         <p:nvSpPr>
+          <p:cNvPr id="3" name="TextBox 2"/>
+          <p:cNvSpPr txBox="1"/>
+          <p:nvPr/>
+        </p:nvSpPr>
+        <p:spPr>
+          <a:xfrm>
+            <a:off x="548640" y="100584"/>
+            <a:ext cx="10972800" cy="274320"/>
+          </a:xfrm>
+          <a:prstGeom prst="rect">
+            <a:avLst/>
+          </a:prstGeom>
+          <a:noFill/>
+        </p:spPr>
+        <p:txBody>
+          <a:bodyPr wrap="square" anchor="t" lIns="0" rIns="0" tIns="0" bIns="0">
+            <a:spAutoFit/>
+          </a:bodyPr>
+          <a:lstStyle/>
+          <a:p>
+            <a:pPr algn="l">
+              <a:spcAft>
+                <a:spcPts val="495"/>
+              </a:spcAft>
+            </a:pPr>
+            <a:r>
+              <a:rPr sz="1100" b="1" i="0">
+                <a:solidFill>
+                  <a:srgbClr val="FFFFFF"/>
+                </a:solidFill>
+                <a:latin typeface="Inter Tight"/>
+              </a:rPr>
+              <a:t>TEACHER PAGE  ·  skipped when you present  ·  Lesson plan</a:t>
+            </a:r>
+          </a:p>
+        </p:txBody>
+      </p:sp>
+      <p:sp>
+        <p:nvSpPr>
+          <p:cNvPr id="4" name="TextBox 3"/>
+          <p:cNvSpPr txBox="1"/>
+          <p:nvPr/>
+        </p:nvSpPr>
+        <p:spPr>
+          <a:xfrm>
+            <a:off x="548640" y="685800"/>
+            <a:ext cx="10972800" cy="731520"/>
+          </a:xfrm>
+          <a:prstGeom prst="rect">
+            <a:avLst/>
+          </a:prstGeom>
+          <a:noFill/>
+        </p:spPr>
+        <p:txBody>
+          <a:bodyPr wrap="square" anchor="t" lIns="0" rIns="0" tIns="0" bIns="0">
+            <a:spAutoFit/>
+          </a:bodyPr>
+          <a:lstStyle/>
+          <a:p>
+            <a:pPr algn="l">
+              <a:spcAft>
+                <a:spcPts val="1530"/>
+              </a:spcAft>
+            </a:pPr>
+            <a:r>
+              <a:rPr sz="3400" b="1" i="0">
+                <a:solidFill>
+                  <a:srgbClr val="1C1B19"/>
+                </a:solidFill>
+                <a:latin typeface="Source Serif 4"/>
+              </a:rPr>
+              <a:t>The Third Wheel</a:t>
+            </a:r>
+          </a:p>
+        </p:txBody>
+      </p:sp>
+      <p:sp>
+        <p:nvSpPr>
+          <p:cNvPr id="5" name="TextBox 4"/>
+          <p:cNvSpPr txBox="1"/>
+          <p:nvPr/>
+        </p:nvSpPr>
+        <p:spPr>
+          <a:xfrm>
+            <a:off x="548640" y="1325880"/>
+            <a:ext cx="10972800" cy="365760"/>
+          </a:xfrm>
+          <a:prstGeom prst="rect">
+            <a:avLst/>
+          </a:prstGeom>
+          <a:noFill/>
+        </p:spPr>
+        <p:txBody>
+          <a:bodyPr wrap="square" anchor="t" lIns="0" rIns="0" tIns="0" bIns="0">
+            <a:spAutoFit/>
+          </a:bodyPr>
+          <a:lstStyle/>
+          <a:p>
+            <a:pPr algn="l">
+              <a:spcAft>
+                <a:spcPts val="630"/>
+              </a:spcAft>
+            </a:pPr>
+            <a:r>
+              <a:rPr sz="1400" b="0" i="0">
+                <a:solidFill>
+                  <a:srgbClr val="5D5A54"/>
+                </a:solidFill>
+                <a:latin typeface="Inter Tight"/>
+              </a:rPr>
+              <a:t>Upper School  ·  20 minutes (fits a 30-minute advisory, with time for your opening check-in; 10-minute version below)  ·  Any grade</a:t>
+            </a:r>
+          </a:p>
+        </p:txBody>
+      </p:sp>
+      <p:sp>
+        <p:nvSpPr>
+          <p:cNvPr id="6" name="TextBox 5"/>
+          <p:cNvSpPr txBox="1"/>
+          <p:nvPr/>
+        </p:nvSpPr>
+        <p:spPr>
+          <a:xfrm>
+            <a:off x="548640" y="1828800"/>
+            <a:ext cx="5120640" cy="4389120"/>
+          </a:xfrm>
+          <a:prstGeom prst="rect">
+            <a:avLst/>
+          </a:prstGeom>
+          <a:noFill/>
+        </p:spPr>
+        <p:txBody>
+          <a:bodyPr wrap="square" anchor="t" lIns="0" rIns="0" tIns="0" bIns="0">
+            <a:spAutoFit/>
+          </a:bodyPr>
+          <a:lstStyle/>
+          <a:p>
+            <a:pPr algn="l">
+              <a:spcAft>
+                <a:spcPts val="675"/>
+              </a:spcAft>
+            </a:pPr>
+            <a:r>
+              <a:rPr sz="1100" b="1" i="0">
+                <a:solidFill>
+                  <a:srgbClr val="0B2D5B"/>
+                </a:solidFill>
+                <a:latin typeface="Inter Tight"/>
+              </a:rPr>
+              <a:t>GOAL</a:t>
+            </a:r>
+          </a:p>
+          <a:p>
+            <a:pPr algn="l">
+              <a:spcAft>
+                <a:spcPts val="675"/>
+              </a:spcAft>
+            </a:pPr>
+            <a:r>
+              <a:rPr sz="1500" b="0" i="0">
+                <a:solidFill>
+                  <a:srgbClr val="1C1B19"/>
+                </a:solidFill>
+                <a:latin typeface="Source Serif 4"/>
+              </a:rPr>
+              <a:t>Students can explain why small exclusions hurt and why the first read on them is often off, sort a situation into accident, drift, or on purpose, and draft one honest sentence they could say to a friend. Nobody names real people or plans.</a:t>
+            </a:r>
+          </a:p>
+          <a:p>
+            <a:pPr algn="l">
+              <a:spcAft>
+                <a:spcPts val="675"/>
+              </a:spcAft>
+            </a:pPr>
+            <a:r>
+              <a:rPr sz="1500" b="0" i="0">
+                <a:solidFill>
+                  <a:srgbClr val="1C1B19"/>
+                </a:solidFill>
+                <a:latin typeface="Source Serif 4"/>
+              </a:rPr>
+              <a:t/>
+            </a:r>
+          </a:p>
+          <a:p>
+            <a:pPr algn="l">
+              <a:spcAft>
+                <a:spcPts val="675"/>
+              </a:spcAft>
+            </a:pPr>
+            <a:r>
+              <a:rPr sz="1100" b="1" i="0">
+                <a:solidFill>
+                  <a:srgbClr val="0B2D5B"/>
+                </a:solidFill>
+                <a:latin typeface="Inter Tight"/>
+              </a:rPr>
+              <a:t>MATERIALS</a:t>
+            </a:r>
+          </a:p>
+          <a:p>
+            <a:pPr algn="l">
+              <a:spcAft>
+                <a:spcPts val="675"/>
+              </a:spcAft>
+            </a:pPr>
+            <a:r>
+              <a:rPr sz="1500" b="0" i="0">
+                <a:solidFill>
+                  <a:srgbClr val="1C1B19"/>
+                </a:solidFill>
+                <a:latin typeface="Source Serif 4"/>
+              </a:rPr>
+              <a:t>Scrap paper and a hat or bag for the anonymous guess</a:t>
+            </a:r>
+          </a:p>
+          <a:p>
+            <a:pPr algn="l">
+              <a:spcAft>
+                <a:spcPts val="675"/>
+              </a:spcAft>
+            </a:pPr>
+            <a:r>
+              <a:rPr sz="1500" b="0" i="0">
+                <a:solidFill>
+                  <a:srgbClr val="1C1B19"/>
+                </a:solidFill>
+                <a:latin typeface="Source Serif 4"/>
+              </a:rPr>
+              <a:t>Index cards for the private honest sentence</a:t>
+            </a:r>
+          </a:p>
+          <a:p>
+            <a:pPr algn="l">
+              <a:spcAft>
+                <a:spcPts val="675"/>
+              </a:spcAft>
+            </a:pPr>
+            <a:r>
+              <a:rPr sz="1500" b="0" i="0">
+                <a:solidFill>
+                  <a:srgbClr val="1C1B19"/>
+                </a:solidFill>
+                <a:latin typeface="Source Serif 4"/>
+              </a:rPr>
+              <a:t>The student page link (last slide) to share after advisory</a:t>
+            </a:r>
+          </a:p>
+        </p:txBody>
+      </p:sp>
+      <p:sp>
+        <p:nvSpPr>
           <p:cNvPr id="7" name="TextBox 6"/>
           <p:cNvSpPr txBox="1"/>
           <p:nvPr/>
         </p:nvSpPr>
         <p:spPr>
           <a:xfrm>
-            <a:off x="1051560" y="2286000"/>
-            <a:ext cx="2865120" cy="365760"/>
+            <a:off x="6126480" y="1828800"/>
+            <a:ext cx="5486400" cy="4389120"/>
           </a:xfrm>
           <a:prstGeom prst="rect">
             <a:avLst/>
@@ -8357,304 +8832,190 @@
           <a:p>
             <a:pPr algn="l">
               <a:spcAft>
-                <a:spcPts val="585"/>
+                <a:spcPts val="630"/>
+              </a:spcAft>
+            </a:pPr>
+            <a:r>
+              <a:rPr sz="1100" b="1" i="0">
+                <a:solidFill>
+                  <a:srgbClr val="0B2D5B"/>
+                </a:solidFill>
+                <a:latin typeface="Inter Tight"/>
+              </a:rPr>
+              <a:t>FLOW</a:t>
+            </a:r>
+          </a:p>
+          <a:p>
+            <a:pPr algn="l">
+              <a:spcAft>
+                <a:spcPts val="630"/>
               </a:spcAft>
             </a:pPr>
             <a:r>
               <a:rPr sz="1300" b="1" i="0">
                 <a:solidFill>
+                  <a:srgbClr val="F47B20"/>
+                </a:solidFill>
+                <a:latin typeface="Inter Tight"/>
+              </a:rPr>
+              <a:t>5 min   </a:t>
+            </a:r>
+            <a:r>
+              <a:rPr sz="1400" b="0" i="0">
+                <a:solidFill>
+                  <a:srgbClr val="1C1B19"/>
+                </a:solidFill>
+                <a:latin typeface="Source Serif 4"/>
+              </a:rPr>
+              <a:t>The guess (anonymous cards)</a:t>
+            </a:r>
+          </a:p>
+          <a:p>
+            <a:pPr algn="l">
+              <a:spcAft>
+                <a:spcPts val="630"/>
+              </a:spcAft>
+            </a:pPr>
+            <a:r>
+              <a:rPr sz="1300" b="1" i="0">
+                <a:solidFill>
+                  <a:srgbClr val="F47B20"/>
+                </a:solidFill>
+                <a:latin typeface="Inter Tight"/>
+              </a:rPr>
+              <a:t>5 min   </a:t>
+            </a:r>
+            <a:r>
+              <a:rPr sz="1400" b="0" i="0">
+                <a:solidFill>
+                  <a:srgbClr val="1C1B19"/>
+                </a:solidFill>
+                <a:latin typeface="Source Serif 4"/>
+              </a:rPr>
+              <a:t>What exclusion does, and check first</a:t>
+            </a:r>
+          </a:p>
+          <a:p>
+            <a:pPr algn="l">
+              <a:spcAft>
+                <a:spcPts val="630"/>
+              </a:spcAft>
+            </a:pPr>
+            <a:r>
+              <a:rPr sz="1300" b="1" i="0">
+                <a:solidFill>
+                  <a:srgbClr val="F47B20"/>
+                </a:solidFill>
+                <a:latin typeface="Inter Tight"/>
+              </a:rPr>
+              <a:t>5 min   </a:t>
+            </a:r>
+            <a:r>
+              <a:rPr sz="1400" b="0" i="0">
+                <a:solidFill>
+                  <a:srgbClr val="1C1B19"/>
+                </a:solidFill>
+                <a:latin typeface="Source Serif 4"/>
+              </a:rPr>
+              <a:t>Accident, drift, or on purpose? (pairs)</a:t>
+            </a:r>
+          </a:p>
+          <a:p>
+            <a:pPr algn="l">
+              <a:spcAft>
+                <a:spcPts val="630"/>
+              </a:spcAft>
+            </a:pPr>
+            <a:r>
+              <a:rPr sz="1300" b="1" i="0">
+                <a:solidFill>
+                  <a:srgbClr val="F47B20"/>
+                </a:solidFill>
+                <a:latin typeface="Inter Tight"/>
+              </a:rPr>
+              <a:t>3 min   </a:t>
+            </a:r>
+            <a:r>
+              <a:rPr sz="1400" b="0" i="0">
+                <a:solidFill>
+                  <a:srgbClr val="1C1B19"/>
+                </a:solidFill>
+                <a:latin typeface="Source Serif 4"/>
+              </a:rPr>
+              <a:t>One honest sentence (private)</a:t>
+            </a:r>
+          </a:p>
+          <a:p>
+            <a:pPr algn="l">
+              <a:spcAft>
+                <a:spcPts val="630"/>
+              </a:spcAft>
+            </a:pPr>
+            <a:r>
+              <a:rPr sz="1300" b="1" i="0">
+                <a:solidFill>
+                  <a:srgbClr val="F47B20"/>
+                </a:solidFill>
+                <a:latin typeface="Inter Tight"/>
+              </a:rPr>
+              <a:t>2 min   </a:t>
+            </a:r>
+            <a:r>
+              <a:rPr sz="1400" b="0" i="0">
+                <a:solidFill>
+                  <a:srgbClr val="1C1B19"/>
+                </a:solidFill>
+                <a:latin typeface="Source Serif 4"/>
+              </a:rPr>
+              <a:t>One move and the student page</a:t>
+            </a:r>
+          </a:p>
+          <a:p>
+            <a:pPr algn="l">
+              <a:spcAft>
+                <a:spcPts val="630"/>
+              </a:spcAft>
+            </a:pPr>
+            <a:r>
+              <a:rPr sz="1400" b="0" i="0">
+                <a:solidFill>
+                  <a:srgbClr val="1C1B19"/>
+                </a:solidFill>
+                <a:latin typeface="Source Serif 4"/>
+              </a:rPr>
+              <a:t/>
+            </a:r>
+          </a:p>
+          <a:p>
+            <a:pPr algn="l">
+              <a:spcAft>
+                <a:spcPts val="630"/>
+              </a:spcAft>
+            </a:pPr>
+            <a:r>
+              <a:rPr sz="1100" b="1" i="0">
+                <a:solidFill>
                   <a:srgbClr val="0B2D5B"/>
                 </a:solidFill>
                 <a:latin typeface="Inter Tight"/>
               </a:rPr>
-              <a:t>NADIA</a:t>
-            </a:r>
-          </a:p>
-        </p:txBody>
-      </p:sp>
-      <p:sp>
-        <p:nvSpPr>
-          <p:cNvPr id="8" name="TextBox 7"/>
-          <p:cNvSpPr txBox="1"/>
-          <p:nvPr/>
-        </p:nvSpPr>
-        <p:spPr>
-          <a:xfrm>
-            <a:off x="1051560" y="2743200"/>
-            <a:ext cx="2865120" cy="3017520"/>
-          </a:xfrm>
-          <a:prstGeom prst="rect">
-            <a:avLst/>
-          </a:prstGeom>
-          <a:noFill/>
-        </p:spPr>
-        <p:txBody>
-          <a:bodyPr wrap="square" anchor="t" lIns="0" rIns="0" tIns="0" bIns="0">
-            <a:spAutoFit/>
-          </a:bodyPr>
-          <a:lstStyle/>
-          <a:p>
-            <a:pPr algn="l">
-              <a:spcAft>
-                <a:spcPts val="810"/>
-              </a:spcAft>
-            </a:pPr>
-            <a:r>
-              <a:rPr sz="1800" b="0" i="0">
+              <a:t>SHORT ON TIME (10-MINUTE CHECK-IN)</a:t>
+            </a:r>
+          </a:p>
+          <a:p>
+            <a:pPr algn="l">
+              <a:spcAft>
+                <a:spcPts val="630"/>
+              </a:spcAft>
+            </a:pPr>
+            <a:r>
+              <a:rPr sz="1400" b="0" i="0">
                 <a:solidFill>
                   <a:srgbClr val="1C1B19"/>
                 </a:solidFill>
                 <a:latin typeface="Source Serif 4"/>
               </a:rPr>
-              <a:t>Started dating Chris in October. She used to drive you home after practice. Now she drives Chris. She still texts you most nights.</a:t>
-            </a:r>
-          </a:p>
-        </p:txBody>
-      </p:sp>
-      <p:sp>
-        <p:nvSpPr>
-          <p:cNvPr id="9" name="Rectangle 8"/>
-          <p:cNvSpPr/>
-          <p:nvPr/>
-        </p:nvSpPr>
-        <p:spPr>
-          <a:xfrm>
-            <a:off x="4419600" y="2103120"/>
-            <a:ext cx="3322320" cy="3840480"/>
-          </a:xfrm>
-          <a:prstGeom prst="rect">
-            <a:avLst/>
-          </a:prstGeom>
-          <a:solidFill>
-            <a:srgbClr val="FFFFFF"/>
-          </a:solidFill>
-          <a:ln w="15875">
-            <a:solidFill>
-              <a:srgbClr val="D8D2C6"/>
-            </a:solidFill>
-          </a:ln>
-          <a:effectLst/>
-        </p:spPr>
-        <p:style>
-          <a:lnRef idx="1">
-            <a:schemeClr val="accent1"/>
-          </a:lnRef>
-          <a:fillRef idx="3">
-            <a:schemeClr val="accent1"/>
-          </a:fillRef>
-          <a:effectRef idx="2">
-            <a:schemeClr val="accent1"/>
-          </a:effectRef>
-          <a:fontRef idx="minor">
-            <a:schemeClr val="lt1"/>
-          </a:fontRef>
-        </p:style>
-        <p:txBody>
-          <a:bodyPr rtlCol="0" anchor="ctr"/>
-          <a:lstStyle/>
-          <a:p>
-            <a:pPr algn="ctr"/>
-          </a:p>
-        </p:txBody>
-      </p:sp>
-      <p:sp>
-        <p:nvSpPr>
-          <p:cNvPr id="10" name="TextBox 9"/>
-          <p:cNvSpPr txBox="1"/>
-          <p:nvPr/>
-        </p:nvSpPr>
-        <p:spPr>
-          <a:xfrm>
-            <a:off x="4648200" y="2286000"/>
-            <a:ext cx="2865120" cy="365760"/>
-          </a:xfrm>
-          <a:prstGeom prst="rect">
-            <a:avLst/>
-          </a:prstGeom>
-          <a:noFill/>
-        </p:spPr>
-        <p:txBody>
-          <a:bodyPr wrap="square" anchor="t" lIns="0" rIns="0" tIns="0" bIns="0">
-            <a:spAutoFit/>
-          </a:bodyPr>
-          <a:lstStyle/>
-          <a:p>
-            <a:pPr algn="l">
-              <a:spcAft>
-                <a:spcPts val="585"/>
-              </a:spcAft>
-            </a:pPr>
-            <a:r>
-              <a:rPr sz="1300" b="1" i="0">
-                <a:solidFill>
-                  <a:srgbClr val="0B2D5B"/>
-                </a:solidFill>
-                <a:latin typeface="Inter Tight"/>
-              </a:rPr>
-              <a:t>ROHAN</a:t>
-            </a:r>
-          </a:p>
-        </p:txBody>
-      </p:sp>
-      <p:sp>
-        <p:nvSpPr>
-          <p:cNvPr id="11" name="TextBox 10"/>
-          <p:cNvSpPr txBox="1"/>
-          <p:nvPr/>
-        </p:nvSpPr>
-        <p:spPr>
-          <a:xfrm>
-            <a:off x="4648200" y="2743200"/>
-            <a:ext cx="2865120" cy="3017520"/>
-          </a:xfrm>
-          <a:prstGeom prst="rect">
-            <a:avLst/>
-          </a:prstGeom>
-          <a:noFill/>
-        </p:spPr>
-        <p:txBody>
-          <a:bodyPr wrap="square" anchor="t" lIns="0" rIns="0" tIns="0" bIns="0">
-            <a:spAutoFit/>
-          </a:bodyPr>
-          <a:lstStyle/>
-          <a:p>
-            <a:pPr algn="l">
-              <a:spcAft>
-                <a:spcPts val="810"/>
-              </a:spcAft>
-            </a:pPr>
-            <a:r>
-              <a:rPr sz="1800" b="0" i="0">
-                <a:solidFill>
-                  <a:srgbClr val="1C1B19"/>
-                </a:solidFill>
-                <a:latin typeface="Source Serif 4"/>
-              </a:rPr>
-              <a:t>Posts a story from a late study session at the library with three friends. Earlier that week, you mentioned you work Tuesday nights.</a:t>
-            </a:r>
-          </a:p>
-        </p:txBody>
-      </p:sp>
-      <p:sp>
-        <p:nvSpPr>
-          <p:cNvPr id="12" name="Rectangle 11"/>
-          <p:cNvSpPr/>
-          <p:nvPr/>
-        </p:nvSpPr>
-        <p:spPr>
-          <a:xfrm>
-            <a:off x="8016239" y="2103120"/>
-            <a:ext cx="3322320" cy="3840480"/>
-          </a:xfrm>
-          <a:prstGeom prst="rect">
-            <a:avLst/>
-          </a:prstGeom>
-          <a:solidFill>
-            <a:srgbClr val="FFFFFF"/>
-          </a:solidFill>
-          <a:ln w="15875">
-            <a:solidFill>
-              <a:srgbClr val="D8D2C6"/>
-            </a:solidFill>
-          </a:ln>
-          <a:effectLst/>
-        </p:spPr>
-        <p:style>
-          <a:lnRef idx="1">
-            <a:schemeClr val="accent1"/>
-          </a:lnRef>
-          <a:fillRef idx="3">
-            <a:schemeClr val="accent1"/>
-          </a:fillRef>
-          <a:effectRef idx="2">
-            <a:schemeClr val="accent1"/>
-          </a:effectRef>
-          <a:fontRef idx="minor">
-            <a:schemeClr val="lt1"/>
-          </a:fontRef>
-        </p:style>
-        <p:txBody>
-          <a:bodyPr rtlCol="0" anchor="ctr"/>
-          <a:lstStyle/>
-          <a:p>
-            <a:pPr algn="ctr"/>
-          </a:p>
-        </p:txBody>
-      </p:sp>
-      <p:sp>
-        <p:nvSpPr>
-          <p:cNvPr id="13" name="TextBox 12"/>
-          <p:cNvSpPr txBox="1"/>
-          <p:nvPr/>
-        </p:nvSpPr>
-        <p:spPr>
-          <a:xfrm>
-            <a:off x="8244839" y="2286000"/>
-            <a:ext cx="2865120" cy="365760"/>
-          </a:xfrm>
-          <a:prstGeom prst="rect">
-            <a:avLst/>
-          </a:prstGeom>
-          <a:noFill/>
-        </p:spPr>
-        <p:txBody>
-          <a:bodyPr wrap="square" anchor="t" lIns="0" rIns="0" tIns="0" bIns="0">
-            <a:spAutoFit/>
-          </a:bodyPr>
-          <a:lstStyle/>
-          <a:p>
-            <a:pPr algn="l">
-              <a:spcAft>
-                <a:spcPts val="585"/>
-              </a:spcAft>
-            </a:pPr>
-            <a:r>
-              <a:rPr sz="1300" b="1" i="0">
-                <a:solidFill>
-                  <a:srgbClr val="0B2D5B"/>
-                </a:solidFill>
-                <a:latin typeface="Inter Tight"/>
-              </a:rPr>
-              <a:t>THE LUNCH GROUP</a:t>
-            </a:r>
-          </a:p>
-        </p:txBody>
-      </p:sp>
-      <p:sp>
-        <p:nvSpPr>
-          <p:cNvPr id="14" name="TextBox 13"/>
-          <p:cNvSpPr txBox="1"/>
-          <p:nvPr/>
-        </p:nvSpPr>
-        <p:spPr>
-          <a:xfrm>
-            <a:off x="8244839" y="2743200"/>
-            <a:ext cx="2865120" cy="3017520"/>
-          </a:xfrm>
-          <a:prstGeom prst="rect">
-            <a:avLst/>
-          </a:prstGeom>
-          <a:noFill/>
-        </p:spPr>
-        <p:txBody>
-          <a:bodyPr wrap="square" anchor="t" lIns="0" rIns="0" tIns="0" bIns="0">
-            <a:spAutoFit/>
-          </a:bodyPr>
-          <a:lstStyle/>
-          <a:p>
-            <a:pPr algn="l">
-              <a:spcAft>
-                <a:spcPts val="810"/>
-              </a:spcAft>
-            </a:pPr>
-            <a:r>
-              <a:rPr sz="1800" b="0" i="0">
-                <a:solidFill>
-                  <a:srgbClr val="1C1B19"/>
-                </a:solidFill>
-                <a:latin typeface="Source Serif 4"/>
-              </a:rPr>
-              <a:t>For three weekends, plans happen in a separate chat. When you walk up, the talk stops. "It's nothing, just a small thing."</a:t>
+              <a:t>The guess (3), accident, drift, or on purpose with one scenario (3), one honest sentence (2), one move and the student page (2).</a:t>
             </a:r>
           </a:p>
         </p:txBody>

--- a/decks/the-third-wheel-lesson-v2.pptx
+++ b/decks/the-third-wheel-lesson-v2.pptx
@@ -6001,6 +6001,45 @@
                 <a:latin typeface="Inter Tight"/>
               </a:rPr>
               <a:t>Beaver Upper School · Counseling</a:t>
+            </a:r>
+          </a:p>
+        </p:txBody>
+      </p:sp>
+      <p:sp>
+        <p:nvSpPr>
+          <p:cNvPr id="8" name="TextBox 7"/>
+          <p:cNvSpPr txBox="1"/>
+          <p:nvPr/>
+        </p:nvSpPr>
+        <p:spPr>
+          <a:xfrm>
+            <a:off x="6766560" y="5897880"/>
+            <a:ext cx="4846320" cy="640080"/>
+          </a:xfrm>
+          <a:prstGeom prst="rect">
+            <a:avLst/>
+          </a:prstGeom>
+          <a:noFill/>
+        </p:spPr>
+        <p:txBody>
+          <a:bodyPr wrap="square" anchor="t" lIns="0" rIns="0" tIns="0" bIns="0">
+            <a:spAutoFit/>
+          </a:bodyPr>
+          <a:lstStyle/>
+          <a:p>
+            <a:pPr algn="r">
+              <a:spcAft>
+                <a:spcPts val="495"/>
+              </a:spcAft>
+            </a:pPr>
+            <a:r>
+              <a:rPr sz="1100" b="0" i="0">
+                <a:solidFill>
+                  <a:srgbClr val="E8E4DA"/>
+                </a:solidFill>
+                <a:latin typeface="Inter Tight"/>
+              </a:rPr>
+              <a:t>Written by Dr. Rick Wilson, with AI-assisted drafting. Every lesson is reviewed and edited by Dr. Wilson.</a:t>
             </a:r>
           </a:p>
         </p:txBody>
